--- a/docs/提交材料/答辩PPT.pptx
+++ b/docs/提交材料/答辩PPT.pptx
@@ -202,7 +202,7 @@
             </a:lvl1pPr>
           </a:lstStyle>
           <a:p>
-            <a:fld id="{8FE1DA8E-E7F7-4603-B25F-D155C7617741}" type="datetimeFigureOut">
+            <a:fld id="{674F6C53-26F5-48E8-B1C8-0019853847D6}" type="datetimeFigureOut">
               <a:rPr lang="zh-CN" altLang="en-US" smtClean="0"/>
               <a:t>2026/9/22</a:t>
             </a:fld>
@@ -360,7 +360,7 @@
             </a:lvl1pPr>
           </a:lstStyle>
           <a:p>
-            <a:fld id="{868690E2-4ACE-43C2-BAAC-762274EBCBB7}" type="slidenum">
+            <a:fld id="{C9F542EC-6771-454B-8AA4-C6BBEEA52160}" type="slidenum">
               <a:rPr lang="zh-CN" altLang="en-US" smtClean="0"/>
               <a:t>‹#›</a:t>
             </a:fld>
@@ -371,7 +371,7 @@
     </p:spTree>
     <p:extLst>
       <p:ext uri="{BB962C8B-B14F-4D97-AF65-F5344CB8AC3E}">
-        <p14:creationId xmlns:p14="http://schemas.microsoft.com/office/powerpoint/2010/main" val="2129580357"/>
+        <p14:creationId xmlns:p14="http://schemas.microsoft.com/office/powerpoint/2010/main" val="251876104"/>
       </p:ext>
     </p:extLst>
   </p:cSld>
@@ -573,7 +573,7 @@
           <a:bodyPr/>
           <a:lstStyle/>
           <a:p>
-            <a:fld id="{868690E2-4ACE-43C2-BAAC-762274EBCBB7}" type="slidenum">
+            <a:fld id="{C9F542EC-6771-454B-8AA4-C6BBEEA52160}" type="slidenum">
               <a:rPr lang="zh-CN" altLang="en-US" smtClean="0"/>
               <a:t>1</a:t>
             </a:fld>
@@ -584,7 +584,7 @@
     </p:spTree>
     <p:extLst>
       <p:ext uri="{BB962C8B-B14F-4D97-AF65-F5344CB8AC3E}">
-        <p14:creationId xmlns:p14="http://schemas.microsoft.com/office/powerpoint/2010/main" val="297092572"/>
+        <p14:creationId xmlns:p14="http://schemas.microsoft.com/office/powerpoint/2010/main" val="814447241"/>
       </p:ext>
     </p:extLst>
   </p:cSld>
@@ -680,7 +680,7 @@
           <a:bodyPr/>
           <a:lstStyle/>
           <a:p>
-            <a:fld id="{868690E2-4ACE-43C2-BAAC-762274EBCBB7}" type="slidenum">
+            <a:fld id="{C9F542EC-6771-454B-8AA4-C6BBEEA52160}" type="slidenum">
               <a:rPr lang="zh-CN" altLang="en-US" smtClean="0"/>
               <a:t>10</a:t>
             </a:fld>
@@ -691,7 +691,7 @@
     </p:spTree>
     <p:extLst>
       <p:ext uri="{BB962C8B-B14F-4D97-AF65-F5344CB8AC3E}">
-        <p14:creationId xmlns:p14="http://schemas.microsoft.com/office/powerpoint/2010/main" val="3527612726"/>
+        <p14:creationId xmlns:p14="http://schemas.microsoft.com/office/powerpoint/2010/main" val="2944027829"/>
       </p:ext>
     </p:extLst>
   </p:cSld>
@@ -771,7 +771,7 @@
           <a:bodyPr/>
           <a:lstStyle/>
           <a:p>
-            <a:fld id="{868690E2-4ACE-43C2-BAAC-762274EBCBB7}" type="slidenum">
+            <a:fld id="{C9F542EC-6771-454B-8AA4-C6BBEEA52160}" type="slidenum">
               <a:rPr lang="zh-CN" altLang="en-US" smtClean="0"/>
               <a:t>11</a:t>
             </a:fld>
@@ -782,7 +782,7 @@
     </p:spTree>
     <p:extLst>
       <p:ext uri="{BB962C8B-B14F-4D97-AF65-F5344CB8AC3E}">
-        <p14:creationId xmlns:p14="http://schemas.microsoft.com/office/powerpoint/2010/main" val="2316470814"/>
+        <p14:creationId xmlns:p14="http://schemas.microsoft.com/office/powerpoint/2010/main" val="1902030083"/>
       </p:ext>
     </p:extLst>
   </p:cSld>
@@ -862,7 +862,7 @@
           <a:bodyPr/>
           <a:lstStyle/>
           <a:p>
-            <a:fld id="{868690E2-4ACE-43C2-BAAC-762274EBCBB7}" type="slidenum">
+            <a:fld id="{C9F542EC-6771-454B-8AA4-C6BBEEA52160}" type="slidenum">
               <a:rPr lang="zh-CN" altLang="en-US" smtClean="0"/>
               <a:t>12</a:t>
             </a:fld>
@@ -873,7 +873,7 @@
     </p:spTree>
     <p:extLst>
       <p:ext uri="{BB962C8B-B14F-4D97-AF65-F5344CB8AC3E}">
-        <p14:creationId xmlns:p14="http://schemas.microsoft.com/office/powerpoint/2010/main" val="1691265491"/>
+        <p14:creationId xmlns:p14="http://schemas.microsoft.com/office/powerpoint/2010/main" val="1614497117"/>
       </p:ext>
     </p:extLst>
   </p:cSld>
@@ -953,7 +953,7 @@
           <a:bodyPr/>
           <a:lstStyle/>
           <a:p>
-            <a:fld id="{868690E2-4ACE-43C2-BAAC-762274EBCBB7}" type="slidenum">
+            <a:fld id="{C9F542EC-6771-454B-8AA4-C6BBEEA52160}" type="slidenum">
               <a:rPr lang="zh-CN" altLang="en-US" smtClean="0"/>
               <a:t>13</a:t>
             </a:fld>
@@ -964,7 +964,7 @@
     </p:spTree>
     <p:extLst>
       <p:ext uri="{BB962C8B-B14F-4D97-AF65-F5344CB8AC3E}">
-        <p14:creationId xmlns:p14="http://schemas.microsoft.com/office/powerpoint/2010/main" val="1846872326"/>
+        <p14:creationId xmlns:p14="http://schemas.microsoft.com/office/powerpoint/2010/main" val="2264103260"/>
       </p:ext>
     </p:extLst>
   </p:cSld>
@@ -1060,7 +1060,7 @@
           <a:bodyPr/>
           <a:lstStyle/>
           <a:p>
-            <a:fld id="{868690E2-4ACE-43C2-BAAC-762274EBCBB7}" type="slidenum">
+            <a:fld id="{C9F542EC-6771-454B-8AA4-C6BBEEA52160}" type="slidenum">
               <a:rPr lang="zh-CN" altLang="en-US" smtClean="0"/>
               <a:t>2</a:t>
             </a:fld>
@@ -1071,7 +1071,7 @@
     </p:spTree>
     <p:extLst>
       <p:ext uri="{BB962C8B-B14F-4D97-AF65-F5344CB8AC3E}">
-        <p14:creationId xmlns:p14="http://schemas.microsoft.com/office/powerpoint/2010/main" val="1760827128"/>
+        <p14:creationId xmlns:p14="http://schemas.microsoft.com/office/powerpoint/2010/main" val="1049305733"/>
       </p:ext>
     </p:extLst>
   </p:cSld>
@@ -1151,7 +1151,7 @@
           <a:bodyPr/>
           <a:lstStyle/>
           <a:p>
-            <a:fld id="{868690E2-4ACE-43C2-BAAC-762274EBCBB7}" type="slidenum">
+            <a:fld id="{C9F542EC-6771-454B-8AA4-C6BBEEA52160}" type="slidenum">
               <a:rPr lang="zh-CN" altLang="en-US" smtClean="0"/>
               <a:t>3</a:t>
             </a:fld>
@@ -1162,7 +1162,7 @@
     </p:spTree>
     <p:extLst>
       <p:ext uri="{BB962C8B-B14F-4D97-AF65-F5344CB8AC3E}">
-        <p14:creationId xmlns:p14="http://schemas.microsoft.com/office/powerpoint/2010/main" val="2587105652"/>
+        <p14:creationId xmlns:p14="http://schemas.microsoft.com/office/powerpoint/2010/main" val="2006229914"/>
       </p:ext>
     </p:extLst>
   </p:cSld>
@@ -1258,7 +1258,7 @@
           <a:bodyPr/>
           <a:lstStyle/>
           <a:p>
-            <a:fld id="{868690E2-4ACE-43C2-BAAC-762274EBCBB7}" type="slidenum">
+            <a:fld id="{C9F542EC-6771-454B-8AA4-C6BBEEA52160}" type="slidenum">
               <a:rPr lang="zh-CN" altLang="en-US" smtClean="0"/>
               <a:t>4</a:t>
             </a:fld>
@@ -1269,7 +1269,7 @@
     </p:spTree>
     <p:extLst>
       <p:ext uri="{BB962C8B-B14F-4D97-AF65-F5344CB8AC3E}">
-        <p14:creationId xmlns:p14="http://schemas.microsoft.com/office/powerpoint/2010/main" val="3736037321"/>
+        <p14:creationId xmlns:p14="http://schemas.microsoft.com/office/powerpoint/2010/main" val="905478798"/>
       </p:ext>
     </p:extLst>
   </p:cSld>
@@ -1365,7 +1365,7 @@
           <a:bodyPr/>
           <a:lstStyle/>
           <a:p>
-            <a:fld id="{868690E2-4ACE-43C2-BAAC-762274EBCBB7}" type="slidenum">
+            <a:fld id="{C9F542EC-6771-454B-8AA4-C6BBEEA52160}" type="slidenum">
               <a:rPr lang="zh-CN" altLang="en-US" smtClean="0"/>
               <a:t>5</a:t>
             </a:fld>
@@ -1376,7 +1376,7 @@
     </p:spTree>
     <p:extLst>
       <p:ext uri="{BB962C8B-B14F-4D97-AF65-F5344CB8AC3E}">
-        <p14:creationId xmlns:p14="http://schemas.microsoft.com/office/powerpoint/2010/main" val="3962488538"/>
+        <p14:creationId xmlns:p14="http://schemas.microsoft.com/office/powerpoint/2010/main" val="1481527021"/>
       </p:ext>
     </p:extLst>
   </p:cSld>
@@ -1456,7 +1456,7 @@
           <a:bodyPr/>
           <a:lstStyle/>
           <a:p>
-            <a:fld id="{868690E2-4ACE-43C2-BAAC-762274EBCBB7}" type="slidenum">
+            <a:fld id="{C9F542EC-6771-454B-8AA4-C6BBEEA52160}" type="slidenum">
               <a:rPr lang="zh-CN" altLang="en-US" smtClean="0"/>
               <a:t>6</a:t>
             </a:fld>
@@ -1467,7 +1467,7 @@
     </p:spTree>
     <p:extLst>
       <p:ext uri="{BB962C8B-B14F-4D97-AF65-F5344CB8AC3E}">
-        <p14:creationId xmlns:p14="http://schemas.microsoft.com/office/powerpoint/2010/main" val="1668749218"/>
+        <p14:creationId xmlns:p14="http://schemas.microsoft.com/office/powerpoint/2010/main" val="2209869128"/>
       </p:ext>
     </p:extLst>
   </p:cSld>
@@ -1547,7 +1547,7 @@
           <a:bodyPr/>
           <a:lstStyle/>
           <a:p>
-            <a:fld id="{868690E2-4ACE-43C2-BAAC-762274EBCBB7}" type="slidenum">
+            <a:fld id="{C9F542EC-6771-454B-8AA4-C6BBEEA52160}" type="slidenum">
               <a:rPr lang="zh-CN" altLang="en-US" smtClean="0"/>
               <a:t>7</a:t>
             </a:fld>
@@ -1558,7 +1558,7 @@
     </p:spTree>
     <p:extLst>
       <p:ext uri="{BB962C8B-B14F-4D97-AF65-F5344CB8AC3E}">
-        <p14:creationId xmlns:p14="http://schemas.microsoft.com/office/powerpoint/2010/main" val="3771947202"/>
+        <p14:creationId xmlns:p14="http://schemas.microsoft.com/office/powerpoint/2010/main" val="2187103243"/>
       </p:ext>
     </p:extLst>
   </p:cSld>
@@ -1670,7 +1670,7 @@
           <a:bodyPr/>
           <a:lstStyle/>
           <a:p>
-            <a:fld id="{868690E2-4ACE-43C2-BAAC-762274EBCBB7}" type="slidenum">
+            <a:fld id="{C9F542EC-6771-454B-8AA4-C6BBEEA52160}" type="slidenum">
               <a:rPr lang="zh-CN" altLang="en-US" smtClean="0"/>
               <a:t>8</a:t>
             </a:fld>
@@ -1681,7 +1681,7 @@
     </p:spTree>
     <p:extLst>
       <p:ext uri="{BB962C8B-B14F-4D97-AF65-F5344CB8AC3E}">
-        <p14:creationId xmlns:p14="http://schemas.microsoft.com/office/powerpoint/2010/main" val="1384342983"/>
+        <p14:creationId xmlns:p14="http://schemas.microsoft.com/office/powerpoint/2010/main" val="2380392495"/>
       </p:ext>
     </p:extLst>
   </p:cSld>
@@ -1761,7 +1761,7 @@
           <a:bodyPr/>
           <a:lstStyle/>
           <a:p>
-            <a:fld id="{868690E2-4ACE-43C2-BAAC-762274EBCBB7}" type="slidenum">
+            <a:fld id="{C9F542EC-6771-454B-8AA4-C6BBEEA52160}" type="slidenum">
               <a:rPr lang="zh-CN" altLang="en-US" smtClean="0"/>
               <a:t>9</a:t>
             </a:fld>
@@ -1772,7 +1772,7 @@
     </p:spTree>
     <p:extLst>
       <p:ext uri="{BB962C8B-B14F-4D97-AF65-F5344CB8AC3E}">
-        <p14:creationId xmlns:p14="http://schemas.microsoft.com/office/powerpoint/2010/main" val="4209312517"/>
+        <p14:creationId xmlns:p14="http://schemas.microsoft.com/office/powerpoint/2010/main" val="3942201287"/>
       </p:ext>
     </p:extLst>
   </p:cSld>
@@ -1804,7 +1804,7 @@
           <p:cNvPr id="2" name="标题 1">
             <a:extLst>
               <a:ext uri="{FF2B5EF4-FFF2-40B4-BE49-F238E27FC236}">
-                <a16:creationId xmlns:a16="http://schemas.microsoft.com/office/drawing/2014/main" id="{CAD701DC-06A3-F390-78E1-65524C7BB96E}"/>
+                <a16:creationId xmlns:a16="http://schemas.microsoft.com/office/drawing/2014/main" id="{7D32FC04-27A6-1324-26A5-145CEFC814F8}"/>
               </a:ext>
             </a:extLst>
           </p:cNvPr>
@@ -1841,7 +1841,7 @@
           <p:cNvPr id="3" name="副标题 2">
             <a:extLst>
               <a:ext uri="{FF2B5EF4-FFF2-40B4-BE49-F238E27FC236}">
-                <a16:creationId xmlns:a16="http://schemas.microsoft.com/office/drawing/2014/main" id="{2C2AED99-A7C3-D9D6-273F-EC7394B428FD}"/>
+                <a16:creationId xmlns:a16="http://schemas.microsoft.com/office/drawing/2014/main" id="{F81DC225-FA59-CECC-2B13-B4C444D0C652}"/>
               </a:ext>
             </a:extLst>
           </p:cNvPr>
@@ -1911,7 +1911,7 @@
           <p:cNvPr id="4" name="日期占位符 3">
             <a:extLst>
               <a:ext uri="{FF2B5EF4-FFF2-40B4-BE49-F238E27FC236}">
-                <a16:creationId xmlns:a16="http://schemas.microsoft.com/office/drawing/2014/main" id="{EABDD3E2-DFEB-6D94-0F0A-7CA4AE8283CD}"/>
+                <a16:creationId xmlns:a16="http://schemas.microsoft.com/office/drawing/2014/main" id="{6D9F6E13-1557-2D14-F0CB-8F40CBC7C5A6}"/>
               </a:ext>
             </a:extLst>
           </p:cNvPr>
@@ -1927,7 +1927,7 @@
           <a:bodyPr/>
           <a:lstStyle/>
           <a:p>
-            <a:fld id="{6E22F503-1B7A-49E7-84E3-A31A5520663F}" type="datetimeFigureOut">
+            <a:fld id="{E9E706D5-8B20-4F05-BE41-D342EF88F631}" type="datetimeFigureOut">
               <a:rPr lang="zh-CN" altLang="en-US" smtClean="0"/>
               <a:t>2026/9/22</a:t>
             </a:fld>
@@ -1940,7 +1940,7 @@
           <p:cNvPr id="5" name="页脚占位符 4">
             <a:extLst>
               <a:ext uri="{FF2B5EF4-FFF2-40B4-BE49-F238E27FC236}">
-                <a16:creationId xmlns:a16="http://schemas.microsoft.com/office/drawing/2014/main" id="{D599604E-FEA6-689F-2FF8-3A45BE803354}"/>
+                <a16:creationId xmlns:a16="http://schemas.microsoft.com/office/drawing/2014/main" id="{1001ECA4-395B-61ED-9CB0-95067A0C89C6}"/>
               </a:ext>
             </a:extLst>
           </p:cNvPr>
@@ -1965,7 +1965,7 @@
           <p:cNvPr id="6" name="灯片编号占位符 5">
             <a:extLst>
               <a:ext uri="{FF2B5EF4-FFF2-40B4-BE49-F238E27FC236}">
-                <a16:creationId xmlns:a16="http://schemas.microsoft.com/office/drawing/2014/main" id="{311D183B-2BF9-E8D6-8E48-441C0D597D12}"/>
+                <a16:creationId xmlns:a16="http://schemas.microsoft.com/office/drawing/2014/main" id="{D969C8F4-8ABC-AA3D-1AC7-71F59892DB88}"/>
               </a:ext>
             </a:extLst>
           </p:cNvPr>
@@ -1981,7 +1981,7 @@
           <a:bodyPr/>
           <a:lstStyle/>
           <a:p>
-            <a:fld id="{44C30B3E-84D1-4F9E-BCCB-B7620D0196FB}" type="slidenum">
+            <a:fld id="{2A24213B-46FC-451A-8A57-C8A7998794E3}" type="slidenum">
               <a:rPr lang="zh-CN" altLang="en-US" smtClean="0"/>
               <a:t>‹#›</a:t>
             </a:fld>
@@ -1992,7 +1992,7 @@
     </p:spTree>
     <p:extLst>
       <p:ext uri="{BB962C8B-B14F-4D97-AF65-F5344CB8AC3E}">
-        <p14:creationId xmlns:p14="http://schemas.microsoft.com/office/powerpoint/2010/main" val="1176564444"/>
+        <p14:creationId xmlns:p14="http://schemas.microsoft.com/office/powerpoint/2010/main" val="216627665"/>
       </p:ext>
     </p:extLst>
   </p:cSld>
@@ -2024,7 +2024,7 @@
           <p:cNvPr id="2" name="标题 1">
             <a:extLst>
               <a:ext uri="{FF2B5EF4-FFF2-40B4-BE49-F238E27FC236}">
-                <a16:creationId xmlns:a16="http://schemas.microsoft.com/office/drawing/2014/main" id="{81F07DEE-45D0-075E-3CAD-C40637DBE461}"/>
+                <a16:creationId xmlns:a16="http://schemas.microsoft.com/office/drawing/2014/main" id="{7ACBC84C-473B-DC0B-21B3-C94EE90C3183}"/>
               </a:ext>
             </a:extLst>
           </p:cNvPr>
@@ -2052,7 +2052,7 @@
           <p:cNvPr id="3" name="竖排文字占位符 2">
             <a:extLst>
               <a:ext uri="{FF2B5EF4-FFF2-40B4-BE49-F238E27FC236}">
-                <a16:creationId xmlns:a16="http://schemas.microsoft.com/office/drawing/2014/main" id="{F8987509-F8A3-88A0-057A-E07B67F3D271}"/>
+                <a16:creationId xmlns:a16="http://schemas.microsoft.com/office/drawing/2014/main" id="{14C07DD3-B305-B22E-6A5D-A2476BBAFA8F}"/>
               </a:ext>
             </a:extLst>
           </p:cNvPr>
@@ -2109,7 +2109,7 @@
           <p:cNvPr id="4" name="日期占位符 3">
             <a:extLst>
               <a:ext uri="{FF2B5EF4-FFF2-40B4-BE49-F238E27FC236}">
-                <a16:creationId xmlns:a16="http://schemas.microsoft.com/office/drawing/2014/main" id="{15DE43DE-CB77-23D3-5BB3-B918FB99B609}"/>
+                <a16:creationId xmlns:a16="http://schemas.microsoft.com/office/drawing/2014/main" id="{6B477FEF-FF4A-2073-C03D-CDBF14AAF32D}"/>
               </a:ext>
             </a:extLst>
           </p:cNvPr>
@@ -2125,7 +2125,7 @@
           <a:bodyPr/>
           <a:lstStyle/>
           <a:p>
-            <a:fld id="{6E22F503-1B7A-49E7-84E3-A31A5520663F}" type="datetimeFigureOut">
+            <a:fld id="{E9E706D5-8B20-4F05-BE41-D342EF88F631}" type="datetimeFigureOut">
               <a:rPr lang="zh-CN" altLang="en-US" smtClean="0"/>
               <a:t>2026/9/22</a:t>
             </a:fld>
@@ -2138,7 +2138,7 @@
           <p:cNvPr id="5" name="页脚占位符 4">
             <a:extLst>
               <a:ext uri="{FF2B5EF4-FFF2-40B4-BE49-F238E27FC236}">
-                <a16:creationId xmlns:a16="http://schemas.microsoft.com/office/drawing/2014/main" id="{6EE226F5-51EA-BE45-9C89-71688BB6A25E}"/>
+                <a16:creationId xmlns:a16="http://schemas.microsoft.com/office/drawing/2014/main" id="{BA776AAD-F3CD-A0A7-DAC7-347CEBC7F69D}"/>
               </a:ext>
             </a:extLst>
           </p:cNvPr>
@@ -2163,7 +2163,7 @@
           <p:cNvPr id="6" name="灯片编号占位符 5">
             <a:extLst>
               <a:ext uri="{FF2B5EF4-FFF2-40B4-BE49-F238E27FC236}">
-                <a16:creationId xmlns:a16="http://schemas.microsoft.com/office/drawing/2014/main" id="{675F5D9C-0AB9-2036-D8F3-F12050F46B53}"/>
+                <a16:creationId xmlns:a16="http://schemas.microsoft.com/office/drawing/2014/main" id="{8FA659D7-B659-2B90-6883-66870910F48D}"/>
               </a:ext>
             </a:extLst>
           </p:cNvPr>
@@ -2179,7 +2179,7 @@
           <a:bodyPr/>
           <a:lstStyle/>
           <a:p>
-            <a:fld id="{44C30B3E-84D1-4F9E-BCCB-B7620D0196FB}" type="slidenum">
+            <a:fld id="{2A24213B-46FC-451A-8A57-C8A7998794E3}" type="slidenum">
               <a:rPr lang="zh-CN" altLang="en-US" smtClean="0"/>
               <a:t>‹#›</a:t>
             </a:fld>
@@ -2190,7 +2190,7 @@
     </p:spTree>
     <p:extLst>
       <p:ext uri="{BB962C8B-B14F-4D97-AF65-F5344CB8AC3E}">
-        <p14:creationId xmlns:p14="http://schemas.microsoft.com/office/powerpoint/2010/main" val="3928145940"/>
+        <p14:creationId xmlns:p14="http://schemas.microsoft.com/office/powerpoint/2010/main" val="920034657"/>
       </p:ext>
     </p:extLst>
   </p:cSld>
@@ -2222,7 +2222,7 @@
           <p:cNvPr id="2" name="竖排标题 1">
             <a:extLst>
               <a:ext uri="{FF2B5EF4-FFF2-40B4-BE49-F238E27FC236}">
-                <a16:creationId xmlns:a16="http://schemas.microsoft.com/office/drawing/2014/main" id="{6DC6128C-7CF9-08F2-20F0-B92B01241C48}"/>
+                <a16:creationId xmlns:a16="http://schemas.microsoft.com/office/drawing/2014/main" id="{42D5D046-7FB0-0DF4-3FAE-93B511B8E95C}"/>
               </a:ext>
             </a:extLst>
           </p:cNvPr>
@@ -2255,7 +2255,7 @@
           <p:cNvPr id="3" name="竖排文字占位符 2">
             <a:extLst>
               <a:ext uri="{FF2B5EF4-FFF2-40B4-BE49-F238E27FC236}">
-                <a16:creationId xmlns:a16="http://schemas.microsoft.com/office/drawing/2014/main" id="{56455F11-A02D-24EA-6209-FA8C0D4A4383}"/>
+                <a16:creationId xmlns:a16="http://schemas.microsoft.com/office/drawing/2014/main" id="{ECC7A44B-4805-8A20-9B88-EF2F1080A894}"/>
               </a:ext>
             </a:extLst>
           </p:cNvPr>
@@ -2317,7 +2317,7 @@
           <p:cNvPr id="4" name="日期占位符 3">
             <a:extLst>
               <a:ext uri="{FF2B5EF4-FFF2-40B4-BE49-F238E27FC236}">
-                <a16:creationId xmlns:a16="http://schemas.microsoft.com/office/drawing/2014/main" id="{67809361-40D8-98EB-219E-1B5BD8654FA6}"/>
+                <a16:creationId xmlns:a16="http://schemas.microsoft.com/office/drawing/2014/main" id="{F134D671-C42F-5436-3E2B-7F3EE0DBBCB0}"/>
               </a:ext>
             </a:extLst>
           </p:cNvPr>
@@ -2333,7 +2333,7 @@
           <a:bodyPr/>
           <a:lstStyle/>
           <a:p>
-            <a:fld id="{6E22F503-1B7A-49E7-84E3-A31A5520663F}" type="datetimeFigureOut">
+            <a:fld id="{E9E706D5-8B20-4F05-BE41-D342EF88F631}" type="datetimeFigureOut">
               <a:rPr lang="zh-CN" altLang="en-US" smtClean="0"/>
               <a:t>2026/9/22</a:t>
             </a:fld>
@@ -2346,7 +2346,7 @@
           <p:cNvPr id="5" name="页脚占位符 4">
             <a:extLst>
               <a:ext uri="{FF2B5EF4-FFF2-40B4-BE49-F238E27FC236}">
-                <a16:creationId xmlns:a16="http://schemas.microsoft.com/office/drawing/2014/main" id="{1D18D5AB-F1C4-DA94-0DD5-BA1C48FB6722}"/>
+                <a16:creationId xmlns:a16="http://schemas.microsoft.com/office/drawing/2014/main" id="{64B8A8E2-6B83-2576-DE09-AD16EB3B9B19}"/>
               </a:ext>
             </a:extLst>
           </p:cNvPr>
@@ -2371,7 +2371,7 @@
           <p:cNvPr id="6" name="灯片编号占位符 5">
             <a:extLst>
               <a:ext uri="{FF2B5EF4-FFF2-40B4-BE49-F238E27FC236}">
-                <a16:creationId xmlns:a16="http://schemas.microsoft.com/office/drawing/2014/main" id="{A74061DF-BC23-C498-1017-D8ACC742B03E}"/>
+                <a16:creationId xmlns:a16="http://schemas.microsoft.com/office/drawing/2014/main" id="{1EA01027-884D-5232-A0EE-7A750446E0AC}"/>
               </a:ext>
             </a:extLst>
           </p:cNvPr>
@@ -2387,7 +2387,7 @@
           <a:bodyPr/>
           <a:lstStyle/>
           <a:p>
-            <a:fld id="{44C30B3E-84D1-4F9E-BCCB-B7620D0196FB}" type="slidenum">
+            <a:fld id="{2A24213B-46FC-451A-8A57-C8A7998794E3}" type="slidenum">
               <a:rPr lang="zh-CN" altLang="en-US" smtClean="0"/>
               <a:t>‹#›</a:t>
             </a:fld>
@@ -2398,7 +2398,7 @@
     </p:spTree>
     <p:extLst>
       <p:ext uri="{BB962C8B-B14F-4D97-AF65-F5344CB8AC3E}">
-        <p14:creationId xmlns:p14="http://schemas.microsoft.com/office/powerpoint/2010/main" val="1545022771"/>
+        <p14:creationId xmlns:p14="http://schemas.microsoft.com/office/powerpoint/2010/main" val="2585112082"/>
       </p:ext>
     </p:extLst>
   </p:cSld>
@@ -2430,7 +2430,7 @@
           <p:cNvPr id="2" name="标题 1">
             <a:extLst>
               <a:ext uri="{FF2B5EF4-FFF2-40B4-BE49-F238E27FC236}">
-                <a16:creationId xmlns:a16="http://schemas.microsoft.com/office/drawing/2014/main" id="{6E1133E6-18B2-2C27-B3E4-D3C0613C5F96}"/>
+                <a16:creationId xmlns:a16="http://schemas.microsoft.com/office/drawing/2014/main" id="{66D5615B-0C9D-676E-B1FA-1D705F370F6D}"/>
               </a:ext>
             </a:extLst>
           </p:cNvPr>
@@ -2458,7 +2458,7 @@
           <p:cNvPr id="3" name="内容占位符 2">
             <a:extLst>
               <a:ext uri="{FF2B5EF4-FFF2-40B4-BE49-F238E27FC236}">
-                <a16:creationId xmlns:a16="http://schemas.microsoft.com/office/drawing/2014/main" id="{848563B8-F1F6-0CB1-D421-97B8D670BD2A}"/>
+                <a16:creationId xmlns:a16="http://schemas.microsoft.com/office/drawing/2014/main" id="{53841DF6-7064-8D26-09B4-4683E90CD631}"/>
               </a:ext>
             </a:extLst>
           </p:cNvPr>
@@ -2515,7 +2515,7 @@
           <p:cNvPr id="4" name="日期占位符 3">
             <a:extLst>
               <a:ext uri="{FF2B5EF4-FFF2-40B4-BE49-F238E27FC236}">
-                <a16:creationId xmlns:a16="http://schemas.microsoft.com/office/drawing/2014/main" id="{FEF06CDE-1952-C300-7A7A-A3D15E656420}"/>
+                <a16:creationId xmlns:a16="http://schemas.microsoft.com/office/drawing/2014/main" id="{F3DED831-3141-0337-B7A8-472343CC00E9}"/>
               </a:ext>
             </a:extLst>
           </p:cNvPr>
@@ -2531,7 +2531,7 @@
           <a:bodyPr/>
           <a:lstStyle/>
           <a:p>
-            <a:fld id="{6E22F503-1B7A-49E7-84E3-A31A5520663F}" type="datetimeFigureOut">
+            <a:fld id="{E9E706D5-8B20-4F05-BE41-D342EF88F631}" type="datetimeFigureOut">
               <a:rPr lang="zh-CN" altLang="en-US" smtClean="0"/>
               <a:t>2026/9/22</a:t>
             </a:fld>
@@ -2544,7 +2544,7 @@
           <p:cNvPr id="5" name="页脚占位符 4">
             <a:extLst>
               <a:ext uri="{FF2B5EF4-FFF2-40B4-BE49-F238E27FC236}">
-                <a16:creationId xmlns:a16="http://schemas.microsoft.com/office/drawing/2014/main" id="{DE928C3B-9BF7-CBD8-1975-6774E8EBDF47}"/>
+                <a16:creationId xmlns:a16="http://schemas.microsoft.com/office/drawing/2014/main" id="{CC91E79A-C900-F0D2-4517-0733D8F00CAF}"/>
               </a:ext>
             </a:extLst>
           </p:cNvPr>
@@ -2569,7 +2569,7 @@
           <p:cNvPr id="6" name="灯片编号占位符 5">
             <a:extLst>
               <a:ext uri="{FF2B5EF4-FFF2-40B4-BE49-F238E27FC236}">
-                <a16:creationId xmlns:a16="http://schemas.microsoft.com/office/drawing/2014/main" id="{68F08CF7-4DF7-C7C4-359F-1281F837C8D7}"/>
+                <a16:creationId xmlns:a16="http://schemas.microsoft.com/office/drawing/2014/main" id="{ED2E0C45-79FC-3CCE-CFF2-9C12F49ADF50}"/>
               </a:ext>
             </a:extLst>
           </p:cNvPr>
@@ -2585,7 +2585,7 @@
           <a:bodyPr/>
           <a:lstStyle/>
           <a:p>
-            <a:fld id="{44C30B3E-84D1-4F9E-BCCB-B7620D0196FB}" type="slidenum">
+            <a:fld id="{2A24213B-46FC-451A-8A57-C8A7998794E3}" type="slidenum">
               <a:rPr lang="zh-CN" altLang="en-US" smtClean="0"/>
               <a:t>‹#›</a:t>
             </a:fld>
@@ -2596,7 +2596,7 @@
     </p:spTree>
     <p:extLst>
       <p:ext uri="{BB962C8B-B14F-4D97-AF65-F5344CB8AC3E}">
-        <p14:creationId xmlns:p14="http://schemas.microsoft.com/office/powerpoint/2010/main" val="3017888222"/>
+        <p14:creationId xmlns:p14="http://schemas.microsoft.com/office/powerpoint/2010/main" val="3068401811"/>
       </p:ext>
     </p:extLst>
   </p:cSld>
@@ -2628,7 +2628,7 @@
           <p:cNvPr id="2" name="标题 1">
             <a:extLst>
               <a:ext uri="{FF2B5EF4-FFF2-40B4-BE49-F238E27FC236}">
-                <a16:creationId xmlns:a16="http://schemas.microsoft.com/office/drawing/2014/main" id="{DE183DCD-C0C2-F8AD-92FA-246AE9B4BB7E}"/>
+                <a16:creationId xmlns:a16="http://schemas.microsoft.com/office/drawing/2014/main" id="{ECC85E37-CB00-860E-AB9C-BB5D29CEBCB1}"/>
               </a:ext>
             </a:extLst>
           </p:cNvPr>
@@ -2665,7 +2665,7 @@
           <p:cNvPr id="3" name="文本占位符 2">
             <a:extLst>
               <a:ext uri="{FF2B5EF4-FFF2-40B4-BE49-F238E27FC236}">
-                <a16:creationId xmlns:a16="http://schemas.microsoft.com/office/drawing/2014/main" id="{BDA86C2D-B03C-302E-7759-2F0FA3D81BAC}"/>
+                <a16:creationId xmlns:a16="http://schemas.microsoft.com/office/drawing/2014/main" id="{A71943F1-41F7-5B1D-E80E-BFDEE7AF853A}"/>
               </a:ext>
             </a:extLst>
           </p:cNvPr>
@@ -2790,7 +2790,7 @@
           <p:cNvPr id="4" name="日期占位符 3">
             <a:extLst>
               <a:ext uri="{FF2B5EF4-FFF2-40B4-BE49-F238E27FC236}">
-                <a16:creationId xmlns:a16="http://schemas.microsoft.com/office/drawing/2014/main" id="{DE843F1D-DCA7-947F-8475-C0B42DC710EE}"/>
+                <a16:creationId xmlns:a16="http://schemas.microsoft.com/office/drawing/2014/main" id="{C02588F4-5913-A821-9B3D-A84C6AB90988}"/>
               </a:ext>
             </a:extLst>
           </p:cNvPr>
@@ -2806,7 +2806,7 @@
           <a:bodyPr/>
           <a:lstStyle/>
           <a:p>
-            <a:fld id="{6E22F503-1B7A-49E7-84E3-A31A5520663F}" type="datetimeFigureOut">
+            <a:fld id="{E9E706D5-8B20-4F05-BE41-D342EF88F631}" type="datetimeFigureOut">
               <a:rPr lang="zh-CN" altLang="en-US" smtClean="0"/>
               <a:t>2026/9/22</a:t>
             </a:fld>
@@ -2819,7 +2819,7 @@
           <p:cNvPr id="5" name="页脚占位符 4">
             <a:extLst>
               <a:ext uri="{FF2B5EF4-FFF2-40B4-BE49-F238E27FC236}">
-                <a16:creationId xmlns:a16="http://schemas.microsoft.com/office/drawing/2014/main" id="{B8E5D4D2-CA48-EEBD-4B20-6EC3D2DBCA1D}"/>
+                <a16:creationId xmlns:a16="http://schemas.microsoft.com/office/drawing/2014/main" id="{1D08E3B6-ADA5-71C1-0BC9-36EB6AF7D4BB}"/>
               </a:ext>
             </a:extLst>
           </p:cNvPr>
@@ -2844,7 +2844,7 @@
           <p:cNvPr id="6" name="灯片编号占位符 5">
             <a:extLst>
               <a:ext uri="{FF2B5EF4-FFF2-40B4-BE49-F238E27FC236}">
-                <a16:creationId xmlns:a16="http://schemas.microsoft.com/office/drawing/2014/main" id="{6E54065F-8653-CE94-001C-062D1E34C8C6}"/>
+                <a16:creationId xmlns:a16="http://schemas.microsoft.com/office/drawing/2014/main" id="{ED2BE140-909B-7663-BBC3-1EC123050418}"/>
               </a:ext>
             </a:extLst>
           </p:cNvPr>
@@ -2860,7 +2860,7 @@
           <a:bodyPr/>
           <a:lstStyle/>
           <a:p>
-            <a:fld id="{44C30B3E-84D1-4F9E-BCCB-B7620D0196FB}" type="slidenum">
+            <a:fld id="{2A24213B-46FC-451A-8A57-C8A7998794E3}" type="slidenum">
               <a:rPr lang="zh-CN" altLang="en-US" smtClean="0"/>
               <a:t>‹#›</a:t>
             </a:fld>
@@ -2871,7 +2871,7 @@
     </p:spTree>
     <p:extLst>
       <p:ext uri="{BB962C8B-B14F-4D97-AF65-F5344CB8AC3E}">
-        <p14:creationId xmlns:p14="http://schemas.microsoft.com/office/powerpoint/2010/main" val="2734856334"/>
+        <p14:creationId xmlns:p14="http://schemas.microsoft.com/office/powerpoint/2010/main" val="581501434"/>
       </p:ext>
     </p:extLst>
   </p:cSld>
@@ -2903,7 +2903,7 @@
           <p:cNvPr id="2" name="标题 1">
             <a:extLst>
               <a:ext uri="{FF2B5EF4-FFF2-40B4-BE49-F238E27FC236}">
-                <a16:creationId xmlns:a16="http://schemas.microsoft.com/office/drawing/2014/main" id="{B9286259-8AE8-4C9E-6BD5-48317497B79D}"/>
+                <a16:creationId xmlns:a16="http://schemas.microsoft.com/office/drawing/2014/main" id="{8E495EFF-174B-4B15-0B24-5580A0F13701}"/>
               </a:ext>
             </a:extLst>
           </p:cNvPr>
@@ -2931,7 +2931,7 @@
           <p:cNvPr id="3" name="内容占位符 2">
             <a:extLst>
               <a:ext uri="{FF2B5EF4-FFF2-40B4-BE49-F238E27FC236}">
-                <a16:creationId xmlns:a16="http://schemas.microsoft.com/office/drawing/2014/main" id="{9C8F766A-8A39-7FB7-6D64-09A4525899AA}"/>
+                <a16:creationId xmlns:a16="http://schemas.microsoft.com/office/drawing/2014/main" id="{26F422D5-78AC-8F05-33F8-495A33593376}"/>
               </a:ext>
             </a:extLst>
           </p:cNvPr>
@@ -2993,7 +2993,7 @@
           <p:cNvPr id="4" name="内容占位符 3">
             <a:extLst>
               <a:ext uri="{FF2B5EF4-FFF2-40B4-BE49-F238E27FC236}">
-                <a16:creationId xmlns:a16="http://schemas.microsoft.com/office/drawing/2014/main" id="{ACE8FA52-AB33-94D7-2B00-DFE105DA0024}"/>
+                <a16:creationId xmlns:a16="http://schemas.microsoft.com/office/drawing/2014/main" id="{6723F31D-7F64-4F92-A7B0-E79D86D4C2E7}"/>
               </a:ext>
             </a:extLst>
           </p:cNvPr>
@@ -3055,7 +3055,7 @@
           <p:cNvPr id="5" name="日期占位符 4">
             <a:extLst>
               <a:ext uri="{FF2B5EF4-FFF2-40B4-BE49-F238E27FC236}">
-                <a16:creationId xmlns:a16="http://schemas.microsoft.com/office/drawing/2014/main" id="{A00805AE-187E-206B-D516-98671944D780}"/>
+                <a16:creationId xmlns:a16="http://schemas.microsoft.com/office/drawing/2014/main" id="{0DF5DED3-C6DA-F83C-B706-E99C073956B4}"/>
               </a:ext>
             </a:extLst>
           </p:cNvPr>
@@ -3071,7 +3071,7 @@
           <a:bodyPr/>
           <a:lstStyle/>
           <a:p>
-            <a:fld id="{6E22F503-1B7A-49E7-84E3-A31A5520663F}" type="datetimeFigureOut">
+            <a:fld id="{E9E706D5-8B20-4F05-BE41-D342EF88F631}" type="datetimeFigureOut">
               <a:rPr lang="zh-CN" altLang="en-US" smtClean="0"/>
               <a:t>2026/9/22</a:t>
             </a:fld>
@@ -3084,7 +3084,7 @@
           <p:cNvPr id="6" name="页脚占位符 5">
             <a:extLst>
               <a:ext uri="{FF2B5EF4-FFF2-40B4-BE49-F238E27FC236}">
-                <a16:creationId xmlns:a16="http://schemas.microsoft.com/office/drawing/2014/main" id="{00E1840C-F0B0-606C-4FE9-9339C1EA8843}"/>
+                <a16:creationId xmlns:a16="http://schemas.microsoft.com/office/drawing/2014/main" id="{AB240A57-A448-E80E-430C-7B618DEE569A}"/>
               </a:ext>
             </a:extLst>
           </p:cNvPr>
@@ -3109,7 +3109,7 @@
           <p:cNvPr id="7" name="灯片编号占位符 6">
             <a:extLst>
               <a:ext uri="{FF2B5EF4-FFF2-40B4-BE49-F238E27FC236}">
-                <a16:creationId xmlns:a16="http://schemas.microsoft.com/office/drawing/2014/main" id="{5692FC3B-E46C-CA2B-B27D-E4219A6598CE}"/>
+                <a16:creationId xmlns:a16="http://schemas.microsoft.com/office/drawing/2014/main" id="{EF925F7A-29D2-3D8B-D7FB-6FE7A0B3EC55}"/>
               </a:ext>
             </a:extLst>
           </p:cNvPr>
@@ -3125,7 +3125,7 @@
           <a:bodyPr/>
           <a:lstStyle/>
           <a:p>
-            <a:fld id="{44C30B3E-84D1-4F9E-BCCB-B7620D0196FB}" type="slidenum">
+            <a:fld id="{2A24213B-46FC-451A-8A57-C8A7998794E3}" type="slidenum">
               <a:rPr lang="zh-CN" altLang="en-US" smtClean="0"/>
               <a:t>‹#›</a:t>
             </a:fld>
@@ -3136,7 +3136,7 @@
     </p:spTree>
     <p:extLst>
       <p:ext uri="{BB962C8B-B14F-4D97-AF65-F5344CB8AC3E}">
-        <p14:creationId xmlns:p14="http://schemas.microsoft.com/office/powerpoint/2010/main" val="2819234966"/>
+        <p14:creationId xmlns:p14="http://schemas.microsoft.com/office/powerpoint/2010/main" val="2288381980"/>
       </p:ext>
     </p:extLst>
   </p:cSld>
@@ -3168,7 +3168,7 @@
           <p:cNvPr id="2" name="标题 1">
             <a:extLst>
               <a:ext uri="{FF2B5EF4-FFF2-40B4-BE49-F238E27FC236}">
-                <a16:creationId xmlns:a16="http://schemas.microsoft.com/office/drawing/2014/main" id="{698735ED-E004-A374-B02B-E603D17BF927}"/>
+                <a16:creationId xmlns:a16="http://schemas.microsoft.com/office/drawing/2014/main" id="{6875A889-3F7B-3C1E-3778-76F1FFE0F502}"/>
               </a:ext>
             </a:extLst>
           </p:cNvPr>
@@ -3201,7 +3201,7 @@
           <p:cNvPr id="3" name="文本占位符 2">
             <a:extLst>
               <a:ext uri="{FF2B5EF4-FFF2-40B4-BE49-F238E27FC236}">
-                <a16:creationId xmlns:a16="http://schemas.microsoft.com/office/drawing/2014/main" id="{BCD5077B-1F4E-FE85-F325-FFBB57B84BCB}"/>
+                <a16:creationId xmlns:a16="http://schemas.microsoft.com/office/drawing/2014/main" id="{291641CF-2C0D-4760-007A-27619E99FF8D}"/>
               </a:ext>
             </a:extLst>
           </p:cNvPr>
@@ -3272,7 +3272,7 @@
           <p:cNvPr id="4" name="内容占位符 3">
             <a:extLst>
               <a:ext uri="{FF2B5EF4-FFF2-40B4-BE49-F238E27FC236}">
-                <a16:creationId xmlns:a16="http://schemas.microsoft.com/office/drawing/2014/main" id="{0C3440CC-9534-C1CC-31D0-499B736E4020}"/>
+                <a16:creationId xmlns:a16="http://schemas.microsoft.com/office/drawing/2014/main" id="{0AA88357-C5C1-7F3C-A6BC-390FDCEB26E6}"/>
               </a:ext>
             </a:extLst>
           </p:cNvPr>
@@ -3334,7 +3334,7 @@
           <p:cNvPr id="5" name="文本占位符 4">
             <a:extLst>
               <a:ext uri="{FF2B5EF4-FFF2-40B4-BE49-F238E27FC236}">
-                <a16:creationId xmlns:a16="http://schemas.microsoft.com/office/drawing/2014/main" id="{4E733265-1332-56F9-4958-8CD3BB8772D4}"/>
+                <a16:creationId xmlns:a16="http://schemas.microsoft.com/office/drawing/2014/main" id="{1A14493F-610C-0239-3C9D-9ACC9B204DE9}"/>
               </a:ext>
             </a:extLst>
           </p:cNvPr>
@@ -3405,7 +3405,7 @@
           <p:cNvPr id="6" name="内容占位符 5">
             <a:extLst>
               <a:ext uri="{FF2B5EF4-FFF2-40B4-BE49-F238E27FC236}">
-                <a16:creationId xmlns:a16="http://schemas.microsoft.com/office/drawing/2014/main" id="{828632BE-D4A2-806B-8A55-02A7D45F8C74}"/>
+                <a16:creationId xmlns:a16="http://schemas.microsoft.com/office/drawing/2014/main" id="{F4F03434-7087-0282-7E76-261E3F528B26}"/>
               </a:ext>
             </a:extLst>
           </p:cNvPr>
@@ -3467,7 +3467,7 @@
           <p:cNvPr id="7" name="日期占位符 6">
             <a:extLst>
               <a:ext uri="{FF2B5EF4-FFF2-40B4-BE49-F238E27FC236}">
-                <a16:creationId xmlns:a16="http://schemas.microsoft.com/office/drawing/2014/main" id="{5BCCEC82-4049-44A8-B37C-F06099DB2DEC}"/>
+                <a16:creationId xmlns:a16="http://schemas.microsoft.com/office/drawing/2014/main" id="{531E33CF-9B8C-AED2-2F3A-AC1C24AF79E5}"/>
               </a:ext>
             </a:extLst>
           </p:cNvPr>
@@ -3483,7 +3483,7 @@
           <a:bodyPr/>
           <a:lstStyle/>
           <a:p>
-            <a:fld id="{6E22F503-1B7A-49E7-84E3-A31A5520663F}" type="datetimeFigureOut">
+            <a:fld id="{E9E706D5-8B20-4F05-BE41-D342EF88F631}" type="datetimeFigureOut">
               <a:rPr lang="zh-CN" altLang="en-US" smtClean="0"/>
               <a:t>2026/9/22</a:t>
             </a:fld>
@@ -3496,7 +3496,7 @@
           <p:cNvPr id="8" name="页脚占位符 7">
             <a:extLst>
               <a:ext uri="{FF2B5EF4-FFF2-40B4-BE49-F238E27FC236}">
-                <a16:creationId xmlns:a16="http://schemas.microsoft.com/office/drawing/2014/main" id="{2442596C-90E3-60B1-9E2B-2B59262C0121}"/>
+                <a16:creationId xmlns:a16="http://schemas.microsoft.com/office/drawing/2014/main" id="{D53194E6-4318-6A7C-E43E-5F2F7EDBA74A}"/>
               </a:ext>
             </a:extLst>
           </p:cNvPr>
@@ -3521,7 +3521,7 @@
           <p:cNvPr id="9" name="灯片编号占位符 8">
             <a:extLst>
               <a:ext uri="{FF2B5EF4-FFF2-40B4-BE49-F238E27FC236}">
-                <a16:creationId xmlns:a16="http://schemas.microsoft.com/office/drawing/2014/main" id="{DCAE3E9C-56CB-FEC9-CD91-F0B55ADF1763}"/>
+                <a16:creationId xmlns:a16="http://schemas.microsoft.com/office/drawing/2014/main" id="{B1877D88-CE6B-58EE-6997-C1DE895068F8}"/>
               </a:ext>
             </a:extLst>
           </p:cNvPr>
@@ -3537,7 +3537,7 @@
           <a:bodyPr/>
           <a:lstStyle/>
           <a:p>
-            <a:fld id="{44C30B3E-84D1-4F9E-BCCB-B7620D0196FB}" type="slidenum">
+            <a:fld id="{2A24213B-46FC-451A-8A57-C8A7998794E3}" type="slidenum">
               <a:rPr lang="zh-CN" altLang="en-US" smtClean="0"/>
               <a:t>‹#›</a:t>
             </a:fld>
@@ -3548,7 +3548,7 @@
     </p:spTree>
     <p:extLst>
       <p:ext uri="{BB962C8B-B14F-4D97-AF65-F5344CB8AC3E}">
-        <p14:creationId xmlns:p14="http://schemas.microsoft.com/office/powerpoint/2010/main" val="829503927"/>
+        <p14:creationId xmlns:p14="http://schemas.microsoft.com/office/powerpoint/2010/main" val="251589938"/>
       </p:ext>
     </p:extLst>
   </p:cSld>
@@ -3580,7 +3580,7 @@
           <p:cNvPr id="2" name="标题 1">
             <a:extLst>
               <a:ext uri="{FF2B5EF4-FFF2-40B4-BE49-F238E27FC236}">
-                <a16:creationId xmlns:a16="http://schemas.microsoft.com/office/drawing/2014/main" id="{3CBF09F4-6EF5-BFD2-BB27-D21A1EBE944D}"/>
+                <a16:creationId xmlns:a16="http://schemas.microsoft.com/office/drawing/2014/main" id="{050CA327-3A05-BB14-E15E-A51EAF6A0F63}"/>
               </a:ext>
             </a:extLst>
           </p:cNvPr>
@@ -3608,7 +3608,7 @@
           <p:cNvPr id="3" name="日期占位符 2">
             <a:extLst>
               <a:ext uri="{FF2B5EF4-FFF2-40B4-BE49-F238E27FC236}">
-                <a16:creationId xmlns:a16="http://schemas.microsoft.com/office/drawing/2014/main" id="{F18988B6-C502-C738-9A6C-053CE3F33930}"/>
+                <a16:creationId xmlns:a16="http://schemas.microsoft.com/office/drawing/2014/main" id="{1E2BA67E-2680-9062-0E2C-64275E1395D2}"/>
               </a:ext>
             </a:extLst>
           </p:cNvPr>
@@ -3624,7 +3624,7 @@
           <a:bodyPr/>
           <a:lstStyle/>
           <a:p>
-            <a:fld id="{6E22F503-1B7A-49E7-84E3-A31A5520663F}" type="datetimeFigureOut">
+            <a:fld id="{E9E706D5-8B20-4F05-BE41-D342EF88F631}" type="datetimeFigureOut">
               <a:rPr lang="zh-CN" altLang="en-US" smtClean="0"/>
               <a:t>2026/9/22</a:t>
             </a:fld>
@@ -3637,7 +3637,7 @@
           <p:cNvPr id="4" name="页脚占位符 3">
             <a:extLst>
               <a:ext uri="{FF2B5EF4-FFF2-40B4-BE49-F238E27FC236}">
-                <a16:creationId xmlns:a16="http://schemas.microsoft.com/office/drawing/2014/main" id="{91E72B9E-BE8D-8ED2-4259-C92470CD4233}"/>
+                <a16:creationId xmlns:a16="http://schemas.microsoft.com/office/drawing/2014/main" id="{90EAEB0E-0768-4CE0-7106-90D1960C2E99}"/>
               </a:ext>
             </a:extLst>
           </p:cNvPr>
@@ -3662,7 +3662,7 @@
           <p:cNvPr id="5" name="灯片编号占位符 4">
             <a:extLst>
               <a:ext uri="{FF2B5EF4-FFF2-40B4-BE49-F238E27FC236}">
-                <a16:creationId xmlns:a16="http://schemas.microsoft.com/office/drawing/2014/main" id="{88C74D22-ABBA-3B0F-CA58-DB3769DD0B0A}"/>
+                <a16:creationId xmlns:a16="http://schemas.microsoft.com/office/drawing/2014/main" id="{E6ABC425-09DF-C420-64EF-826B36B7073A}"/>
               </a:ext>
             </a:extLst>
           </p:cNvPr>
@@ -3678,7 +3678,7 @@
           <a:bodyPr/>
           <a:lstStyle/>
           <a:p>
-            <a:fld id="{44C30B3E-84D1-4F9E-BCCB-B7620D0196FB}" type="slidenum">
+            <a:fld id="{2A24213B-46FC-451A-8A57-C8A7998794E3}" type="slidenum">
               <a:rPr lang="zh-CN" altLang="en-US" smtClean="0"/>
               <a:t>‹#›</a:t>
             </a:fld>
@@ -3689,7 +3689,7 @@
     </p:spTree>
     <p:extLst>
       <p:ext uri="{BB962C8B-B14F-4D97-AF65-F5344CB8AC3E}">
-        <p14:creationId xmlns:p14="http://schemas.microsoft.com/office/powerpoint/2010/main" val="1017374936"/>
+        <p14:creationId xmlns:p14="http://schemas.microsoft.com/office/powerpoint/2010/main" val="386212726"/>
       </p:ext>
     </p:extLst>
   </p:cSld>
@@ -3721,7 +3721,7 @@
           <p:cNvPr id="2" name="日期占位符 1">
             <a:extLst>
               <a:ext uri="{FF2B5EF4-FFF2-40B4-BE49-F238E27FC236}">
-                <a16:creationId xmlns:a16="http://schemas.microsoft.com/office/drawing/2014/main" id="{F5A81049-4F51-28ED-1C84-6A3D8ADE784D}"/>
+                <a16:creationId xmlns:a16="http://schemas.microsoft.com/office/drawing/2014/main" id="{5BABF53A-60B4-3863-8021-CA8B10DA8090}"/>
               </a:ext>
             </a:extLst>
           </p:cNvPr>
@@ -3737,7 +3737,7 @@
           <a:bodyPr/>
           <a:lstStyle/>
           <a:p>
-            <a:fld id="{6E22F503-1B7A-49E7-84E3-A31A5520663F}" type="datetimeFigureOut">
+            <a:fld id="{E9E706D5-8B20-4F05-BE41-D342EF88F631}" type="datetimeFigureOut">
               <a:rPr lang="zh-CN" altLang="en-US" smtClean="0"/>
               <a:t>2026/9/22</a:t>
             </a:fld>
@@ -3750,7 +3750,7 @@
           <p:cNvPr id="3" name="页脚占位符 2">
             <a:extLst>
               <a:ext uri="{FF2B5EF4-FFF2-40B4-BE49-F238E27FC236}">
-                <a16:creationId xmlns:a16="http://schemas.microsoft.com/office/drawing/2014/main" id="{1ADF4438-78B7-7D11-A81C-CB48FB32A8AF}"/>
+                <a16:creationId xmlns:a16="http://schemas.microsoft.com/office/drawing/2014/main" id="{532F0B97-0357-FB80-8E30-5D57B596164F}"/>
               </a:ext>
             </a:extLst>
           </p:cNvPr>
@@ -3775,7 +3775,7 @@
           <p:cNvPr id="4" name="灯片编号占位符 3">
             <a:extLst>
               <a:ext uri="{FF2B5EF4-FFF2-40B4-BE49-F238E27FC236}">
-                <a16:creationId xmlns:a16="http://schemas.microsoft.com/office/drawing/2014/main" id="{A1E227A1-7850-9C3D-D361-13B305EFB464}"/>
+                <a16:creationId xmlns:a16="http://schemas.microsoft.com/office/drawing/2014/main" id="{66DB21C4-DAB5-D57A-4D06-80B9FA5CF3F2}"/>
               </a:ext>
             </a:extLst>
           </p:cNvPr>
@@ -3791,7 +3791,7 @@
           <a:bodyPr/>
           <a:lstStyle/>
           <a:p>
-            <a:fld id="{44C30B3E-84D1-4F9E-BCCB-B7620D0196FB}" type="slidenum">
+            <a:fld id="{2A24213B-46FC-451A-8A57-C8A7998794E3}" type="slidenum">
               <a:rPr lang="zh-CN" altLang="en-US" smtClean="0"/>
               <a:t>‹#›</a:t>
             </a:fld>
@@ -3802,7 +3802,7 @@
     </p:spTree>
     <p:extLst>
       <p:ext uri="{BB962C8B-B14F-4D97-AF65-F5344CB8AC3E}">
-        <p14:creationId xmlns:p14="http://schemas.microsoft.com/office/powerpoint/2010/main" val="3314129650"/>
+        <p14:creationId xmlns:p14="http://schemas.microsoft.com/office/powerpoint/2010/main" val="918874769"/>
       </p:ext>
     </p:extLst>
   </p:cSld>
@@ -3834,7 +3834,7 @@
           <p:cNvPr id="2" name="标题 1">
             <a:extLst>
               <a:ext uri="{FF2B5EF4-FFF2-40B4-BE49-F238E27FC236}">
-                <a16:creationId xmlns:a16="http://schemas.microsoft.com/office/drawing/2014/main" id="{CD7312E3-2201-EBB7-40A6-0AA89182C90B}"/>
+                <a16:creationId xmlns:a16="http://schemas.microsoft.com/office/drawing/2014/main" id="{2CD0CC28-2532-846B-824F-C23DE51C8900}"/>
               </a:ext>
             </a:extLst>
           </p:cNvPr>
@@ -3871,7 +3871,7 @@
           <p:cNvPr id="3" name="内容占位符 2">
             <a:extLst>
               <a:ext uri="{FF2B5EF4-FFF2-40B4-BE49-F238E27FC236}">
-                <a16:creationId xmlns:a16="http://schemas.microsoft.com/office/drawing/2014/main" id="{89AC3A9A-DED3-05B0-2F93-F23D433B7C5D}"/>
+                <a16:creationId xmlns:a16="http://schemas.microsoft.com/office/drawing/2014/main" id="{13610003-D9DC-247E-0692-09958BBF5C52}"/>
               </a:ext>
             </a:extLst>
           </p:cNvPr>
@@ -3961,7 +3961,7 @@
           <p:cNvPr id="4" name="文本占位符 3">
             <a:extLst>
               <a:ext uri="{FF2B5EF4-FFF2-40B4-BE49-F238E27FC236}">
-                <a16:creationId xmlns:a16="http://schemas.microsoft.com/office/drawing/2014/main" id="{87E48088-EF73-6A56-C8BA-7E8CF020148B}"/>
+                <a16:creationId xmlns:a16="http://schemas.microsoft.com/office/drawing/2014/main" id="{349CBB7E-DBEF-A82F-BA41-FB7362249CB8}"/>
               </a:ext>
             </a:extLst>
           </p:cNvPr>
@@ -4032,7 +4032,7 @@
           <p:cNvPr id="5" name="日期占位符 4">
             <a:extLst>
               <a:ext uri="{FF2B5EF4-FFF2-40B4-BE49-F238E27FC236}">
-                <a16:creationId xmlns:a16="http://schemas.microsoft.com/office/drawing/2014/main" id="{AFFDE18A-36DD-3003-03EE-C60C03F0C2C2}"/>
+                <a16:creationId xmlns:a16="http://schemas.microsoft.com/office/drawing/2014/main" id="{DD5EE8FA-3933-9AB9-E7FF-79FDD05F6E6B}"/>
               </a:ext>
             </a:extLst>
           </p:cNvPr>
@@ -4048,7 +4048,7 @@
           <a:bodyPr/>
           <a:lstStyle/>
           <a:p>
-            <a:fld id="{6E22F503-1B7A-49E7-84E3-A31A5520663F}" type="datetimeFigureOut">
+            <a:fld id="{E9E706D5-8B20-4F05-BE41-D342EF88F631}" type="datetimeFigureOut">
               <a:rPr lang="zh-CN" altLang="en-US" smtClean="0"/>
               <a:t>2026/9/22</a:t>
             </a:fld>
@@ -4061,7 +4061,7 @@
           <p:cNvPr id="6" name="页脚占位符 5">
             <a:extLst>
               <a:ext uri="{FF2B5EF4-FFF2-40B4-BE49-F238E27FC236}">
-                <a16:creationId xmlns:a16="http://schemas.microsoft.com/office/drawing/2014/main" id="{5D97D901-A15A-6965-A4F4-D77C77E64050}"/>
+                <a16:creationId xmlns:a16="http://schemas.microsoft.com/office/drawing/2014/main" id="{ABEE64EC-E43A-6146-9522-355F1D219AAD}"/>
               </a:ext>
             </a:extLst>
           </p:cNvPr>
@@ -4086,7 +4086,7 @@
           <p:cNvPr id="7" name="灯片编号占位符 6">
             <a:extLst>
               <a:ext uri="{FF2B5EF4-FFF2-40B4-BE49-F238E27FC236}">
-                <a16:creationId xmlns:a16="http://schemas.microsoft.com/office/drawing/2014/main" id="{06CCE97F-1CE8-9753-F564-5CC0594AB936}"/>
+                <a16:creationId xmlns:a16="http://schemas.microsoft.com/office/drawing/2014/main" id="{DD5A44A5-624F-31D2-A2FA-2E6BA17B862B}"/>
               </a:ext>
             </a:extLst>
           </p:cNvPr>
@@ -4102,7 +4102,7 @@
           <a:bodyPr/>
           <a:lstStyle/>
           <a:p>
-            <a:fld id="{44C30B3E-84D1-4F9E-BCCB-B7620D0196FB}" type="slidenum">
+            <a:fld id="{2A24213B-46FC-451A-8A57-C8A7998794E3}" type="slidenum">
               <a:rPr lang="zh-CN" altLang="en-US" smtClean="0"/>
               <a:t>‹#›</a:t>
             </a:fld>
@@ -4113,7 +4113,7 @@
     </p:spTree>
     <p:extLst>
       <p:ext uri="{BB962C8B-B14F-4D97-AF65-F5344CB8AC3E}">
-        <p14:creationId xmlns:p14="http://schemas.microsoft.com/office/powerpoint/2010/main" val="3071722528"/>
+        <p14:creationId xmlns:p14="http://schemas.microsoft.com/office/powerpoint/2010/main" val="2284234562"/>
       </p:ext>
     </p:extLst>
   </p:cSld>
@@ -4145,7 +4145,7 @@
           <p:cNvPr id="2" name="标题 1">
             <a:extLst>
               <a:ext uri="{FF2B5EF4-FFF2-40B4-BE49-F238E27FC236}">
-                <a16:creationId xmlns:a16="http://schemas.microsoft.com/office/drawing/2014/main" id="{4C323FB9-4144-1887-D28B-85B4D3B782F0}"/>
+                <a16:creationId xmlns:a16="http://schemas.microsoft.com/office/drawing/2014/main" id="{C668DD6A-D0BB-0EF7-DE8A-C30D80326638}"/>
               </a:ext>
             </a:extLst>
           </p:cNvPr>
@@ -4182,7 +4182,7 @@
           <p:cNvPr id="3" name="图片占位符 2">
             <a:extLst>
               <a:ext uri="{FF2B5EF4-FFF2-40B4-BE49-F238E27FC236}">
-                <a16:creationId xmlns:a16="http://schemas.microsoft.com/office/drawing/2014/main" id="{6024CBAC-D902-5CF2-A666-33198B9A2793}"/>
+                <a16:creationId xmlns:a16="http://schemas.microsoft.com/office/drawing/2014/main" id="{143264C4-9F2D-B225-BBE8-BBE9286698B4}"/>
               </a:ext>
             </a:extLst>
           </p:cNvPr>
@@ -4249,7 +4249,7 @@
           <p:cNvPr id="4" name="文本占位符 3">
             <a:extLst>
               <a:ext uri="{FF2B5EF4-FFF2-40B4-BE49-F238E27FC236}">
-                <a16:creationId xmlns:a16="http://schemas.microsoft.com/office/drawing/2014/main" id="{95676EF5-1BFF-FF85-9194-D0F3ACCAC433}"/>
+                <a16:creationId xmlns:a16="http://schemas.microsoft.com/office/drawing/2014/main" id="{6EB15FA8-EF59-894D-A1B3-6415C89F2AEA}"/>
               </a:ext>
             </a:extLst>
           </p:cNvPr>
@@ -4320,7 +4320,7 @@
           <p:cNvPr id="5" name="日期占位符 4">
             <a:extLst>
               <a:ext uri="{FF2B5EF4-FFF2-40B4-BE49-F238E27FC236}">
-                <a16:creationId xmlns:a16="http://schemas.microsoft.com/office/drawing/2014/main" id="{5CEF5BAA-5DB5-6735-9DE5-C311CDEE17E4}"/>
+                <a16:creationId xmlns:a16="http://schemas.microsoft.com/office/drawing/2014/main" id="{5C5B38B1-D30B-677D-0D64-D4A9C069E146}"/>
               </a:ext>
             </a:extLst>
           </p:cNvPr>
@@ -4336,7 +4336,7 @@
           <a:bodyPr/>
           <a:lstStyle/>
           <a:p>
-            <a:fld id="{6E22F503-1B7A-49E7-84E3-A31A5520663F}" type="datetimeFigureOut">
+            <a:fld id="{E9E706D5-8B20-4F05-BE41-D342EF88F631}" type="datetimeFigureOut">
               <a:rPr lang="zh-CN" altLang="en-US" smtClean="0"/>
               <a:t>2026/9/22</a:t>
             </a:fld>
@@ -4349,7 +4349,7 @@
           <p:cNvPr id="6" name="页脚占位符 5">
             <a:extLst>
               <a:ext uri="{FF2B5EF4-FFF2-40B4-BE49-F238E27FC236}">
-                <a16:creationId xmlns:a16="http://schemas.microsoft.com/office/drawing/2014/main" id="{6832AC66-5D3F-1C44-2B4C-78B84DF7D10C}"/>
+                <a16:creationId xmlns:a16="http://schemas.microsoft.com/office/drawing/2014/main" id="{3FD5B125-F1DE-8914-0B7C-759B97ACB914}"/>
               </a:ext>
             </a:extLst>
           </p:cNvPr>
@@ -4374,7 +4374,7 @@
           <p:cNvPr id="7" name="灯片编号占位符 6">
             <a:extLst>
               <a:ext uri="{FF2B5EF4-FFF2-40B4-BE49-F238E27FC236}">
-                <a16:creationId xmlns:a16="http://schemas.microsoft.com/office/drawing/2014/main" id="{8546BD5F-F962-516C-3E97-6D7493AB9098}"/>
+                <a16:creationId xmlns:a16="http://schemas.microsoft.com/office/drawing/2014/main" id="{E2B78B5F-AE5C-A7A2-6F0D-7BC8C4B12C1A}"/>
               </a:ext>
             </a:extLst>
           </p:cNvPr>
@@ -4390,7 +4390,7 @@
           <a:bodyPr/>
           <a:lstStyle/>
           <a:p>
-            <a:fld id="{44C30B3E-84D1-4F9E-BCCB-B7620D0196FB}" type="slidenum">
+            <a:fld id="{2A24213B-46FC-451A-8A57-C8A7998794E3}" type="slidenum">
               <a:rPr lang="zh-CN" altLang="en-US" smtClean="0"/>
               <a:t>‹#›</a:t>
             </a:fld>
@@ -4401,7 +4401,7 @@
     </p:spTree>
     <p:extLst>
       <p:ext uri="{BB962C8B-B14F-4D97-AF65-F5344CB8AC3E}">
-        <p14:creationId xmlns:p14="http://schemas.microsoft.com/office/powerpoint/2010/main" val="841706172"/>
+        <p14:creationId xmlns:p14="http://schemas.microsoft.com/office/powerpoint/2010/main" val="2543442859"/>
       </p:ext>
     </p:extLst>
   </p:cSld>
@@ -4438,7 +4438,7 @@
           <p:cNvPr id="2" name="标题占位符 1">
             <a:extLst>
               <a:ext uri="{FF2B5EF4-FFF2-40B4-BE49-F238E27FC236}">
-                <a16:creationId xmlns:a16="http://schemas.microsoft.com/office/drawing/2014/main" id="{89A3A095-1B36-9E8F-8674-C99119C48137}"/>
+                <a16:creationId xmlns:a16="http://schemas.microsoft.com/office/drawing/2014/main" id="{B9E3B21B-2E73-6969-97C8-ED1E93CEF8EF}"/>
               </a:ext>
             </a:extLst>
           </p:cNvPr>
@@ -4476,7 +4476,7 @@
           <p:cNvPr id="3" name="文本占位符 2">
             <a:extLst>
               <a:ext uri="{FF2B5EF4-FFF2-40B4-BE49-F238E27FC236}">
-                <a16:creationId xmlns:a16="http://schemas.microsoft.com/office/drawing/2014/main" id="{E52F17D3-F9F9-900D-06DF-7DD20E7A91B5}"/>
+                <a16:creationId xmlns:a16="http://schemas.microsoft.com/office/drawing/2014/main" id="{E871F9A5-FFE2-E211-B86D-982E886FE000}"/>
               </a:ext>
             </a:extLst>
           </p:cNvPr>
@@ -4543,7 +4543,7 @@
           <p:cNvPr id="4" name="日期占位符 3">
             <a:extLst>
               <a:ext uri="{FF2B5EF4-FFF2-40B4-BE49-F238E27FC236}">
-                <a16:creationId xmlns:a16="http://schemas.microsoft.com/office/drawing/2014/main" id="{A73EC8DD-F976-03B3-084F-BC18FCCAB455}"/>
+                <a16:creationId xmlns:a16="http://schemas.microsoft.com/office/drawing/2014/main" id="{DFDA16B9-B1B2-C50A-712F-4DBB0DC89C79}"/>
               </a:ext>
             </a:extLst>
           </p:cNvPr>
@@ -4577,7 +4577,7 @@
             </a:lvl1pPr>
           </a:lstStyle>
           <a:p>
-            <a:fld id="{6E22F503-1B7A-49E7-84E3-A31A5520663F}" type="datetimeFigureOut">
+            <a:fld id="{E9E706D5-8B20-4F05-BE41-D342EF88F631}" type="datetimeFigureOut">
               <a:rPr lang="zh-CN" altLang="en-US" smtClean="0"/>
               <a:t>2026/9/22</a:t>
             </a:fld>
@@ -4590,7 +4590,7 @@
           <p:cNvPr id="5" name="页脚占位符 4">
             <a:extLst>
               <a:ext uri="{FF2B5EF4-FFF2-40B4-BE49-F238E27FC236}">
-                <a16:creationId xmlns:a16="http://schemas.microsoft.com/office/drawing/2014/main" id="{5A6C9F77-6F29-93EE-DB72-866F51754B56}"/>
+                <a16:creationId xmlns:a16="http://schemas.microsoft.com/office/drawing/2014/main" id="{72C6F860-612D-BD89-9EEE-9776CD95E748}"/>
               </a:ext>
             </a:extLst>
           </p:cNvPr>
@@ -4633,7 +4633,7 @@
           <p:cNvPr id="6" name="灯片编号占位符 5">
             <a:extLst>
               <a:ext uri="{FF2B5EF4-FFF2-40B4-BE49-F238E27FC236}">
-                <a16:creationId xmlns:a16="http://schemas.microsoft.com/office/drawing/2014/main" id="{F8ADC9CA-9975-4C50-E15F-80F917E41968}"/>
+                <a16:creationId xmlns:a16="http://schemas.microsoft.com/office/drawing/2014/main" id="{9E75212C-C329-DF55-BD4D-331A8B119BBA}"/>
               </a:ext>
             </a:extLst>
           </p:cNvPr>
@@ -4667,7 +4667,7 @@
             </a:lvl1pPr>
           </a:lstStyle>
           <a:p>
-            <a:fld id="{44C30B3E-84D1-4F9E-BCCB-B7620D0196FB}" type="slidenum">
+            <a:fld id="{2A24213B-46FC-451A-8A57-C8A7998794E3}" type="slidenum">
               <a:rPr lang="zh-CN" altLang="en-US" smtClean="0"/>
               <a:t>‹#›</a:t>
             </a:fld>
@@ -4678,7 +4678,7 @@
     </p:spTree>
     <p:extLst>
       <p:ext uri="{BB962C8B-B14F-4D97-AF65-F5344CB8AC3E}">
-        <p14:creationId xmlns:p14="http://schemas.microsoft.com/office/powerpoint/2010/main" val="2918749773"/>
+        <p14:creationId xmlns:p14="http://schemas.microsoft.com/office/powerpoint/2010/main" val="4202161316"/>
       </p:ext>
     </p:extLst>
   </p:cSld>
@@ -5009,7 +5009,7 @@
           <p:cNvPr id="2" name="矩形 1">
             <a:extLst>
               <a:ext uri="{FF2B5EF4-FFF2-40B4-BE49-F238E27FC236}">
-                <a16:creationId xmlns:a16="http://schemas.microsoft.com/office/drawing/2014/main" id="{18203BB6-098D-83B8-4705-50C525750334}"/>
+                <a16:creationId xmlns:a16="http://schemas.microsoft.com/office/drawing/2014/main" id="{B0E0FBDF-BE21-2A25-E18D-43BBACE1BCBB}"/>
               </a:ext>
             </a:extLst>
           </p:cNvPr>
@@ -5077,7 +5077,7 @@
           <p:cNvPr id="3" name="文本框 2">
             <a:extLst>
               <a:ext uri="{FF2B5EF4-FFF2-40B4-BE49-F238E27FC236}">
-                <a16:creationId xmlns:a16="http://schemas.microsoft.com/office/drawing/2014/main" id="{AC02502C-4589-3EE0-B3C3-CCB4BF4A5DF9}"/>
+                <a16:creationId xmlns:a16="http://schemas.microsoft.com/office/drawing/2014/main" id="{DB50AEC9-E9C8-557D-3B2C-C835D1340498}"/>
               </a:ext>
             </a:extLst>
           </p:cNvPr>
@@ -5137,7 +5137,7 @@
           <p:cNvPr id="4" name="文本框 3">
             <a:extLst>
               <a:ext uri="{FF2B5EF4-FFF2-40B4-BE49-F238E27FC236}">
-                <a16:creationId xmlns:a16="http://schemas.microsoft.com/office/drawing/2014/main" id="{9DE9846E-0773-294C-6090-82915B75F0AE}"/>
+                <a16:creationId xmlns:a16="http://schemas.microsoft.com/office/drawing/2014/main" id="{9A1ABEC0-193D-E41A-4C53-C7A53495851A}"/>
               </a:ext>
             </a:extLst>
           </p:cNvPr>
@@ -5197,7 +5197,7 @@
           <p:cNvPr id="5" name="文本框 4">
             <a:extLst>
               <a:ext uri="{FF2B5EF4-FFF2-40B4-BE49-F238E27FC236}">
-                <a16:creationId xmlns:a16="http://schemas.microsoft.com/office/drawing/2014/main" id="{1CBA9C8B-BFC0-C31E-CCAA-ACFB2D1C55A5}"/>
+                <a16:creationId xmlns:a16="http://schemas.microsoft.com/office/drawing/2014/main" id="{D459B196-B0DB-D8CB-B95D-2E32B10AC31D}"/>
               </a:ext>
             </a:extLst>
           </p:cNvPr>
@@ -5289,7 +5289,7 @@
           <p:cNvPr id="6" name="矩形 5">
             <a:extLst>
               <a:ext uri="{FF2B5EF4-FFF2-40B4-BE49-F238E27FC236}">
-                <a16:creationId xmlns:a16="http://schemas.microsoft.com/office/drawing/2014/main" id="{3C97EDE8-5B68-182C-1127-E97C16217675}"/>
+                <a16:creationId xmlns:a16="http://schemas.microsoft.com/office/drawing/2014/main" id="{AE145140-B800-A6D6-C3A5-4E55C8D636F6}"/>
               </a:ext>
             </a:extLst>
           </p:cNvPr>
@@ -5357,7 +5357,7 @@
           <p:cNvPr id="7" name="文本框 6">
             <a:extLst>
               <a:ext uri="{FF2B5EF4-FFF2-40B4-BE49-F238E27FC236}">
-                <a16:creationId xmlns:a16="http://schemas.microsoft.com/office/drawing/2014/main" id="{02CF2C05-F3C6-8BC9-3531-636A82F7BC2E}"/>
+                <a16:creationId xmlns:a16="http://schemas.microsoft.com/office/drawing/2014/main" id="{C19D0BF5-19A1-2639-F63B-589A61072F27}"/>
               </a:ext>
             </a:extLst>
           </p:cNvPr>
@@ -5415,7 +5415,7 @@
     </p:spTree>
     <p:extLst>
       <p:ext uri="{BB962C8B-B14F-4D97-AF65-F5344CB8AC3E}">
-        <p14:creationId xmlns:p14="http://schemas.microsoft.com/office/powerpoint/2010/main" val="1218898741"/>
+        <p14:creationId xmlns:p14="http://schemas.microsoft.com/office/powerpoint/2010/main" val="2122922724"/>
       </p:ext>
     </p:extLst>
   </p:cSld>
@@ -5455,7 +5455,7 @@
           <p:cNvPr id="2" name="矩形 1">
             <a:extLst>
               <a:ext uri="{FF2B5EF4-FFF2-40B4-BE49-F238E27FC236}">
-                <a16:creationId xmlns:a16="http://schemas.microsoft.com/office/drawing/2014/main" id="{EA268D36-A5F1-ABC2-2527-7466036A5861}"/>
+                <a16:creationId xmlns:a16="http://schemas.microsoft.com/office/drawing/2014/main" id="{3A191405-DF54-0B53-9C2F-836EC9DEB283}"/>
               </a:ext>
             </a:extLst>
           </p:cNvPr>
@@ -5523,7 +5523,7 @@
           <p:cNvPr id="3" name="文本框 2">
             <a:extLst>
               <a:ext uri="{FF2B5EF4-FFF2-40B4-BE49-F238E27FC236}">
-                <a16:creationId xmlns:a16="http://schemas.microsoft.com/office/drawing/2014/main" id="{1217C6AE-4836-42E9-8654-8E55552CE0C0}"/>
+                <a16:creationId xmlns:a16="http://schemas.microsoft.com/office/drawing/2014/main" id="{9CDD6608-9B2B-CE20-9442-C1C8D9660E88}"/>
               </a:ext>
             </a:extLst>
           </p:cNvPr>
@@ -5567,7 +5567,7 @@
           <p:cNvPr id="4" name="文本框 3">
             <a:extLst>
               <a:ext uri="{FF2B5EF4-FFF2-40B4-BE49-F238E27FC236}">
-                <a16:creationId xmlns:a16="http://schemas.microsoft.com/office/drawing/2014/main" id="{2DB6528E-6655-88D4-7A86-17C28A2750AF}"/>
+                <a16:creationId xmlns:a16="http://schemas.microsoft.com/office/drawing/2014/main" id="{3C53AA8C-DCF2-5057-8663-D17AE446A59C}"/>
               </a:ext>
             </a:extLst>
           </p:cNvPr>
@@ -6069,7 +6069,7 @@
     </p:spTree>
     <p:extLst>
       <p:ext uri="{BB962C8B-B14F-4D97-AF65-F5344CB8AC3E}">
-        <p14:creationId xmlns:p14="http://schemas.microsoft.com/office/powerpoint/2010/main" val="3752220242"/>
+        <p14:creationId xmlns:p14="http://schemas.microsoft.com/office/powerpoint/2010/main" val="3380351752"/>
       </p:ext>
     </p:extLst>
   </p:cSld>
@@ -6109,7 +6109,7 @@
           <p:cNvPr id="2" name="矩形 1">
             <a:extLst>
               <a:ext uri="{FF2B5EF4-FFF2-40B4-BE49-F238E27FC236}">
-                <a16:creationId xmlns:a16="http://schemas.microsoft.com/office/drawing/2014/main" id="{431A7BC4-003C-2FE0-CADD-AD76F98C1749}"/>
+                <a16:creationId xmlns:a16="http://schemas.microsoft.com/office/drawing/2014/main" id="{D142FAA4-0F02-11D9-BFD0-45DB8C9F2089}"/>
               </a:ext>
             </a:extLst>
           </p:cNvPr>
@@ -6177,7 +6177,7 @@
           <p:cNvPr id="3" name="文本框 2">
             <a:extLst>
               <a:ext uri="{FF2B5EF4-FFF2-40B4-BE49-F238E27FC236}">
-                <a16:creationId xmlns:a16="http://schemas.microsoft.com/office/drawing/2014/main" id="{9D653EEA-487C-6009-81E6-9683F810DFB4}"/>
+                <a16:creationId xmlns:a16="http://schemas.microsoft.com/office/drawing/2014/main" id="{07704151-7DBE-527B-FAC0-27C65D0413FD}"/>
               </a:ext>
             </a:extLst>
           </p:cNvPr>
@@ -6221,7 +6221,7 @@
           <p:cNvPr id="4" name="文本框 3">
             <a:extLst>
               <a:ext uri="{FF2B5EF4-FFF2-40B4-BE49-F238E27FC236}">
-                <a16:creationId xmlns:a16="http://schemas.microsoft.com/office/drawing/2014/main" id="{6DBC6C99-798B-980F-1FEE-1B61C95D5B26}"/>
+                <a16:creationId xmlns:a16="http://schemas.microsoft.com/office/drawing/2014/main" id="{090494BD-90E3-64B0-61AE-38755B3FA4AC}"/>
               </a:ext>
             </a:extLst>
           </p:cNvPr>
@@ -6579,7 +6579,7 @@
     </p:spTree>
     <p:extLst>
       <p:ext uri="{BB962C8B-B14F-4D97-AF65-F5344CB8AC3E}">
-        <p14:creationId xmlns:p14="http://schemas.microsoft.com/office/powerpoint/2010/main" val="1337275985"/>
+        <p14:creationId xmlns:p14="http://schemas.microsoft.com/office/powerpoint/2010/main" val="3918817962"/>
       </p:ext>
     </p:extLst>
   </p:cSld>
@@ -6619,7 +6619,7 @@
           <p:cNvPr id="2" name="矩形 1">
             <a:extLst>
               <a:ext uri="{FF2B5EF4-FFF2-40B4-BE49-F238E27FC236}">
-                <a16:creationId xmlns:a16="http://schemas.microsoft.com/office/drawing/2014/main" id="{6DD09A15-8959-907D-32E4-AF0CAA761FF5}"/>
+                <a16:creationId xmlns:a16="http://schemas.microsoft.com/office/drawing/2014/main" id="{4462C5E6-07DB-446A-18A6-FAB97479A47E}"/>
               </a:ext>
             </a:extLst>
           </p:cNvPr>
@@ -6687,7 +6687,7 @@
           <p:cNvPr id="3" name="文本框 2">
             <a:extLst>
               <a:ext uri="{FF2B5EF4-FFF2-40B4-BE49-F238E27FC236}">
-                <a16:creationId xmlns:a16="http://schemas.microsoft.com/office/drawing/2014/main" id="{A671E2E0-9231-3232-F834-1E291D0C904F}"/>
+                <a16:creationId xmlns:a16="http://schemas.microsoft.com/office/drawing/2014/main" id="{8D39CAB2-6C01-507E-E5CB-CF133434481A}"/>
               </a:ext>
             </a:extLst>
           </p:cNvPr>
@@ -6731,7 +6731,7 @@
           <p:cNvPr id="4" name="文本框 3">
             <a:extLst>
               <a:ext uri="{FF2B5EF4-FFF2-40B4-BE49-F238E27FC236}">
-                <a16:creationId xmlns:a16="http://schemas.microsoft.com/office/drawing/2014/main" id="{5E5184DC-BF4D-3213-A0E3-2347EA438F7A}"/>
+                <a16:creationId xmlns:a16="http://schemas.microsoft.com/office/drawing/2014/main" id="{11C31043-2ECB-FA03-01F9-A9554457E38B}"/>
               </a:ext>
             </a:extLst>
           </p:cNvPr>
@@ -7014,7 +7014,7 @@
     </p:spTree>
     <p:extLst>
       <p:ext uri="{BB962C8B-B14F-4D97-AF65-F5344CB8AC3E}">
-        <p14:creationId xmlns:p14="http://schemas.microsoft.com/office/powerpoint/2010/main" val="2018662758"/>
+        <p14:creationId xmlns:p14="http://schemas.microsoft.com/office/powerpoint/2010/main" val="1791835026"/>
       </p:ext>
     </p:extLst>
   </p:cSld>
@@ -7054,7 +7054,7 @@
           <p:cNvPr id="2" name="矩形 1">
             <a:extLst>
               <a:ext uri="{FF2B5EF4-FFF2-40B4-BE49-F238E27FC236}">
-                <a16:creationId xmlns:a16="http://schemas.microsoft.com/office/drawing/2014/main" id="{B9AD7D23-AB88-22A3-1623-A67EDDD71835}"/>
+                <a16:creationId xmlns:a16="http://schemas.microsoft.com/office/drawing/2014/main" id="{8E2F1DF6-D042-62B9-2EE8-890509F8D28F}"/>
               </a:ext>
             </a:extLst>
           </p:cNvPr>
@@ -7122,7 +7122,7 @@
           <p:cNvPr id="3" name="文本框 2">
             <a:extLst>
               <a:ext uri="{FF2B5EF4-FFF2-40B4-BE49-F238E27FC236}">
-                <a16:creationId xmlns:a16="http://schemas.microsoft.com/office/drawing/2014/main" id="{F2E44186-C07E-4062-7FEA-E75906A7221A}"/>
+                <a16:creationId xmlns:a16="http://schemas.microsoft.com/office/drawing/2014/main" id="{E46F524B-EB93-27C9-4C2E-291F263A14FB}"/>
               </a:ext>
             </a:extLst>
           </p:cNvPr>
@@ -7166,7 +7166,7 @@
           <p:cNvPr id="4" name="文本框 3">
             <a:extLst>
               <a:ext uri="{FF2B5EF4-FFF2-40B4-BE49-F238E27FC236}">
-                <a16:creationId xmlns:a16="http://schemas.microsoft.com/office/drawing/2014/main" id="{B42CE5D6-CB21-B36E-8279-A0684F35472C}"/>
+                <a16:creationId xmlns:a16="http://schemas.microsoft.com/office/drawing/2014/main" id="{F4114358-9F3E-963F-A415-577CF0E5A70E}"/>
               </a:ext>
             </a:extLst>
           </p:cNvPr>
@@ -7240,7 +7240,7 @@
     </p:spTree>
     <p:extLst>
       <p:ext uri="{BB962C8B-B14F-4D97-AF65-F5344CB8AC3E}">
-        <p14:creationId xmlns:p14="http://schemas.microsoft.com/office/powerpoint/2010/main" val="3855071134"/>
+        <p14:creationId xmlns:p14="http://schemas.microsoft.com/office/powerpoint/2010/main" val="3863546584"/>
       </p:ext>
     </p:extLst>
   </p:cSld>
@@ -7280,7 +7280,7 @@
           <p:cNvPr id="2" name="矩形 1">
             <a:extLst>
               <a:ext uri="{FF2B5EF4-FFF2-40B4-BE49-F238E27FC236}">
-                <a16:creationId xmlns:a16="http://schemas.microsoft.com/office/drawing/2014/main" id="{F61498BE-0804-52E2-8303-E989291162BD}"/>
+                <a16:creationId xmlns:a16="http://schemas.microsoft.com/office/drawing/2014/main" id="{685171AA-1914-D425-7DAB-C018F1D08416}"/>
               </a:ext>
             </a:extLst>
           </p:cNvPr>
@@ -7348,7 +7348,7 @@
           <p:cNvPr id="3" name="文本框 2">
             <a:extLst>
               <a:ext uri="{FF2B5EF4-FFF2-40B4-BE49-F238E27FC236}">
-                <a16:creationId xmlns:a16="http://schemas.microsoft.com/office/drawing/2014/main" id="{82842491-8F32-1BA0-6B25-80BA1323BCF8}"/>
+                <a16:creationId xmlns:a16="http://schemas.microsoft.com/office/drawing/2014/main" id="{A512BDDC-1801-295C-89D3-CF34112A101B}"/>
               </a:ext>
             </a:extLst>
           </p:cNvPr>
@@ -7405,7 +7405,7 @@
           <p:cNvPr id="4" name="文本框 3">
             <a:extLst>
               <a:ext uri="{FF2B5EF4-FFF2-40B4-BE49-F238E27FC236}">
-                <a16:creationId xmlns:a16="http://schemas.microsoft.com/office/drawing/2014/main" id="{2AB1F9D8-AFE9-4CEE-0827-5CB358894907}"/>
+                <a16:creationId xmlns:a16="http://schemas.microsoft.com/office/drawing/2014/main" id="{75C4ADB8-2F8D-C9C0-C871-9E3B85BE116F}"/>
               </a:ext>
             </a:extLst>
           </p:cNvPr>
@@ -7672,7 +7672,7 @@
     </p:spTree>
     <p:extLst>
       <p:ext uri="{BB962C8B-B14F-4D97-AF65-F5344CB8AC3E}">
-        <p14:creationId xmlns:p14="http://schemas.microsoft.com/office/powerpoint/2010/main" val="2320927034"/>
+        <p14:creationId xmlns:p14="http://schemas.microsoft.com/office/powerpoint/2010/main" val="3561177495"/>
       </p:ext>
     </p:extLst>
   </p:cSld>
@@ -7712,7 +7712,7 @@
           <p:cNvPr id="2" name="矩形 1">
             <a:extLst>
               <a:ext uri="{FF2B5EF4-FFF2-40B4-BE49-F238E27FC236}">
-                <a16:creationId xmlns:a16="http://schemas.microsoft.com/office/drawing/2014/main" id="{68E60396-B9F7-3819-974F-BA9E76CDC758}"/>
+                <a16:creationId xmlns:a16="http://schemas.microsoft.com/office/drawing/2014/main" id="{DACE7C3E-8197-A2C3-D395-589F6B7DD0B4}"/>
               </a:ext>
             </a:extLst>
           </p:cNvPr>
@@ -7780,7 +7780,7 @@
           <p:cNvPr id="3" name="文本框 2">
             <a:extLst>
               <a:ext uri="{FF2B5EF4-FFF2-40B4-BE49-F238E27FC236}">
-                <a16:creationId xmlns:a16="http://schemas.microsoft.com/office/drawing/2014/main" id="{D27AD5CC-2292-23F9-7957-6CF3CD198109}"/>
+                <a16:creationId xmlns:a16="http://schemas.microsoft.com/office/drawing/2014/main" id="{46655EE3-CD80-D3CD-375C-0C7A6D6BC8AB}"/>
               </a:ext>
             </a:extLst>
           </p:cNvPr>
@@ -7824,7 +7824,7 @@
           <p:cNvPr id="4" name="文本框 3">
             <a:extLst>
               <a:ext uri="{FF2B5EF4-FFF2-40B4-BE49-F238E27FC236}">
-                <a16:creationId xmlns:a16="http://schemas.microsoft.com/office/drawing/2014/main" id="{0AEA5EC8-30B1-139A-0FA1-3DD7F625F257}"/>
+                <a16:creationId xmlns:a16="http://schemas.microsoft.com/office/drawing/2014/main" id="{236094B0-9C6E-D961-6ACF-17FC03422DF8}"/>
               </a:ext>
             </a:extLst>
           </p:cNvPr>
@@ -8321,7 +8321,7 @@
     </p:spTree>
     <p:extLst>
       <p:ext uri="{BB962C8B-B14F-4D97-AF65-F5344CB8AC3E}">
-        <p14:creationId xmlns:p14="http://schemas.microsoft.com/office/powerpoint/2010/main" val="1380944641"/>
+        <p14:creationId xmlns:p14="http://schemas.microsoft.com/office/powerpoint/2010/main" val="4130068177"/>
       </p:ext>
     </p:extLst>
   </p:cSld>
@@ -8361,7 +8361,7 @@
           <p:cNvPr id="2" name="矩形 1">
             <a:extLst>
               <a:ext uri="{FF2B5EF4-FFF2-40B4-BE49-F238E27FC236}">
-                <a16:creationId xmlns:a16="http://schemas.microsoft.com/office/drawing/2014/main" id="{81699CDB-4748-4B5B-B299-2E0C6370E6D2}"/>
+                <a16:creationId xmlns:a16="http://schemas.microsoft.com/office/drawing/2014/main" id="{CF60F9F6-0422-A990-0ECA-AAE873D885E0}"/>
               </a:ext>
             </a:extLst>
           </p:cNvPr>
@@ -8429,7 +8429,7 @@
           <p:cNvPr id="3" name="文本框 2">
             <a:extLst>
               <a:ext uri="{FF2B5EF4-FFF2-40B4-BE49-F238E27FC236}">
-                <a16:creationId xmlns:a16="http://schemas.microsoft.com/office/drawing/2014/main" id="{9775603F-9D0B-0E99-B46F-05F10E3D28D1}"/>
+                <a16:creationId xmlns:a16="http://schemas.microsoft.com/office/drawing/2014/main" id="{9F873731-0B5B-863B-92A7-95ECE985F0DC}"/>
               </a:ext>
             </a:extLst>
           </p:cNvPr>
@@ -8521,7 +8521,7 @@
           <p:cNvPr id="4" name="文本框 3">
             <a:extLst>
               <a:ext uri="{FF2B5EF4-FFF2-40B4-BE49-F238E27FC236}">
-                <a16:creationId xmlns:a16="http://schemas.microsoft.com/office/drawing/2014/main" id="{41490740-3622-3969-4386-660033999C63}"/>
+                <a16:creationId xmlns:a16="http://schemas.microsoft.com/office/drawing/2014/main" id="{5FA6644A-C14B-CA9A-38BD-C04D20F74382}"/>
               </a:ext>
             </a:extLst>
           </p:cNvPr>
@@ -8788,7 +8788,7 @@
     </p:spTree>
     <p:extLst>
       <p:ext uri="{BB962C8B-B14F-4D97-AF65-F5344CB8AC3E}">
-        <p14:creationId xmlns:p14="http://schemas.microsoft.com/office/powerpoint/2010/main" val="1120428194"/>
+        <p14:creationId xmlns:p14="http://schemas.microsoft.com/office/powerpoint/2010/main" val="3477584118"/>
       </p:ext>
     </p:extLst>
   </p:cSld>
@@ -8828,7 +8828,7 @@
           <p:cNvPr id="2" name="矩形 1">
             <a:extLst>
               <a:ext uri="{FF2B5EF4-FFF2-40B4-BE49-F238E27FC236}">
-                <a16:creationId xmlns:a16="http://schemas.microsoft.com/office/drawing/2014/main" id="{19897DBB-8CA8-94FE-DB4D-BD14616D6FDB}"/>
+                <a16:creationId xmlns:a16="http://schemas.microsoft.com/office/drawing/2014/main" id="{1AFAC831-4C30-5965-2209-625F0E743A04}"/>
               </a:ext>
             </a:extLst>
           </p:cNvPr>
@@ -8896,7 +8896,7 @@
           <p:cNvPr id="3" name="文本框 2">
             <a:extLst>
               <a:ext uri="{FF2B5EF4-FFF2-40B4-BE49-F238E27FC236}">
-                <a16:creationId xmlns:a16="http://schemas.microsoft.com/office/drawing/2014/main" id="{6C71017B-EB0B-D8B0-013E-C9635C4BB013}"/>
+                <a16:creationId xmlns:a16="http://schemas.microsoft.com/office/drawing/2014/main" id="{FAF1B5CF-BC91-7866-E5ED-4E55A3AE2896}"/>
               </a:ext>
             </a:extLst>
           </p:cNvPr>
@@ -8972,7 +8972,7 @@
           <p:cNvPr id="4" name="文本框 3">
             <a:extLst>
               <a:ext uri="{FF2B5EF4-FFF2-40B4-BE49-F238E27FC236}">
-                <a16:creationId xmlns:a16="http://schemas.microsoft.com/office/drawing/2014/main" id="{543667F7-DDEC-447A-9560-565D75F6EBB6}"/>
+                <a16:creationId xmlns:a16="http://schemas.microsoft.com/office/drawing/2014/main" id="{DBB024BC-1B79-1FF0-BA8A-78579E38A030}"/>
               </a:ext>
             </a:extLst>
           </p:cNvPr>
@@ -9383,7 +9383,7 @@
     </p:spTree>
     <p:extLst>
       <p:ext uri="{BB962C8B-B14F-4D97-AF65-F5344CB8AC3E}">
-        <p14:creationId xmlns:p14="http://schemas.microsoft.com/office/powerpoint/2010/main" val="996013719"/>
+        <p14:creationId xmlns:p14="http://schemas.microsoft.com/office/powerpoint/2010/main" val="449556601"/>
       </p:ext>
     </p:extLst>
   </p:cSld>
@@ -9423,7 +9423,7 @@
           <p:cNvPr id="2" name="矩形 1">
             <a:extLst>
               <a:ext uri="{FF2B5EF4-FFF2-40B4-BE49-F238E27FC236}">
-                <a16:creationId xmlns:a16="http://schemas.microsoft.com/office/drawing/2014/main" id="{F71DF24A-AF7E-0FF2-822B-7D9E46430139}"/>
+                <a16:creationId xmlns:a16="http://schemas.microsoft.com/office/drawing/2014/main" id="{C2B3D4E5-6A12-97A4-7978-463CE7AFBDFC}"/>
               </a:ext>
             </a:extLst>
           </p:cNvPr>
@@ -9491,7 +9491,7 @@
           <p:cNvPr id="3" name="文本框 2">
             <a:extLst>
               <a:ext uri="{FF2B5EF4-FFF2-40B4-BE49-F238E27FC236}">
-                <a16:creationId xmlns:a16="http://schemas.microsoft.com/office/drawing/2014/main" id="{4F5000BB-20C3-5AFA-C903-73B4C3165321}"/>
+                <a16:creationId xmlns:a16="http://schemas.microsoft.com/office/drawing/2014/main" id="{0AEE020E-846A-A669-2C4A-FEBA46D2F4F0}"/>
               </a:ext>
             </a:extLst>
           </p:cNvPr>
@@ -9583,7 +9583,7 @@
           <p:cNvPr id="4" name="文本框 3">
             <a:extLst>
               <a:ext uri="{FF2B5EF4-FFF2-40B4-BE49-F238E27FC236}">
-                <a16:creationId xmlns:a16="http://schemas.microsoft.com/office/drawing/2014/main" id="{088F1193-302A-6882-BFBF-62E7B0BCC0CD}"/>
+                <a16:creationId xmlns:a16="http://schemas.microsoft.com/office/drawing/2014/main" id="{C08E186C-B154-1E57-A175-1649414BC7C4}"/>
               </a:ext>
             </a:extLst>
           </p:cNvPr>
@@ -10037,7 +10037,7 @@
     </p:spTree>
     <p:extLst>
       <p:ext uri="{BB962C8B-B14F-4D97-AF65-F5344CB8AC3E}">
-        <p14:creationId xmlns:p14="http://schemas.microsoft.com/office/powerpoint/2010/main" val="891754317"/>
+        <p14:creationId xmlns:p14="http://schemas.microsoft.com/office/powerpoint/2010/main" val="482593565"/>
       </p:ext>
     </p:extLst>
   </p:cSld>
@@ -10077,7 +10077,7 @@
           <p:cNvPr id="2" name="矩形 1">
             <a:extLst>
               <a:ext uri="{FF2B5EF4-FFF2-40B4-BE49-F238E27FC236}">
-                <a16:creationId xmlns:a16="http://schemas.microsoft.com/office/drawing/2014/main" id="{04E5875E-FA6E-30A0-A19A-45A58C20F4BA}"/>
+                <a16:creationId xmlns:a16="http://schemas.microsoft.com/office/drawing/2014/main" id="{55548741-8E5B-BF77-84CE-21CD632E20C6}"/>
               </a:ext>
             </a:extLst>
           </p:cNvPr>
@@ -10145,7 +10145,7 @@
           <p:cNvPr id="3" name="文本框 2">
             <a:extLst>
               <a:ext uri="{FF2B5EF4-FFF2-40B4-BE49-F238E27FC236}">
-                <a16:creationId xmlns:a16="http://schemas.microsoft.com/office/drawing/2014/main" id="{55CC9802-C020-FAB9-9D5E-6CF02B461021}"/>
+                <a16:creationId xmlns:a16="http://schemas.microsoft.com/office/drawing/2014/main" id="{6C3F3950-5922-3433-4F27-46D8922A9656}"/>
               </a:ext>
             </a:extLst>
           </p:cNvPr>
@@ -10189,7 +10189,7 @@
           <p:cNvPr id="5" name="图片 4">
             <a:extLst>
               <a:ext uri="{FF2B5EF4-FFF2-40B4-BE49-F238E27FC236}">
-                <a16:creationId xmlns:a16="http://schemas.microsoft.com/office/drawing/2014/main" id="{C0624053-388B-92E9-FA8B-2967F3D8A4DA}"/>
+                <a16:creationId xmlns:a16="http://schemas.microsoft.com/office/drawing/2014/main" id="{33F51C6B-CE5F-EC90-9AEF-1A9035643450}"/>
               </a:ext>
             </a:extLst>
           </p:cNvPr>
@@ -10225,7 +10225,7 @@
           <p:cNvPr id="6" name="文本框 5">
             <a:extLst>
               <a:ext uri="{FF2B5EF4-FFF2-40B4-BE49-F238E27FC236}">
-                <a16:creationId xmlns:a16="http://schemas.microsoft.com/office/drawing/2014/main" id="{317A86E9-4941-9CD6-8021-06B4D949713A}"/>
+                <a16:creationId xmlns:a16="http://schemas.microsoft.com/office/drawing/2014/main" id="{C6F582B0-D5F7-56F3-846D-19F96428DA5A}"/>
               </a:ext>
             </a:extLst>
           </p:cNvPr>
@@ -10283,7 +10283,7 @@
     </p:spTree>
     <p:extLst>
       <p:ext uri="{BB962C8B-B14F-4D97-AF65-F5344CB8AC3E}">
-        <p14:creationId xmlns:p14="http://schemas.microsoft.com/office/powerpoint/2010/main" val="3644508482"/>
+        <p14:creationId xmlns:p14="http://schemas.microsoft.com/office/powerpoint/2010/main" val="1573504635"/>
       </p:ext>
     </p:extLst>
   </p:cSld>
@@ -10323,7 +10323,7 @@
           <p:cNvPr id="2" name="矩形 1">
             <a:extLst>
               <a:ext uri="{FF2B5EF4-FFF2-40B4-BE49-F238E27FC236}">
-                <a16:creationId xmlns:a16="http://schemas.microsoft.com/office/drawing/2014/main" id="{C655C3D9-0A4A-AB72-1019-B1D7F48E4C2C}"/>
+                <a16:creationId xmlns:a16="http://schemas.microsoft.com/office/drawing/2014/main" id="{0DACDA9B-A548-98E3-FFCC-8C15DAB52A84}"/>
               </a:ext>
             </a:extLst>
           </p:cNvPr>
@@ -10391,7 +10391,7 @@
           <p:cNvPr id="3" name="文本框 2">
             <a:extLst>
               <a:ext uri="{FF2B5EF4-FFF2-40B4-BE49-F238E27FC236}">
-                <a16:creationId xmlns:a16="http://schemas.microsoft.com/office/drawing/2014/main" id="{037636BD-FFD0-C564-B8C0-1C1423AF9CFC}"/>
+                <a16:creationId xmlns:a16="http://schemas.microsoft.com/office/drawing/2014/main" id="{ED688E3C-F7D2-9884-6B84-3B19D567BBB0}"/>
               </a:ext>
             </a:extLst>
           </p:cNvPr>
@@ -10435,7 +10435,7 @@
           <p:cNvPr id="4" name="文本框 3">
             <a:extLst>
               <a:ext uri="{FF2B5EF4-FFF2-40B4-BE49-F238E27FC236}">
-                <a16:creationId xmlns:a16="http://schemas.microsoft.com/office/drawing/2014/main" id="{53C79F17-5BA8-780A-F646-44C5D0AA9E97}"/>
+                <a16:creationId xmlns:a16="http://schemas.microsoft.com/office/drawing/2014/main" id="{D4210C32-60FB-6D40-A877-A408E4C3323B}"/>
               </a:ext>
             </a:extLst>
           </p:cNvPr>
@@ -10937,7 +10937,7 @@
     </p:spTree>
     <p:extLst>
       <p:ext uri="{BB962C8B-B14F-4D97-AF65-F5344CB8AC3E}">
-        <p14:creationId xmlns:p14="http://schemas.microsoft.com/office/powerpoint/2010/main" val="2175615031"/>
+        <p14:creationId xmlns:p14="http://schemas.microsoft.com/office/powerpoint/2010/main" val="1997281490"/>
       </p:ext>
     </p:extLst>
   </p:cSld>
@@ -10977,7 +10977,7 @@
           <p:cNvPr id="2" name="矩形 1">
             <a:extLst>
               <a:ext uri="{FF2B5EF4-FFF2-40B4-BE49-F238E27FC236}">
-                <a16:creationId xmlns:a16="http://schemas.microsoft.com/office/drawing/2014/main" id="{99215811-3AD5-7841-2C7F-2E97F4A4E2CE}"/>
+                <a16:creationId xmlns:a16="http://schemas.microsoft.com/office/drawing/2014/main" id="{9D1B7198-0D50-5FFA-C7DD-7AF913CDB8E4}"/>
               </a:ext>
             </a:extLst>
           </p:cNvPr>
@@ -11045,7 +11045,7 @@
           <p:cNvPr id="3" name="文本框 2">
             <a:extLst>
               <a:ext uri="{FF2B5EF4-FFF2-40B4-BE49-F238E27FC236}">
-                <a16:creationId xmlns:a16="http://schemas.microsoft.com/office/drawing/2014/main" id="{3CB38BC4-7353-C8C9-662C-12BB832F63F9}"/>
+                <a16:creationId xmlns:a16="http://schemas.microsoft.com/office/drawing/2014/main" id="{BC3E9AA5-CCFB-6910-A606-6B37ABEA34DC}"/>
               </a:ext>
             </a:extLst>
           </p:cNvPr>
@@ -11100,10 +11100,328 @@
           </a:p>
         </p:txBody>
       </p:sp>
+      <p:pic>
+        <p:nvPicPr>
+          <p:cNvPr id="5" name="图片 4">
+            <a:extLst>
+              <a:ext uri="{FF2B5EF4-FFF2-40B4-BE49-F238E27FC236}">
+                <a16:creationId xmlns:a16="http://schemas.microsoft.com/office/drawing/2014/main" id="{33604C37-0D3F-94F2-711C-CD15C1A21DBD}"/>
+              </a:ext>
+            </a:extLst>
+          </p:cNvPr>
+          <p:cNvPicPr>
+            <a:picLocks/>
+          </p:cNvPicPr>
+          <p:nvPr/>
+        </p:nvPicPr>
+        <p:blipFill>
+          <a:blip r:embed="rId3">
+            <a:extLst>
+              <a:ext uri="{28A0092B-C50C-407E-A947-70E740481C1C}">
+                <a14:useLocalDpi xmlns:a14="http://schemas.microsoft.com/office/drawing/2010/main" val="0"/>
+              </a:ext>
+            </a:extLst>
+          </a:blip>
+          <a:stretch>
+            <a:fillRect/>
+          </a:stretch>
+        </p:blipFill>
+        <p:spPr>
+          <a:xfrm>
+            <a:off x="508000" y="965200"/>
+            <a:ext cx="5969000" cy="3403600"/>
+          </a:xfrm>
+          <a:prstGeom prst="rect">
+            <a:avLst/>
+          </a:prstGeom>
+        </p:spPr>
+      </p:pic>
+      <p:sp>
+        <p:nvSpPr>
+          <p:cNvPr id="6" name="文本框 5">
+            <a:extLst>
+              <a:ext uri="{FF2B5EF4-FFF2-40B4-BE49-F238E27FC236}">
+                <a16:creationId xmlns:a16="http://schemas.microsoft.com/office/drawing/2014/main" id="{AE6E091D-D330-DBA6-0302-50DA17915674}"/>
+              </a:ext>
+            </a:extLst>
+          </p:cNvPr>
+          <p:cNvSpPr txBox="1"/>
+          <p:nvPr/>
+        </p:nvSpPr>
+        <p:spPr>
+          <a:xfrm>
+            <a:off x="6667500" y="1016000"/>
+            <a:ext cx="5080000" cy="2152384"/>
+          </a:xfrm>
+          <a:prstGeom prst="rect">
+            <a:avLst/>
+          </a:prstGeom>
+          <a:noFill/>
+        </p:spPr>
+        <p:txBody>
+          <a:bodyPr vert="horz" wrap="square" rtlCol="0">
+            <a:spAutoFit/>
+          </a:bodyPr>
+          <a:lstStyle/>
+          <a:p>
+            <a:pPr>
+              <a:lnSpc>
+                <a:spcPct val="130000"/>
+              </a:lnSpc>
+            </a:pPr>
+            <a:r>
+              <a:rPr lang="zh-CN" altLang="en-US" sz="1300">
+                <a:solidFill>
+                  <a:srgbClr val="101828"/>
+                </a:solidFill>
+              </a:rPr>
+              <a:t>高光 </a:t>
+            </a:r>
+            <a:r>
+              <a:rPr lang="en-US" altLang="zh-CN" sz="1300">
+                <a:solidFill>
+                  <a:srgbClr val="101828"/>
+                </a:solidFill>
+              </a:rPr>
+              <a:t>A · </a:t>
+            </a:r>
+            <a:r>
+              <a:rPr lang="zh-CN" altLang="en-US" sz="1300">
+                <a:solidFill>
+                  <a:srgbClr val="101828"/>
+                </a:solidFill>
+              </a:rPr>
+              <a:t>风控拦截：给陌生账户转 </a:t>
+            </a:r>
+            <a:r>
+              <a:rPr lang="en-US" altLang="zh-CN" sz="1300">
+                <a:solidFill>
+                  <a:srgbClr val="101828"/>
+                </a:solidFill>
+              </a:rPr>
+              <a:t>2 </a:t>
+            </a:r>
+            <a:r>
+              <a:rPr lang="zh-CN" altLang="en-US" sz="1300">
+                <a:solidFill>
+                  <a:srgbClr val="101828"/>
+                </a:solidFill>
+              </a:rPr>
+              <a:t>万（尾号命中涉诈黑名单）→ 直接拦截，不提供确认入口，提示拨打 </a:t>
+            </a:r>
+            <a:r>
+              <a:rPr lang="en-US" altLang="zh-CN" sz="1300">
+                <a:solidFill>
+                  <a:srgbClr val="101828"/>
+                </a:solidFill>
+              </a:rPr>
+              <a:t>96110</a:t>
+            </a:r>
+          </a:p>
+          <a:p>
+            <a:pPr>
+              <a:lnSpc>
+                <a:spcPct val="130000"/>
+              </a:lnSpc>
+            </a:pPr>
+            <a:endParaRPr lang="en-US" altLang="zh-CN" sz="1300">
+              <a:solidFill>
+                <a:srgbClr val="101828"/>
+              </a:solidFill>
+            </a:endParaRPr>
+          </a:p>
+          <a:p>
+            <a:pPr>
+              <a:lnSpc>
+                <a:spcPct val="130000"/>
+              </a:lnSpc>
+            </a:pPr>
+            <a:r>
+              <a:rPr lang="zh-CN" altLang="en-US" sz="1300">
+                <a:solidFill>
+                  <a:srgbClr val="101828"/>
+                </a:solidFill>
+              </a:rPr>
+              <a:t>高光 </a:t>
+            </a:r>
+            <a:r>
+              <a:rPr lang="en-US" altLang="zh-CN" sz="1300">
+                <a:solidFill>
+                  <a:srgbClr val="101828"/>
+                </a:solidFill>
+              </a:rPr>
+              <a:t>B · </a:t>
+            </a:r>
+            <a:r>
+              <a:rPr lang="zh-CN" altLang="en-US" sz="1300">
+                <a:solidFill>
+                  <a:srgbClr val="101828"/>
+                </a:solidFill>
+              </a:rPr>
+              <a:t>多因子：给妈妈转 </a:t>
+            </a:r>
+            <a:r>
+              <a:rPr lang="en-US" altLang="zh-CN" sz="1300">
+                <a:solidFill>
+                  <a:srgbClr val="101828"/>
+                </a:solidFill>
+              </a:rPr>
+              <a:t>2,000 → </a:t>
+            </a:r>
+            <a:r>
+              <a:rPr lang="zh-CN" altLang="en-US" sz="1300">
+                <a:solidFill>
+                  <a:srgbClr val="101828"/>
+                </a:solidFill>
+              </a:rPr>
+              <a:t>判定红色（当日累计超 </a:t>
+            </a:r>
+            <a:r>
+              <a:rPr lang="en-US" altLang="zh-CN" sz="1300">
+                <a:solidFill>
+                  <a:srgbClr val="101828"/>
+                </a:solidFill>
+              </a:rPr>
+              <a:t>¥1,000</a:t>
+            </a:r>
+            <a:r>
+              <a:rPr lang="zh-CN" altLang="en-US" sz="1300">
+                <a:solidFill>
+                  <a:srgbClr val="101828"/>
+                </a:solidFill>
+              </a:rPr>
+              <a:t>）→ 需短信验证码 </a:t>
+            </a:r>
+            <a:r>
+              <a:rPr lang="en-US" altLang="zh-CN" sz="1300">
+                <a:solidFill>
+                  <a:srgbClr val="101828"/>
+                </a:solidFill>
+              </a:rPr>
+              <a:t>+ </a:t>
+            </a:r>
+            <a:r>
+              <a:rPr lang="zh-CN" altLang="en-US" sz="1300">
+                <a:solidFill>
+                  <a:srgbClr val="101828"/>
+                </a:solidFill>
+              </a:rPr>
+              <a:t>人脸识别，两因子未齐时按钮禁用</a:t>
+            </a:r>
+          </a:p>
+          <a:p>
+            <a:pPr>
+              <a:lnSpc>
+                <a:spcPct val="130000"/>
+              </a:lnSpc>
+            </a:pPr>
+            <a:endParaRPr lang="zh-CN" altLang="en-US" sz="1300">
+              <a:solidFill>
+                <a:srgbClr val="101828"/>
+              </a:solidFill>
+            </a:endParaRPr>
+          </a:p>
+          <a:p>
+            <a:pPr>
+              <a:lnSpc>
+                <a:spcPct val="130000"/>
+              </a:lnSpc>
+            </a:pPr>
+            <a:r>
+              <a:rPr lang="zh-CN" altLang="en-US" sz="1300">
+                <a:solidFill>
+                  <a:srgbClr val="101828"/>
+                </a:solidFill>
+              </a:rPr>
+              <a:t>高光 </a:t>
+            </a:r>
+            <a:r>
+              <a:rPr lang="en-US" altLang="zh-CN" sz="1300">
+                <a:solidFill>
+                  <a:srgbClr val="101828"/>
+                </a:solidFill>
+              </a:rPr>
+              <a:t>C · </a:t>
+            </a:r>
+            <a:r>
+              <a:rPr lang="zh-CN" altLang="en-US" sz="1300">
+                <a:solidFill>
+                  <a:srgbClr val="101828"/>
+                </a:solidFill>
+              </a:rPr>
+              <a:t>跨场景：一句“下周我妈生日” → 主动补问 → 锁定 </a:t>
+            </a:r>
+            <a:r>
+              <a:rPr lang="en-US" altLang="zh-CN" sz="1300">
+                <a:solidFill>
+                  <a:srgbClr val="101828"/>
+                </a:solidFill>
+              </a:rPr>
+              <a:t>¥500 → </a:t>
+            </a:r>
+            <a:r>
+              <a:rPr lang="zh-CN" altLang="en-US" sz="1300">
+                <a:solidFill>
+                  <a:srgbClr val="101828"/>
+                </a:solidFill>
+              </a:rPr>
+              <a:t>生日前 </a:t>
+            </a:r>
+            <a:r>
+              <a:rPr lang="en-US" altLang="zh-CN" sz="1300">
+                <a:solidFill>
+                  <a:srgbClr val="101828"/>
+                </a:solidFill>
+              </a:rPr>
+              <a:t>2 </a:t>
+            </a:r>
+            <a:r>
+              <a:rPr lang="zh-CN" altLang="en-US" sz="1300">
+                <a:solidFill>
+                  <a:srgbClr val="101828"/>
+                </a:solidFill>
+              </a:rPr>
+              <a:t>天自动下单（</a:t>
+            </a:r>
+            <a:r>
+              <a:rPr lang="en-US" altLang="zh-CN" sz="1300">
+                <a:solidFill>
+                  <a:srgbClr val="101828"/>
+                </a:solidFill>
+              </a:rPr>
+              <a:t>¥486</a:t>
+            </a:r>
+            <a:r>
+              <a:rPr lang="zh-CN" altLang="en-US" sz="1300">
+                <a:solidFill>
+                  <a:srgbClr val="101828"/>
+                </a:solidFill>
+              </a:rPr>
+              <a:t>，留 </a:t>
+            </a:r>
+            <a:r>
+              <a:rPr lang="en-US" altLang="zh-CN" sz="1300">
+                <a:solidFill>
+                  <a:srgbClr val="101828"/>
+                </a:solidFill>
+              </a:rPr>
+              <a:t>¥14</a:t>
+            </a:r>
+            <a:r>
+              <a:rPr lang="zh-CN" altLang="en-US" sz="1300">
+                <a:solidFill>
+                  <a:srgbClr val="101828"/>
+                </a:solidFill>
+              </a:rPr>
+              <a:t>） → 生成提醒</a:t>
+            </a:r>
+          </a:p>
+        </p:txBody>
+      </p:sp>
     </p:spTree>
     <p:extLst>
       <p:ext uri="{BB962C8B-B14F-4D97-AF65-F5344CB8AC3E}">
-        <p14:creationId xmlns:p14="http://schemas.microsoft.com/office/powerpoint/2010/main" val="1559896897"/>
+        <p14:creationId xmlns:p14="http://schemas.microsoft.com/office/powerpoint/2010/main" val="4215671574"/>
       </p:ext>
     </p:extLst>
   </p:cSld>

--- a/docs/提交材料/答辩PPT.pptx
+++ b/docs/提交材料/答辩PPT.pptx
@@ -202,9 +202,9 @@
             </a:lvl1pPr>
           </a:lstStyle>
           <a:p>
-            <a:fld id="{674F6C53-26F5-48E8-B1C8-0019853847D6}" type="datetimeFigureOut">
+            <a:fld id="{4FAACD87-5F1F-49D9-8D82-101C70DD2064}" type="datetimeFigureOut">
               <a:rPr lang="zh-CN" altLang="en-US" smtClean="0"/>
-              <a:t>2026/9/22</a:t>
+              <a:t>2026/9/23</a:t>
             </a:fld>
             <a:endParaRPr lang="zh-CN" altLang="en-US"/>
           </a:p>
@@ -360,7 +360,7 @@
             </a:lvl1pPr>
           </a:lstStyle>
           <a:p>
-            <a:fld id="{C9F542EC-6771-454B-8AA4-C6BBEEA52160}" type="slidenum">
+            <a:fld id="{E0DB3606-12F5-4250-BA2E-02DE2AC546E3}" type="slidenum">
               <a:rPr lang="zh-CN" altLang="en-US" smtClean="0"/>
               <a:t>‹#›</a:t>
             </a:fld>
@@ -371,7 +371,7 @@
     </p:spTree>
     <p:extLst>
       <p:ext uri="{BB962C8B-B14F-4D97-AF65-F5344CB8AC3E}">
-        <p14:creationId xmlns:p14="http://schemas.microsoft.com/office/powerpoint/2010/main" val="251876104"/>
+        <p14:creationId xmlns:p14="http://schemas.microsoft.com/office/powerpoint/2010/main" val="1143060283"/>
       </p:ext>
     </p:extLst>
   </p:cSld>
@@ -573,7 +573,7 @@
           <a:bodyPr/>
           <a:lstStyle/>
           <a:p>
-            <a:fld id="{C9F542EC-6771-454B-8AA4-C6BBEEA52160}" type="slidenum">
+            <a:fld id="{E0DB3606-12F5-4250-BA2E-02DE2AC546E3}" type="slidenum">
               <a:rPr lang="zh-CN" altLang="en-US" smtClean="0"/>
               <a:t>1</a:t>
             </a:fld>
@@ -584,7 +584,7 @@
     </p:spTree>
     <p:extLst>
       <p:ext uri="{BB962C8B-B14F-4D97-AF65-F5344CB8AC3E}">
-        <p14:creationId xmlns:p14="http://schemas.microsoft.com/office/powerpoint/2010/main" val="814447241"/>
+        <p14:creationId xmlns:p14="http://schemas.microsoft.com/office/powerpoint/2010/main" val="389729324"/>
       </p:ext>
     </p:extLst>
   </p:cSld>
@@ -648,7 +648,7 @@
             </a:r>
             <a:r>
               <a:rPr lang="en-US" altLang="zh-CN"/>
-              <a:t>329 </a:t>
+              <a:t>336 </a:t>
             </a:r>
             <a:r>
               <a:rPr lang="zh-CN" altLang="en-US"/>
@@ -660,7 +660,23 @@
             </a:r>
             <a:r>
               <a:rPr lang="zh-CN" altLang="en-US"/>
-              <a:t>专项验证。</a:t>
+              <a:t>专项验证。 补充：我们还把「回退上一步」与「转人工接管」做进了系统，并用 </a:t>
+            </a:r>
+            <a:r>
+              <a:rPr lang="en-US" altLang="zh-CN"/>
+              <a:t>50+ </a:t>
+            </a:r>
+            <a:r>
+              <a:rPr lang="zh-CN" altLang="en-US"/>
+              <a:t>句现场台词做了路由审计（</a:t>
+            </a:r>
+            <a:r>
+              <a:rPr lang="en-US" altLang="zh-CN"/>
+              <a:t>npm run audit</a:t>
+            </a:r>
+            <a:r>
+              <a:rPr lang="zh-CN" altLang="en-US"/>
+              <a:t>）。</a:t>
             </a:r>
           </a:p>
         </p:txBody>
@@ -680,7 +696,7 @@
           <a:bodyPr/>
           <a:lstStyle/>
           <a:p>
-            <a:fld id="{C9F542EC-6771-454B-8AA4-C6BBEEA52160}" type="slidenum">
+            <a:fld id="{E0DB3606-12F5-4250-BA2E-02DE2AC546E3}" type="slidenum">
               <a:rPr lang="zh-CN" altLang="en-US" smtClean="0"/>
               <a:t>10</a:t>
             </a:fld>
@@ -691,7 +707,7 @@
     </p:spTree>
     <p:extLst>
       <p:ext uri="{BB962C8B-B14F-4D97-AF65-F5344CB8AC3E}">
-        <p14:creationId xmlns:p14="http://schemas.microsoft.com/office/powerpoint/2010/main" val="2944027829"/>
+        <p14:creationId xmlns:p14="http://schemas.microsoft.com/office/powerpoint/2010/main" val="1710010856"/>
       </p:ext>
     </p:extLst>
   </p:cSld>
@@ -771,7 +787,7 @@
           <a:bodyPr/>
           <a:lstStyle/>
           <a:p>
-            <a:fld id="{C9F542EC-6771-454B-8AA4-C6BBEEA52160}" type="slidenum">
+            <a:fld id="{E0DB3606-12F5-4250-BA2E-02DE2AC546E3}" type="slidenum">
               <a:rPr lang="zh-CN" altLang="en-US" smtClean="0"/>
               <a:t>11</a:t>
             </a:fld>
@@ -782,7 +798,7 @@
     </p:spTree>
     <p:extLst>
       <p:ext uri="{BB962C8B-B14F-4D97-AF65-F5344CB8AC3E}">
-        <p14:creationId xmlns:p14="http://schemas.microsoft.com/office/powerpoint/2010/main" val="1902030083"/>
+        <p14:creationId xmlns:p14="http://schemas.microsoft.com/office/powerpoint/2010/main" val="1704472927"/>
       </p:ext>
     </p:extLst>
   </p:cSld>
@@ -862,7 +878,7 @@
           <a:bodyPr/>
           <a:lstStyle/>
           <a:p>
-            <a:fld id="{C9F542EC-6771-454B-8AA4-C6BBEEA52160}" type="slidenum">
+            <a:fld id="{E0DB3606-12F5-4250-BA2E-02DE2AC546E3}" type="slidenum">
               <a:rPr lang="zh-CN" altLang="en-US" smtClean="0"/>
               <a:t>12</a:t>
             </a:fld>
@@ -873,7 +889,7 @@
     </p:spTree>
     <p:extLst>
       <p:ext uri="{BB962C8B-B14F-4D97-AF65-F5344CB8AC3E}">
-        <p14:creationId xmlns:p14="http://schemas.microsoft.com/office/powerpoint/2010/main" val="1614497117"/>
+        <p14:creationId xmlns:p14="http://schemas.microsoft.com/office/powerpoint/2010/main" val="1114750339"/>
       </p:ext>
     </p:extLst>
   </p:cSld>
@@ -953,7 +969,7 @@
           <a:bodyPr/>
           <a:lstStyle/>
           <a:p>
-            <a:fld id="{C9F542EC-6771-454B-8AA4-C6BBEEA52160}" type="slidenum">
+            <a:fld id="{E0DB3606-12F5-4250-BA2E-02DE2AC546E3}" type="slidenum">
               <a:rPr lang="zh-CN" altLang="en-US" smtClean="0"/>
               <a:t>13</a:t>
             </a:fld>
@@ -964,7 +980,7 @@
     </p:spTree>
     <p:extLst>
       <p:ext uri="{BB962C8B-B14F-4D97-AF65-F5344CB8AC3E}">
-        <p14:creationId xmlns:p14="http://schemas.microsoft.com/office/powerpoint/2010/main" val="2264103260"/>
+        <p14:creationId xmlns:p14="http://schemas.microsoft.com/office/powerpoint/2010/main" val="970044733"/>
       </p:ext>
     </p:extLst>
   </p:cSld>
@@ -1060,7 +1076,7 @@
           <a:bodyPr/>
           <a:lstStyle/>
           <a:p>
-            <a:fld id="{C9F542EC-6771-454B-8AA4-C6BBEEA52160}" type="slidenum">
+            <a:fld id="{E0DB3606-12F5-4250-BA2E-02DE2AC546E3}" type="slidenum">
               <a:rPr lang="zh-CN" altLang="en-US" smtClean="0"/>
               <a:t>2</a:t>
             </a:fld>
@@ -1071,7 +1087,7 @@
     </p:spTree>
     <p:extLst>
       <p:ext uri="{BB962C8B-B14F-4D97-AF65-F5344CB8AC3E}">
-        <p14:creationId xmlns:p14="http://schemas.microsoft.com/office/powerpoint/2010/main" val="1049305733"/>
+        <p14:creationId xmlns:p14="http://schemas.microsoft.com/office/powerpoint/2010/main" val="3426810806"/>
       </p:ext>
     </p:extLst>
   </p:cSld>
@@ -1151,7 +1167,7 @@
           <a:bodyPr/>
           <a:lstStyle/>
           <a:p>
-            <a:fld id="{C9F542EC-6771-454B-8AA4-C6BBEEA52160}" type="slidenum">
+            <a:fld id="{E0DB3606-12F5-4250-BA2E-02DE2AC546E3}" type="slidenum">
               <a:rPr lang="zh-CN" altLang="en-US" smtClean="0"/>
               <a:t>3</a:t>
             </a:fld>
@@ -1162,7 +1178,7 @@
     </p:spTree>
     <p:extLst>
       <p:ext uri="{BB962C8B-B14F-4D97-AF65-F5344CB8AC3E}">
-        <p14:creationId xmlns:p14="http://schemas.microsoft.com/office/powerpoint/2010/main" val="2006229914"/>
+        <p14:creationId xmlns:p14="http://schemas.microsoft.com/office/powerpoint/2010/main" val="1591887531"/>
       </p:ext>
     </p:extLst>
   </p:cSld>
@@ -1258,7 +1274,7 @@
           <a:bodyPr/>
           <a:lstStyle/>
           <a:p>
-            <a:fld id="{C9F542EC-6771-454B-8AA4-C6BBEEA52160}" type="slidenum">
+            <a:fld id="{E0DB3606-12F5-4250-BA2E-02DE2AC546E3}" type="slidenum">
               <a:rPr lang="zh-CN" altLang="en-US" smtClean="0"/>
               <a:t>4</a:t>
             </a:fld>
@@ -1269,7 +1285,7 @@
     </p:spTree>
     <p:extLst>
       <p:ext uri="{BB962C8B-B14F-4D97-AF65-F5344CB8AC3E}">
-        <p14:creationId xmlns:p14="http://schemas.microsoft.com/office/powerpoint/2010/main" val="905478798"/>
+        <p14:creationId xmlns:p14="http://schemas.microsoft.com/office/powerpoint/2010/main" val="2908217263"/>
       </p:ext>
     </p:extLst>
   </p:cSld>
@@ -1365,7 +1381,7 @@
           <a:bodyPr/>
           <a:lstStyle/>
           <a:p>
-            <a:fld id="{C9F542EC-6771-454B-8AA4-C6BBEEA52160}" type="slidenum">
+            <a:fld id="{E0DB3606-12F5-4250-BA2E-02DE2AC546E3}" type="slidenum">
               <a:rPr lang="zh-CN" altLang="en-US" smtClean="0"/>
               <a:t>5</a:t>
             </a:fld>
@@ -1376,7 +1392,7 @@
     </p:spTree>
     <p:extLst>
       <p:ext uri="{BB962C8B-B14F-4D97-AF65-F5344CB8AC3E}">
-        <p14:creationId xmlns:p14="http://schemas.microsoft.com/office/powerpoint/2010/main" val="1481527021"/>
+        <p14:creationId xmlns:p14="http://schemas.microsoft.com/office/powerpoint/2010/main" val="3190196067"/>
       </p:ext>
     </p:extLst>
   </p:cSld>
@@ -1456,7 +1472,7 @@
           <a:bodyPr/>
           <a:lstStyle/>
           <a:p>
-            <a:fld id="{C9F542EC-6771-454B-8AA4-C6BBEEA52160}" type="slidenum">
+            <a:fld id="{E0DB3606-12F5-4250-BA2E-02DE2AC546E3}" type="slidenum">
               <a:rPr lang="zh-CN" altLang="en-US" smtClean="0"/>
               <a:t>6</a:t>
             </a:fld>
@@ -1467,7 +1483,7 @@
     </p:spTree>
     <p:extLst>
       <p:ext uri="{BB962C8B-B14F-4D97-AF65-F5344CB8AC3E}">
-        <p14:creationId xmlns:p14="http://schemas.microsoft.com/office/powerpoint/2010/main" val="2209869128"/>
+        <p14:creationId xmlns:p14="http://schemas.microsoft.com/office/powerpoint/2010/main" val="3631935859"/>
       </p:ext>
     </p:extLst>
   </p:cSld>
@@ -1547,7 +1563,7 @@
           <a:bodyPr/>
           <a:lstStyle/>
           <a:p>
-            <a:fld id="{C9F542EC-6771-454B-8AA4-C6BBEEA52160}" type="slidenum">
+            <a:fld id="{E0DB3606-12F5-4250-BA2E-02DE2AC546E3}" type="slidenum">
               <a:rPr lang="zh-CN" altLang="en-US" smtClean="0"/>
               <a:t>7</a:t>
             </a:fld>
@@ -1558,7 +1574,7 @@
     </p:spTree>
     <p:extLst>
       <p:ext uri="{BB962C8B-B14F-4D97-AF65-F5344CB8AC3E}">
-        <p14:creationId xmlns:p14="http://schemas.microsoft.com/office/powerpoint/2010/main" val="2187103243"/>
+        <p14:creationId xmlns:p14="http://schemas.microsoft.com/office/powerpoint/2010/main" val="2124538240"/>
       </p:ext>
     </p:extLst>
   </p:cSld>
@@ -1670,7 +1686,7 @@
           <a:bodyPr/>
           <a:lstStyle/>
           <a:p>
-            <a:fld id="{C9F542EC-6771-454B-8AA4-C6BBEEA52160}" type="slidenum">
+            <a:fld id="{E0DB3606-12F5-4250-BA2E-02DE2AC546E3}" type="slidenum">
               <a:rPr lang="zh-CN" altLang="en-US" smtClean="0"/>
               <a:t>8</a:t>
             </a:fld>
@@ -1681,7 +1697,7 @@
     </p:spTree>
     <p:extLst>
       <p:ext uri="{BB962C8B-B14F-4D97-AF65-F5344CB8AC3E}">
-        <p14:creationId xmlns:p14="http://schemas.microsoft.com/office/powerpoint/2010/main" val="2380392495"/>
+        <p14:creationId xmlns:p14="http://schemas.microsoft.com/office/powerpoint/2010/main" val="1745895999"/>
       </p:ext>
     </p:extLst>
   </p:cSld>
@@ -1761,7 +1777,7 @@
           <a:bodyPr/>
           <a:lstStyle/>
           <a:p>
-            <a:fld id="{C9F542EC-6771-454B-8AA4-C6BBEEA52160}" type="slidenum">
+            <a:fld id="{E0DB3606-12F5-4250-BA2E-02DE2AC546E3}" type="slidenum">
               <a:rPr lang="zh-CN" altLang="en-US" smtClean="0"/>
               <a:t>9</a:t>
             </a:fld>
@@ -1772,7 +1788,7 @@
     </p:spTree>
     <p:extLst>
       <p:ext uri="{BB962C8B-B14F-4D97-AF65-F5344CB8AC3E}">
-        <p14:creationId xmlns:p14="http://schemas.microsoft.com/office/powerpoint/2010/main" val="3942201287"/>
+        <p14:creationId xmlns:p14="http://schemas.microsoft.com/office/powerpoint/2010/main" val="2621029138"/>
       </p:ext>
     </p:extLst>
   </p:cSld>
@@ -1804,7 +1820,7 @@
           <p:cNvPr id="2" name="标题 1">
             <a:extLst>
               <a:ext uri="{FF2B5EF4-FFF2-40B4-BE49-F238E27FC236}">
-                <a16:creationId xmlns:a16="http://schemas.microsoft.com/office/drawing/2014/main" id="{7D32FC04-27A6-1324-26A5-145CEFC814F8}"/>
+                <a16:creationId xmlns:a16="http://schemas.microsoft.com/office/drawing/2014/main" id="{5B2C2808-EE1B-8437-F143-82D96B1935FB}"/>
               </a:ext>
             </a:extLst>
           </p:cNvPr>
@@ -1841,7 +1857,7 @@
           <p:cNvPr id="3" name="副标题 2">
             <a:extLst>
               <a:ext uri="{FF2B5EF4-FFF2-40B4-BE49-F238E27FC236}">
-                <a16:creationId xmlns:a16="http://schemas.microsoft.com/office/drawing/2014/main" id="{F81DC225-FA59-CECC-2B13-B4C444D0C652}"/>
+                <a16:creationId xmlns:a16="http://schemas.microsoft.com/office/drawing/2014/main" id="{A12202D8-2A99-9494-F2C4-BEA048AF9BD3}"/>
               </a:ext>
             </a:extLst>
           </p:cNvPr>
@@ -1911,7 +1927,7 @@
           <p:cNvPr id="4" name="日期占位符 3">
             <a:extLst>
               <a:ext uri="{FF2B5EF4-FFF2-40B4-BE49-F238E27FC236}">
-                <a16:creationId xmlns:a16="http://schemas.microsoft.com/office/drawing/2014/main" id="{6D9F6E13-1557-2D14-F0CB-8F40CBC7C5A6}"/>
+                <a16:creationId xmlns:a16="http://schemas.microsoft.com/office/drawing/2014/main" id="{19392A27-42D9-E702-E17C-B1E5C3958524}"/>
               </a:ext>
             </a:extLst>
           </p:cNvPr>
@@ -1927,9 +1943,9 @@
           <a:bodyPr/>
           <a:lstStyle/>
           <a:p>
-            <a:fld id="{E9E706D5-8B20-4F05-BE41-D342EF88F631}" type="datetimeFigureOut">
+            <a:fld id="{1866EC5C-AF1B-490E-A266-D9292E02F942}" type="datetimeFigureOut">
               <a:rPr lang="zh-CN" altLang="en-US" smtClean="0"/>
-              <a:t>2026/9/22</a:t>
+              <a:t>2026/9/23</a:t>
             </a:fld>
             <a:endParaRPr lang="zh-CN" altLang="en-US"/>
           </a:p>
@@ -1940,7 +1956,7 @@
           <p:cNvPr id="5" name="页脚占位符 4">
             <a:extLst>
               <a:ext uri="{FF2B5EF4-FFF2-40B4-BE49-F238E27FC236}">
-                <a16:creationId xmlns:a16="http://schemas.microsoft.com/office/drawing/2014/main" id="{1001ECA4-395B-61ED-9CB0-95067A0C89C6}"/>
+                <a16:creationId xmlns:a16="http://schemas.microsoft.com/office/drawing/2014/main" id="{04F791EA-C24D-3D2B-6757-4EB867798211}"/>
               </a:ext>
             </a:extLst>
           </p:cNvPr>
@@ -1965,7 +1981,7 @@
           <p:cNvPr id="6" name="灯片编号占位符 5">
             <a:extLst>
               <a:ext uri="{FF2B5EF4-FFF2-40B4-BE49-F238E27FC236}">
-                <a16:creationId xmlns:a16="http://schemas.microsoft.com/office/drawing/2014/main" id="{D969C8F4-8ABC-AA3D-1AC7-71F59892DB88}"/>
+                <a16:creationId xmlns:a16="http://schemas.microsoft.com/office/drawing/2014/main" id="{12574A5E-2AEE-893E-656E-96A0C6AC4150}"/>
               </a:ext>
             </a:extLst>
           </p:cNvPr>
@@ -1981,7 +1997,7 @@
           <a:bodyPr/>
           <a:lstStyle/>
           <a:p>
-            <a:fld id="{2A24213B-46FC-451A-8A57-C8A7998794E3}" type="slidenum">
+            <a:fld id="{2B0330B3-9A18-44EB-AC08-FE9D7AF05D3F}" type="slidenum">
               <a:rPr lang="zh-CN" altLang="en-US" smtClean="0"/>
               <a:t>‹#›</a:t>
             </a:fld>
@@ -1992,7 +2008,7 @@
     </p:spTree>
     <p:extLst>
       <p:ext uri="{BB962C8B-B14F-4D97-AF65-F5344CB8AC3E}">
-        <p14:creationId xmlns:p14="http://schemas.microsoft.com/office/powerpoint/2010/main" val="216627665"/>
+        <p14:creationId xmlns:p14="http://schemas.microsoft.com/office/powerpoint/2010/main" val="710732554"/>
       </p:ext>
     </p:extLst>
   </p:cSld>
@@ -2024,7 +2040,7 @@
           <p:cNvPr id="2" name="标题 1">
             <a:extLst>
               <a:ext uri="{FF2B5EF4-FFF2-40B4-BE49-F238E27FC236}">
-                <a16:creationId xmlns:a16="http://schemas.microsoft.com/office/drawing/2014/main" id="{7ACBC84C-473B-DC0B-21B3-C94EE90C3183}"/>
+                <a16:creationId xmlns:a16="http://schemas.microsoft.com/office/drawing/2014/main" id="{F63BEB94-54FB-705B-A41E-6C247E670C3F}"/>
               </a:ext>
             </a:extLst>
           </p:cNvPr>
@@ -2052,7 +2068,7 @@
           <p:cNvPr id="3" name="竖排文字占位符 2">
             <a:extLst>
               <a:ext uri="{FF2B5EF4-FFF2-40B4-BE49-F238E27FC236}">
-                <a16:creationId xmlns:a16="http://schemas.microsoft.com/office/drawing/2014/main" id="{14C07DD3-B305-B22E-6A5D-A2476BBAFA8F}"/>
+                <a16:creationId xmlns:a16="http://schemas.microsoft.com/office/drawing/2014/main" id="{119F1FD3-2DB8-4794-E8B7-1D4DDCF29B47}"/>
               </a:ext>
             </a:extLst>
           </p:cNvPr>
@@ -2109,7 +2125,7 @@
           <p:cNvPr id="4" name="日期占位符 3">
             <a:extLst>
               <a:ext uri="{FF2B5EF4-FFF2-40B4-BE49-F238E27FC236}">
-                <a16:creationId xmlns:a16="http://schemas.microsoft.com/office/drawing/2014/main" id="{6B477FEF-FF4A-2073-C03D-CDBF14AAF32D}"/>
+                <a16:creationId xmlns:a16="http://schemas.microsoft.com/office/drawing/2014/main" id="{E0ED4AD3-A889-35B9-9889-A77E451980C8}"/>
               </a:ext>
             </a:extLst>
           </p:cNvPr>
@@ -2125,9 +2141,9 @@
           <a:bodyPr/>
           <a:lstStyle/>
           <a:p>
-            <a:fld id="{E9E706D5-8B20-4F05-BE41-D342EF88F631}" type="datetimeFigureOut">
+            <a:fld id="{1866EC5C-AF1B-490E-A266-D9292E02F942}" type="datetimeFigureOut">
               <a:rPr lang="zh-CN" altLang="en-US" smtClean="0"/>
-              <a:t>2026/9/22</a:t>
+              <a:t>2026/9/23</a:t>
             </a:fld>
             <a:endParaRPr lang="zh-CN" altLang="en-US"/>
           </a:p>
@@ -2138,7 +2154,7 @@
           <p:cNvPr id="5" name="页脚占位符 4">
             <a:extLst>
               <a:ext uri="{FF2B5EF4-FFF2-40B4-BE49-F238E27FC236}">
-                <a16:creationId xmlns:a16="http://schemas.microsoft.com/office/drawing/2014/main" id="{BA776AAD-F3CD-A0A7-DAC7-347CEBC7F69D}"/>
+                <a16:creationId xmlns:a16="http://schemas.microsoft.com/office/drawing/2014/main" id="{C0C22B48-7A5D-63A0-9C34-D86A1F8D1A9B}"/>
               </a:ext>
             </a:extLst>
           </p:cNvPr>
@@ -2163,7 +2179,7 @@
           <p:cNvPr id="6" name="灯片编号占位符 5">
             <a:extLst>
               <a:ext uri="{FF2B5EF4-FFF2-40B4-BE49-F238E27FC236}">
-                <a16:creationId xmlns:a16="http://schemas.microsoft.com/office/drawing/2014/main" id="{8FA659D7-B659-2B90-6883-66870910F48D}"/>
+                <a16:creationId xmlns:a16="http://schemas.microsoft.com/office/drawing/2014/main" id="{D840D631-7440-8242-C7D2-089B3E699C24}"/>
               </a:ext>
             </a:extLst>
           </p:cNvPr>
@@ -2179,7 +2195,7 @@
           <a:bodyPr/>
           <a:lstStyle/>
           <a:p>
-            <a:fld id="{2A24213B-46FC-451A-8A57-C8A7998794E3}" type="slidenum">
+            <a:fld id="{2B0330B3-9A18-44EB-AC08-FE9D7AF05D3F}" type="slidenum">
               <a:rPr lang="zh-CN" altLang="en-US" smtClean="0"/>
               <a:t>‹#›</a:t>
             </a:fld>
@@ -2190,7 +2206,7 @@
     </p:spTree>
     <p:extLst>
       <p:ext uri="{BB962C8B-B14F-4D97-AF65-F5344CB8AC3E}">
-        <p14:creationId xmlns:p14="http://schemas.microsoft.com/office/powerpoint/2010/main" val="920034657"/>
+        <p14:creationId xmlns:p14="http://schemas.microsoft.com/office/powerpoint/2010/main" val="3541285228"/>
       </p:ext>
     </p:extLst>
   </p:cSld>
@@ -2222,7 +2238,7 @@
           <p:cNvPr id="2" name="竖排标题 1">
             <a:extLst>
               <a:ext uri="{FF2B5EF4-FFF2-40B4-BE49-F238E27FC236}">
-                <a16:creationId xmlns:a16="http://schemas.microsoft.com/office/drawing/2014/main" id="{42D5D046-7FB0-0DF4-3FAE-93B511B8E95C}"/>
+                <a16:creationId xmlns:a16="http://schemas.microsoft.com/office/drawing/2014/main" id="{03FCA081-8520-4F9A-62AC-3454DA649724}"/>
               </a:ext>
             </a:extLst>
           </p:cNvPr>
@@ -2255,7 +2271,7 @@
           <p:cNvPr id="3" name="竖排文字占位符 2">
             <a:extLst>
               <a:ext uri="{FF2B5EF4-FFF2-40B4-BE49-F238E27FC236}">
-                <a16:creationId xmlns:a16="http://schemas.microsoft.com/office/drawing/2014/main" id="{ECC7A44B-4805-8A20-9B88-EF2F1080A894}"/>
+                <a16:creationId xmlns:a16="http://schemas.microsoft.com/office/drawing/2014/main" id="{AE1AF15C-0B1F-9366-F011-6F850A29D82E}"/>
               </a:ext>
             </a:extLst>
           </p:cNvPr>
@@ -2317,7 +2333,7 @@
           <p:cNvPr id="4" name="日期占位符 3">
             <a:extLst>
               <a:ext uri="{FF2B5EF4-FFF2-40B4-BE49-F238E27FC236}">
-                <a16:creationId xmlns:a16="http://schemas.microsoft.com/office/drawing/2014/main" id="{F134D671-C42F-5436-3E2B-7F3EE0DBBCB0}"/>
+                <a16:creationId xmlns:a16="http://schemas.microsoft.com/office/drawing/2014/main" id="{4D92F0A0-EB1E-F293-5FB8-861295E6AD60}"/>
               </a:ext>
             </a:extLst>
           </p:cNvPr>
@@ -2333,9 +2349,9 @@
           <a:bodyPr/>
           <a:lstStyle/>
           <a:p>
-            <a:fld id="{E9E706D5-8B20-4F05-BE41-D342EF88F631}" type="datetimeFigureOut">
+            <a:fld id="{1866EC5C-AF1B-490E-A266-D9292E02F942}" type="datetimeFigureOut">
               <a:rPr lang="zh-CN" altLang="en-US" smtClean="0"/>
-              <a:t>2026/9/22</a:t>
+              <a:t>2026/9/23</a:t>
             </a:fld>
             <a:endParaRPr lang="zh-CN" altLang="en-US"/>
           </a:p>
@@ -2346,7 +2362,7 @@
           <p:cNvPr id="5" name="页脚占位符 4">
             <a:extLst>
               <a:ext uri="{FF2B5EF4-FFF2-40B4-BE49-F238E27FC236}">
-                <a16:creationId xmlns:a16="http://schemas.microsoft.com/office/drawing/2014/main" id="{64B8A8E2-6B83-2576-DE09-AD16EB3B9B19}"/>
+                <a16:creationId xmlns:a16="http://schemas.microsoft.com/office/drawing/2014/main" id="{7048B64F-2E16-3764-22D1-7BD976B850A6}"/>
               </a:ext>
             </a:extLst>
           </p:cNvPr>
@@ -2371,7 +2387,7 @@
           <p:cNvPr id="6" name="灯片编号占位符 5">
             <a:extLst>
               <a:ext uri="{FF2B5EF4-FFF2-40B4-BE49-F238E27FC236}">
-                <a16:creationId xmlns:a16="http://schemas.microsoft.com/office/drawing/2014/main" id="{1EA01027-884D-5232-A0EE-7A750446E0AC}"/>
+                <a16:creationId xmlns:a16="http://schemas.microsoft.com/office/drawing/2014/main" id="{F658A89B-851C-555C-BAA1-5B15EBF349F3}"/>
               </a:ext>
             </a:extLst>
           </p:cNvPr>
@@ -2387,7 +2403,7 @@
           <a:bodyPr/>
           <a:lstStyle/>
           <a:p>
-            <a:fld id="{2A24213B-46FC-451A-8A57-C8A7998794E3}" type="slidenum">
+            <a:fld id="{2B0330B3-9A18-44EB-AC08-FE9D7AF05D3F}" type="slidenum">
               <a:rPr lang="zh-CN" altLang="en-US" smtClean="0"/>
               <a:t>‹#›</a:t>
             </a:fld>
@@ -2398,7 +2414,7 @@
     </p:spTree>
     <p:extLst>
       <p:ext uri="{BB962C8B-B14F-4D97-AF65-F5344CB8AC3E}">
-        <p14:creationId xmlns:p14="http://schemas.microsoft.com/office/powerpoint/2010/main" val="2585112082"/>
+        <p14:creationId xmlns:p14="http://schemas.microsoft.com/office/powerpoint/2010/main" val="2181833079"/>
       </p:ext>
     </p:extLst>
   </p:cSld>
@@ -2430,7 +2446,7 @@
           <p:cNvPr id="2" name="标题 1">
             <a:extLst>
               <a:ext uri="{FF2B5EF4-FFF2-40B4-BE49-F238E27FC236}">
-                <a16:creationId xmlns:a16="http://schemas.microsoft.com/office/drawing/2014/main" id="{66D5615B-0C9D-676E-B1FA-1D705F370F6D}"/>
+                <a16:creationId xmlns:a16="http://schemas.microsoft.com/office/drawing/2014/main" id="{0FBBE638-21D5-D5A2-28C6-B32222C7C436}"/>
               </a:ext>
             </a:extLst>
           </p:cNvPr>
@@ -2458,7 +2474,7 @@
           <p:cNvPr id="3" name="内容占位符 2">
             <a:extLst>
               <a:ext uri="{FF2B5EF4-FFF2-40B4-BE49-F238E27FC236}">
-                <a16:creationId xmlns:a16="http://schemas.microsoft.com/office/drawing/2014/main" id="{53841DF6-7064-8D26-09B4-4683E90CD631}"/>
+                <a16:creationId xmlns:a16="http://schemas.microsoft.com/office/drawing/2014/main" id="{6CAEC340-1569-0701-4F89-CA6F35BB3550}"/>
               </a:ext>
             </a:extLst>
           </p:cNvPr>
@@ -2515,7 +2531,7 @@
           <p:cNvPr id="4" name="日期占位符 3">
             <a:extLst>
               <a:ext uri="{FF2B5EF4-FFF2-40B4-BE49-F238E27FC236}">
-                <a16:creationId xmlns:a16="http://schemas.microsoft.com/office/drawing/2014/main" id="{F3DED831-3141-0337-B7A8-472343CC00E9}"/>
+                <a16:creationId xmlns:a16="http://schemas.microsoft.com/office/drawing/2014/main" id="{4659F3F5-FB2F-AFC4-A398-595EF008690E}"/>
               </a:ext>
             </a:extLst>
           </p:cNvPr>
@@ -2531,9 +2547,9 @@
           <a:bodyPr/>
           <a:lstStyle/>
           <a:p>
-            <a:fld id="{E9E706D5-8B20-4F05-BE41-D342EF88F631}" type="datetimeFigureOut">
+            <a:fld id="{1866EC5C-AF1B-490E-A266-D9292E02F942}" type="datetimeFigureOut">
               <a:rPr lang="zh-CN" altLang="en-US" smtClean="0"/>
-              <a:t>2026/9/22</a:t>
+              <a:t>2026/9/23</a:t>
             </a:fld>
             <a:endParaRPr lang="zh-CN" altLang="en-US"/>
           </a:p>
@@ -2544,7 +2560,7 @@
           <p:cNvPr id="5" name="页脚占位符 4">
             <a:extLst>
               <a:ext uri="{FF2B5EF4-FFF2-40B4-BE49-F238E27FC236}">
-                <a16:creationId xmlns:a16="http://schemas.microsoft.com/office/drawing/2014/main" id="{CC91E79A-C900-F0D2-4517-0733D8F00CAF}"/>
+                <a16:creationId xmlns:a16="http://schemas.microsoft.com/office/drawing/2014/main" id="{769984CC-A671-9B60-9A5B-8607C6BC0BAE}"/>
               </a:ext>
             </a:extLst>
           </p:cNvPr>
@@ -2569,7 +2585,7 @@
           <p:cNvPr id="6" name="灯片编号占位符 5">
             <a:extLst>
               <a:ext uri="{FF2B5EF4-FFF2-40B4-BE49-F238E27FC236}">
-                <a16:creationId xmlns:a16="http://schemas.microsoft.com/office/drawing/2014/main" id="{ED2E0C45-79FC-3CCE-CFF2-9C12F49ADF50}"/>
+                <a16:creationId xmlns:a16="http://schemas.microsoft.com/office/drawing/2014/main" id="{D3ED0BC6-227E-931F-7F73-F5E15C5EA0E9}"/>
               </a:ext>
             </a:extLst>
           </p:cNvPr>
@@ -2585,7 +2601,7 @@
           <a:bodyPr/>
           <a:lstStyle/>
           <a:p>
-            <a:fld id="{2A24213B-46FC-451A-8A57-C8A7998794E3}" type="slidenum">
+            <a:fld id="{2B0330B3-9A18-44EB-AC08-FE9D7AF05D3F}" type="slidenum">
               <a:rPr lang="zh-CN" altLang="en-US" smtClean="0"/>
               <a:t>‹#›</a:t>
             </a:fld>
@@ -2596,7 +2612,7 @@
     </p:spTree>
     <p:extLst>
       <p:ext uri="{BB962C8B-B14F-4D97-AF65-F5344CB8AC3E}">
-        <p14:creationId xmlns:p14="http://schemas.microsoft.com/office/powerpoint/2010/main" val="3068401811"/>
+        <p14:creationId xmlns:p14="http://schemas.microsoft.com/office/powerpoint/2010/main" val="1428002833"/>
       </p:ext>
     </p:extLst>
   </p:cSld>
@@ -2628,7 +2644,7 @@
           <p:cNvPr id="2" name="标题 1">
             <a:extLst>
               <a:ext uri="{FF2B5EF4-FFF2-40B4-BE49-F238E27FC236}">
-                <a16:creationId xmlns:a16="http://schemas.microsoft.com/office/drawing/2014/main" id="{ECC85E37-CB00-860E-AB9C-BB5D29CEBCB1}"/>
+                <a16:creationId xmlns:a16="http://schemas.microsoft.com/office/drawing/2014/main" id="{A3D98981-D6A2-6A58-3CA9-74DCB16856F1}"/>
               </a:ext>
             </a:extLst>
           </p:cNvPr>
@@ -2665,7 +2681,7 @@
           <p:cNvPr id="3" name="文本占位符 2">
             <a:extLst>
               <a:ext uri="{FF2B5EF4-FFF2-40B4-BE49-F238E27FC236}">
-                <a16:creationId xmlns:a16="http://schemas.microsoft.com/office/drawing/2014/main" id="{A71943F1-41F7-5B1D-E80E-BFDEE7AF853A}"/>
+                <a16:creationId xmlns:a16="http://schemas.microsoft.com/office/drawing/2014/main" id="{7ACA0CF3-DAD0-75C2-9281-4AEA2F37AD17}"/>
               </a:ext>
             </a:extLst>
           </p:cNvPr>
@@ -2790,7 +2806,7 @@
           <p:cNvPr id="4" name="日期占位符 3">
             <a:extLst>
               <a:ext uri="{FF2B5EF4-FFF2-40B4-BE49-F238E27FC236}">
-                <a16:creationId xmlns:a16="http://schemas.microsoft.com/office/drawing/2014/main" id="{C02588F4-5913-A821-9B3D-A84C6AB90988}"/>
+                <a16:creationId xmlns:a16="http://schemas.microsoft.com/office/drawing/2014/main" id="{405F8339-12F6-4D88-BB60-AF5631679BA1}"/>
               </a:ext>
             </a:extLst>
           </p:cNvPr>
@@ -2806,9 +2822,9 @@
           <a:bodyPr/>
           <a:lstStyle/>
           <a:p>
-            <a:fld id="{E9E706D5-8B20-4F05-BE41-D342EF88F631}" type="datetimeFigureOut">
+            <a:fld id="{1866EC5C-AF1B-490E-A266-D9292E02F942}" type="datetimeFigureOut">
               <a:rPr lang="zh-CN" altLang="en-US" smtClean="0"/>
-              <a:t>2026/9/22</a:t>
+              <a:t>2026/9/23</a:t>
             </a:fld>
             <a:endParaRPr lang="zh-CN" altLang="en-US"/>
           </a:p>
@@ -2819,7 +2835,7 @@
           <p:cNvPr id="5" name="页脚占位符 4">
             <a:extLst>
               <a:ext uri="{FF2B5EF4-FFF2-40B4-BE49-F238E27FC236}">
-                <a16:creationId xmlns:a16="http://schemas.microsoft.com/office/drawing/2014/main" id="{1D08E3B6-ADA5-71C1-0BC9-36EB6AF7D4BB}"/>
+                <a16:creationId xmlns:a16="http://schemas.microsoft.com/office/drawing/2014/main" id="{F38A3C52-1409-9EF4-CD34-7F8FD87E4017}"/>
               </a:ext>
             </a:extLst>
           </p:cNvPr>
@@ -2844,7 +2860,7 @@
           <p:cNvPr id="6" name="灯片编号占位符 5">
             <a:extLst>
               <a:ext uri="{FF2B5EF4-FFF2-40B4-BE49-F238E27FC236}">
-                <a16:creationId xmlns:a16="http://schemas.microsoft.com/office/drawing/2014/main" id="{ED2BE140-909B-7663-BBC3-1EC123050418}"/>
+                <a16:creationId xmlns:a16="http://schemas.microsoft.com/office/drawing/2014/main" id="{259E9BBA-DB28-D48F-D761-037C01855D07}"/>
               </a:ext>
             </a:extLst>
           </p:cNvPr>
@@ -2860,7 +2876,7 @@
           <a:bodyPr/>
           <a:lstStyle/>
           <a:p>
-            <a:fld id="{2A24213B-46FC-451A-8A57-C8A7998794E3}" type="slidenum">
+            <a:fld id="{2B0330B3-9A18-44EB-AC08-FE9D7AF05D3F}" type="slidenum">
               <a:rPr lang="zh-CN" altLang="en-US" smtClean="0"/>
               <a:t>‹#›</a:t>
             </a:fld>
@@ -2871,7 +2887,7 @@
     </p:spTree>
     <p:extLst>
       <p:ext uri="{BB962C8B-B14F-4D97-AF65-F5344CB8AC3E}">
-        <p14:creationId xmlns:p14="http://schemas.microsoft.com/office/powerpoint/2010/main" val="581501434"/>
+        <p14:creationId xmlns:p14="http://schemas.microsoft.com/office/powerpoint/2010/main" val="1205076116"/>
       </p:ext>
     </p:extLst>
   </p:cSld>
@@ -2903,7 +2919,7 @@
           <p:cNvPr id="2" name="标题 1">
             <a:extLst>
               <a:ext uri="{FF2B5EF4-FFF2-40B4-BE49-F238E27FC236}">
-                <a16:creationId xmlns:a16="http://schemas.microsoft.com/office/drawing/2014/main" id="{8E495EFF-174B-4B15-0B24-5580A0F13701}"/>
+                <a16:creationId xmlns:a16="http://schemas.microsoft.com/office/drawing/2014/main" id="{09F77F7D-29EF-0251-9AAF-2738AC40FD56}"/>
               </a:ext>
             </a:extLst>
           </p:cNvPr>
@@ -2931,7 +2947,7 @@
           <p:cNvPr id="3" name="内容占位符 2">
             <a:extLst>
               <a:ext uri="{FF2B5EF4-FFF2-40B4-BE49-F238E27FC236}">
-                <a16:creationId xmlns:a16="http://schemas.microsoft.com/office/drawing/2014/main" id="{26F422D5-78AC-8F05-33F8-495A33593376}"/>
+                <a16:creationId xmlns:a16="http://schemas.microsoft.com/office/drawing/2014/main" id="{18A76D02-B7B7-0CC7-0BD2-39CAE239BF0A}"/>
               </a:ext>
             </a:extLst>
           </p:cNvPr>
@@ -2993,7 +3009,7 @@
           <p:cNvPr id="4" name="内容占位符 3">
             <a:extLst>
               <a:ext uri="{FF2B5EF4-FFF2-40B4-BE49-F238E27FC236}">
-                <a16:creationId xmlns:a16="http://schemas.microsoft.com/office/drawing/2014/main" id="{6723F31D-7F64-4F92-A7B0-E79D86D4C2E7}"/>
+                <a16:creationId xmlns:a16="http://schemas.microsoft.com/office/drawing/2014/main" id="{A232E8C3-5754-F3A6-55E7-2D401467A486}"/>
               </a:ext>
             </a:extLst>
           </p:cNvPr>
@@ -3055,7 +3071,7 @@
           <p:cNvPr id="5" name="日期占位符 4">
             <a:extLst>
               <a:ext uri="{FF2B5EF4-FFF2-40B4-BE49-F238E27FC236}">
-                <a16:creationId xmlns:a16="http://schemas.microsoft.com/office/drawing/2014/main" id="{0DF5DED3-C6DA-F83C-B706-E99C073956B4}"/>
+                <a16:creationId xmlns:a16="http://schemas.microsoft.com/office/drawing/2014/main" id="{36588CFC-183E-C71B-F518-AB9448513C31}"/>
               </a:ext>
             </a:extLst>
           </p:cNvPr>
@@ -3071,9 +3087,9 @@
           <a:bodyPr/>
           <a:lstStyle/>
           <a:p>
-            <a:fld id="{E9E706D5-8B20-4F05-BE41-D342EF88F631}" type="datetimeFigureOut">
+            <a:fld id="{1866EC5C-AF1B-490E-A266-D9292E02F942}" type="datetimeFigureOut">
               <a:rPr lang="zh-CN" altLang="en-US" smtClean="0"/>
-              <a:t>2026/9/22</a:t>
+              <a:t>2026/9/23</a:t>
             </a:fld>
             <a:endParaRPr lang="zh-CN" altLang="en-US"/>
           </a:p>
@@ -3084,7 +3100,7 @@
           <p:cNvPr id="6" name="页脚占位符 5">
             <a:extLst>
               <a:ext uri="{FF2B5EF4-FFF2-40B4-BE49-F238E27FC236}">
-                <a16:creationId xmlns:a16="http://schemas.microsoft.com/office/drawing/2014/main" id="{AB240A57-A448-E80E-430C-7B618DEE569A}"/>
+                <a16:creationId xmlns:a16="http://schemas.microsoft.com/office/drawing/2014/main" id="{7C1347A1-8227-1208-9AC9-4E91655DFD02}"/>
               </a:ext>
             </a:extLst>
           </p:cNvPr>
@@ -3109,7 +3125,7 @@
           <p:cNvPr id="7" name="灯片编号占位符 6">
             <a:extLst>
               <a:ext uri="{FF2B5EF4-FFF2-40B4-BE49-F238E27FC236}">
-                <a16:creationId xmlns:a16="http://schemas.microsoft.com/office/drawing/2014/main" id="{EF925F7A-29D2-3D8B-D7FB-6FE7A0B3EC55}"/>
+                <a16:creationId xmlns:a16="http://schemas.microsoft.com/office/drawing/2014/main" id="{894C81B9-4855-5695-7F62-EB49C7375934}"/>
               </a:ext>
             </a:extLst>
           </p:cNvPr>
@@ -3125,7 +3141,7 @@
           <a:bodyPr/>
           <a:lstStyle/>
           <a:p>
-            <a:fld id="{2A24213B-46FC-451A-8A57-C8A7998794E3}" type="slidenum">
+            <a:fld id="{2B0330B3-9A18-44EB-AC08-FE9D7AF05D3F}" type="slidenum">
               <a:rPr lang="zh-CN" altLang="en-US" smtClean="0"/>
               <a:t>‹#›</a:t>
             </a:fld>
@@ -3136,7 +3152,7 @@
     </p:spTree>
     <p:extLst>
       <p:ext uri="{BB962C8B-B14F-4D97-AF65-F5344CB8AC3E}">
-        <p14:creationId xmlns:p14="http://schemas.microsoft.com/office/powerpoint/2010/main" val="2288381980"/>
+        <p14:creationId xmlns:p14="http://schemas.microsoft.com/office/powerpoint/2010/main" val="390767644"/>
       </p:ext>
     </p:extLst>
   </p:cSld>
@@ -3168,7 +3184,7 @@
           <p:cNvPr id="2" name="标题 1">
             <a:extLst>
               <a:ext uri="{FF2B5EF4-FFF2-40B4-BE49-F238E27FC236}">
-                <a16:creationId xmlns:a16="http://schemas.microsoft.com/office/drawing/2014/main" id="{6875A889-3F7B-3C1E-3778-76F1FFE0F502}"/>
+                <a16:creationId xmlns:a16="http://schemas.microsoft.com/office/drawing/2014/main" id="{2064CA68-8E75-1D90-7517-3CBAE3574F1D}"/>
               </a:ext>
             </a:extLst>
           </p:cNvPr>
@@ -3201,7 +3217,7 @@
           <p:cNvPr id="3" name="文本占位符 2">
             <a:extLst>
               <a:ext uri="{FF2B5EF4-FFF2-40B4-BE49-F238E27FC236}">
-                <a16:creationId xmlns:a16="http://schemas.microsoft.com/office/drawing/2014/main" id="{291641CF-2C0D-4760-007A-27619E99FF8D}"/>
+                <a16:creationId xmlns:a16="http://schemas.microsoft.com/office/drawing/2014/main" id="{3CF5E230-2B63-B4CA-BF88-6A0713BA02B5}"/>
               </a:ext>
             </a:extLst>
           </p:cNvPr>
@@ -3272,7 +3288,7 @@
           <p:cNvPr id="4" name="内容占位符 3">
             <a:extLst>
               <a:ext uri="{FF2B5EF4-FFF2-40B4-BE49-F238E27FC236}">
-                <a16:creationId xmlns:a16="http://schemas.microsoft.com/office/drawing/2014/main" id="{0AA88357-C5C1-7F3C-A6BC-390FDCEB26E6}"/>
+                <a16:creationId xmlns:a16="http://schemas.microsoft.com/office/drawing/2014/main" id="{06D112B7-C471-59C5-CB3E-79AFADC76EF6}"/>
               </a:ext>
             </a:extLst>
           </p:cNvPr>
@@ -3334,7 +3350,7 @@
           <p:cNvPr id="5" name="文本占位符 4">
             <a:extLst>
               <a:ext uri="{FF2B5EF4-FFF2-40B4-BE49-F238E27FC236}">
-                <a16:creationId xmlns:a16="http://schemas.microsoft.com/office/drawing/2014/main" id="{1A14493F-610C-0239-3C9D-9ACC9B204DE9}"/>
+                <a16:creationId xmlns:a16="http://schemas.microsoft.com/office/drawing/2014/main" id="{988EF793-6207-E397-04CC-25F7BA05D379}"/>
               </a:ext>
             </a:extLst>
           </p:cNvPr>
@@ -3405,7 +3421,7 @@
           <p:cNvPr id="6" name="内容占位符 5">
             <a:extLst>
               <a:ext uri="{FF2B5EF4-FFF2-40B4-BE49-F238E27FC236}">
-                <a16:creationId xmlns:a16="http://schemas.microsoft.com/office/drawing/2014/main" id="{F4F03434-7087-0282-7E76-261E3F528B26}"/>
+                <a16:creationId xmlns:a16="http://schemas.microsoft.com/office/drawing/2014/main" id="{09A73510-BAE1-6989-5D9E-18C884A7075A}"/>
               </a:ext>
             </a:extLst>
           </p:cNvPr>
@@ -3467,7 +3483,7 @@
           <p:cNvPr id="7" name="日期占位符 6">
             <a:extLst>
               <a:ext uri="{FF2B5EF4-FFF2-40B4-BE49-F238E27FC236}">
-                <a16:creationId xmlns:a16="http://schemas.microsoft.com/office/drawing/2014/main" id="{531E33CF-9B8C-AED2-2F3A-AC1C24AF79E5}"/>
+                <a16:creationId xmlns:a16="http://schemas.microsoft.com/office/drawing/2014/main" id="{946B790E-C641-E7DD-E074-BBFAAA0E4593}"/>
               </a:ext>
             </a:extLst>
           </p:cNvPr>
@@ -3483,9 +3499,9 @@
           <a:bodyPr/>
           <a:lstStyle/>
           <a:p>
-            <a:fld id="{E9E706D5-8B20-4F05-BE41-D342EF88F631}" type="datetimeFigureOut">
+            <a:fld id="{1866EC5C-AF1B-490E-A266-D9292E02F942}" type="datetimeFigureOut">
               <a:rPr lang="zh-CN" altLang="en-US" smtClean="0"/>
-              <a:t>2026/9/22</a:t>
+              <a:t>2026/9/23</a:t>
             </a:fld>
             <a:endParaRPr lang="zh-CN" altLang="en-US"/>
           </a:p>
@@ -3496,7 +3512,7 @@
           <p:cNvPr id="8" name="页脚占位符 7">
             <a:extLst>
               <a:ext uri="{FF2B5EF4-FFF2-40B4-BE49-F238E27FC236}">
-                <a16:creationId xmlns:a16="http://schemas.microsoft.com/office/drawing/2014/main" id="{D53194E6-4318-6A7C-E43E-5F2F7EDBA74A}"/>
+                <a16:creationId xmlns:a16="http://schemas.microsoft.com/office/drawing/2014/main" id="{BDCBE091-38D8-196A-4612-33C8342A86B3}"/>
               </a:ext>
             </a:extLst>
           </p:cNvPr>
@@ -3521,7 +3537,7 @@
           <p:cNvPr id="9" name="灯片编号占位符 8">
             <a:extLst>
               <a:ext uri="{FF2B5EF4-FFF2-40B4-BE49-F238E27FC236}">
-                <a16:creationId xmlns:a16="http://schemas.microsoft.com/office/drawing/2014/main" id="{B1877D88-CE6B-58EE-6997-C1DE895068F8}"/>
+                <a16:creationId xmlns:a16="http://schemas.microsoft.com/office/drawing/2014/main" id="{92344FFE-419E-9CA7-7727-50EBF3A14E1F}"/>
               </a:ext>
             </a:extLst>
           </p:cNvPr>
@@ -3537,7 +3553,7 @@
           <a:bodyPr/>
           <a:lstStyle/>
           <a:p>
-            <a:fld id="{2A24213B-46FC-451A-8A57-C8A7998794E3}" type="slidenum">
+            <a:fld id="{2B0330B3-9A18-44EB-AC08-FE9D7AF05D3F}" type="slidenum">
               <a:rPr lang="zh-CN" altLang="en-US" smtClean="0"/>
               <a:t>‹#›</a:t>
             </a:fld>
@@ -3548,7 +3564,7 @@
     </p:spTree>
     <p:extLst>
       <p:ext uri="{BB962C8B-B14F-4D97-AF65-F5344CB8AC3E}">
-        <p14:creationId xmlns:p14="http://schemas.microsoft.com/office/powerpoint/2010/main" val="251589938"/>
+        <p14:creationId xmlns:p14="http://schemas.microsoft.com/office/powerpoint/2010/main" val="2941290449"/>
       </p:ext>
     </p:extLst>
   </p:cSld>
@@ -3580,7 +3596,7 @@
           <p:cNvPr id="2" name="标题 1">
             <a:extLst>
               <a:ext uri="{FF2B5EF4-FFF2-40B4-BE49-F238E27FC236}">
-                <a16:creationId xmlns:a16="http://schemas.microsoft.com/office/drawing/2014/main" id="{050CA327-3A05-BB14-E15E-A51EAF6A0F63}"/>
+                <a16:creationId xmlns:a16="http://schemas.microsoft.com/office/drawing/2014/main" id="{A9460ED7-CE4E-7F20-9726-2A67A841FF30}"/>
               </a:ext>
             </a:extLst>
           </p:cNvPr>
@@ -3608,7 +3624,7 @@
           <p:cNvPr id="3" name="日期占位符 2">
             <a:extLst>
               <a:ext uri="{FF2B5EF4-FFF2-40B4-BE49-F238E27FC236}">
-                <a16:creationId xmlns:a16="http://schemas.microsoft.com/office/drawing/2014/main" id="{1E2BA67E-2680-9062-0E2C-64275E1395D2}"/>
+                <a16:creationId xmlns:a16="http://schemas.microsoft.com/office/drawing/2014/main" id="{7C8DF836-C0E9-B174-5B79-06F5AFF12497}"/>
               </a:ext>
             </a:extLst>
           </p:cNvPr>
@@ -3624,9 +3640,9 @@
           <a:bodyPr/>
           <a:lstStyle/>
           <a:p>
-            <a:fld id="{E9E706D5-8B20-4F05-BE41-D342EF88F631}" type="datetimeFigureOut">
+            <a:fld id="{1866EC5C-AF1B-490E-A266-D9292E02F942}" type="datetimeFigureOut">
               <a:rPr lang="zh-CN" altLang="en-US" smtClean="0"/>
-              <a:t>2026/9/22</a:t>
+              <a:t>2026/9/23</a:t>
             </a:fld>
             <a:endParaRPr lang="zh-CN" altLang="en-US"/>
           </a:p>
@@ -3637,7 +3653,7 @@
           <p:cNvPr id="4" name="页脚占位符 3">
             <a:extLst>
               <a:ext uri="{FF2B5EF4-FFF2-40B4-BE49-F238E27FC236}">
-                <a16:creationId xmlns:a16="http://schemas.microsoft.com/office/drawing/2014/main" id="{90EAEB0E-0768-4CE0-7106-90D1960C2E99}"/>
+                <a16:creationId xmlns:a16="http://schemas.microsoft.com/office/drawing/2014/main" id="{042E9EB0-9B2B-C7EA-D8F8-F70E350EB760}"/>
               </a:ext>
             </a:extLst>
           </p:cNvPr>
@@ -3662,7 +3678,7 @@
           <p:cNvPr id="5" name="灯片编号占位符 4">
             <a:extLst>
               <a:ext uri="{FF2B5EF4-FFF2-40B4-BE49-F238E27FC236}">
-                <a16:creationId xmlns:a16="http://schemas.microsoft.com/office/drawing/2014/main" id="{E6ABC425-09DF-C420-64EF-826B36B7073A}"/>
+                <a16:creationId xmlns:a16="http://schemas.microsoft.com/office/drawing/2014/main" id="{FA1FA015-4CA1-0FD5-62A7-4E7A38053F5E}"/>
               </a:ext>
             </a:extLst>
           </p:cNvPr>
@@ -3678,7 +3694,7 @@
           <a:bodyPr/>
           <a:lstStyle/>
           <a:p>
-            <a:fld id="{2A24213B-46FC-451A-8A57-C8A7998794E3}" type="slidenum">
+            <a:fld id="{2B0330B3-9A18-44EB-AC08-FE9D7AF05D3F}" type="slidenum">
               <a:rPr lang="zh-CN" altLang="en-US" smtClean="0"/>
               <a:t>‹#›</a:t>
             </a:fld>
@@ -3689,7 +3705,7 @@
     </p:spTree>
     <p:extLst>
       <p:ext uri="{BB962C8B-B14F-4D97-AF65-F5344CB8AC3E}">
-        <p14:creationId xmlns:p14="http://schemas.microsoft.com/office/powerpoint/2010/main" val="386212726"/>
+        <p14:creationId xmlns:p14="http://schemas.microsoft.com/office/powerpoint/2010/main" val="4241576489"/>
       </p:ext>
     </p:extLst>
   </p:cSld>
@@ -3721,7 +3737,7 @@
           <p:cNvPr id="2" name="日期占位符 1">
             <a:extLst>
               <a:ext uri="{FF2B5EF4-FFF2-40B4-BE49-F238E27FC236}">
-                <a16:creationId xmlns:a16="http://schemas.microsoft.com/office/drawing/2014/main" id="{5BABF53A-60B4-3863-8021-CA8B10DA8090}"/>
+                <a16:creationId xmlns:a16="http://schemas.microsoft.com/office/drawing/2014/main" id="{9A76D520-6C70-4488-5324-6E1B9C09A6A9}"/>
               </a:ext>
             </a:extLst>
           </p:cNvPr>
@@ -3737,9 +3753,9 @@
           <a:bodyPr/>
           <a:lstStyle/>
           <a:p>
-            <a:fld id="{E9E706D5-8B20-4F05-BE41-D342EF88F631}" type="datetimeFigureOut">
+            <a:fld id="{1866EC5C-AF1B-490E-A266-D9292E02F942}" type="datetimeFigureOut">
               <a:rPr lang="zh-CN" altLang="en-US" smtClean="0"/>
-              <a:t>2026/9/22</a:t>
+              <a:t>2026/9/23</a:t>
             </a:fld>
             <a:endParaRPr lang="zh-CN" altLang="en-US"/>
           </a:p>
@@ -3750,7 +3766,7 @@
           <p:cNvPr id="3" name="页脚占位符 2">
             <a:extLst>
               <a:ext uri="{FF2B5EF4-FFF2-40B4-BE49-F238E27FC236}">
-                <a16:creationId xmlns:a16="http://schemas.microsoft.com/office/drawing/2014/main" id="{532F0B97-0357-FB80-8E30-5D57B596164F}"/>
+                <a16:creationId xmlns:a16="http://schemas.microsoft.com/office/drawing/2014/main" id="{B682D964-B0F8-D5A5-3C76-836FF7E493A4}"/>
               </a:ext>
             </a:extLst>
           </p:cNvPr>
@@ -3775,7 +3791,7 @@
           <p:cNvPr id="4" name="灯片编号占位符 3">
             <a:extLst>
               <a:ext uri="{FF2B5EF4-FFF2-40B4-BE49-F238E27FC236}">
-                <a16:creationId xmlns:a16="http://schemas.microsoft.com/office/drawing/2014/main" id="{66DB21C4-DAB5-D57A-4D06-80B9FA5CF3F2}"/>
+                <a16:creationId xmlns:a16="http://schemas.microsoft.com/office/drawing/2014/main" id="{A7AE1A1A-D87C-7E4D-15E5-4D5A9F82A593}"/>
               </a:ext>
             </a:extLst>
           </p:cNvPr>
@@ -3791,7 +3807,7 @@
           <a:bodyPr/>
           <a:lstStyle/>
           <a:p>
-            <a:fld id="{2A24213B-46FC-451A-8A57-C8A7998794E3}" type="slidenum">
+            <a:fld id="{2B0330B3-9A18-44EB-AC08-FE9D7AF05D3F}" type="slidenum">
               <a:rPr lang="zh-CN" altLang="en-US" smtClean="0"/>
               <a:t>‹#›</a:t>
             </a:fld>
@@ -3802,7 +3818,7 @@
     </p:spTree>
     <p:extLst>
       <p:ext uri="{BB962C8B-B14F-4D97-AF65-F5344CB8AC3E}">
-        <p14:creationId xmlns:p14="http://schemas.microsoft.com/office/powerpoint/2010/main" val="918874769"/>
+        <p14:creationId xmlns:p14="http://schemas.microsoft.com/office/powerpoint/2010/main" val="403626745"/>
       </p:ext>
     </p:extLst>
   </p:cSld>
@@ -3834,7 +3850,7 @@
           <p:cNvPr id="2" name="标题 1">
             <a:extLst>
               <a:ext uri="{FF2B5EF4-FFF2-40B4-BE49-F238E27FC236}">
-                <a16:creationId xmlns:a16="http://schemas.microsoft.com/office/drawing/2014/main" id="{2CD0CC28-2532-846B-824F-C23DE51C8900}"/>
+                <a16:creationId xmlns:a16="http://schemas.microsoft.com/office/drawing/2014/main" id="{A60AD4CB-6981-4A70-943A-B62E89C316D7}"/>
               </a:ext>
             </a:extLst>
           </p:cNvPr>
@@ -3871,7 +3887,7 @@
           <p:cNvPr id="3" name="内容占位符 2">
             <a:extLst>
               <a:ext uri="{FF2B5EF4-FFF2-40B4-BE49-F238E27FC236}">
-                <a16:creationId xmlns:a16="http://schemas.microsoft.com/office/drawing/2014/main" id="{13610003-D9DC-247E-0692-09958BBF5C52}"/>
+                <a16:creationId xmlns:a16="http://schemas.microsoft.com/office/drawing/2014/main" id="{EFA56621-675E-D695-0BC1-AFBDE5BC104A}"/>
               </a:ext>
             </a:extLst>
           </p:cNvPr>
@@ -3961,7 +3977,7 @@
           <p:cNvPr id="4" name="文本占位符 3">
             <a:extLst>
               <a:ext uri="{FF2B5EF4-FFF2-40B4-BE49-F238E27FC236}">
-                <a16:creationId xmlns:a16="http://schemas.microsoft.com/office/drawing/2014/main" id="{349CBB7E-DBEF-A82F-BA41-FB7362249CB8}"/>
+                <a16:creationId xmlns:a16="http://schemas.microsoft.com/office/drawing/2014/main" id="{646A49B3-DEC1-8D8A-0971-49548482876F}"/>
               </a:ext>
             </a:extLst>
           </p:cNvPr>
@@ -4032,7 +4048,7 @@
           <p:cNvPr id="5" name="日期占位符 4">
             <a:extLst>
               <a:ext uri="{FF2B5EF4-FFF2-40B4-BE49-F238E27FC236}">
-                <a16:creationId xmlns:a16="http://schemas.microsoft.com/office/drawing/2014/main" id="{DD5EE8FA-3933-9AB9-E7FF-79FDD05F6E6B}"/>
+                <a16:creationId xmlns:a16="http://schemas.microsoft.com/office/drawing/2014/main" id="{A0082437-78CD-117F-7D6E-D7C6151D289C}"/>
               </a:ext>
             </a:extLst>
           </p:cNvPr>
@@ -4048,9 +4064,9 @@
           <a:bodyPr/>
           <a:lstStyle/>
           <a:p>
-            <a:fld id="{E9E706D5-8B20-4F05-BE41-D342EF88F631}" type="datetimeFigureOut">
+            <a:fld id="{1866EC5C-AF1B-490E-A266-D9292E02F942}" type="datetimeFigureOut">
               <a:rPr lang="zh-CN" altLang="en-US" smtClean="0"/>
-              <a:t>2026/9/22</a:t>
+              <a:t>2026/9/23</a:t>
             </a:fld>
             <a:endParaRPr lang="zh-CN" altLang="en-US"/>
           </a:p>
@@ -4061,7 +4077,7 @@
           <p:cNvPr id="6" name="页脚占位符 5">
             <a:extLst>
               <a:ext uri="{FF2B5EF4-FFF2-40B4-BE49-F238E27FC236}">
-                <a16:creationId xmlns:a16="http://schemas.microsoft.com/office/drawing/2014/main" id="{ABEE64EC-E43A-6146-9522-355F1D219AAD}"/>
+                <a16:creationId xmlns:a16="http://schemas.microsoft.com/office/drawing/2014/main" id="{5141F3F2-B8F2-E404-C2B0-8C7826D30DB6}"/>
               </a:ext>
             </a:extLst>
           </p:cNvPr>
@@ -4086,7 +4102,7 @@
           <p:cNvPr id="7" name="灯片编号占位符 6">
             <a:extLst>
               <a:ext uri="{FF2B5EF4-FFF2-40B4-BE49-F238E27FC236}">
-                <a16:creationId xmlns:a16="http://schemas.microsoft.com/office/drawing/2014/main" id="{DD5A44A5-624F-31D2-A2FA-2E6BA17B862B}"/>
+                <a16:creationId xmlns:a16="http://schemas.microsoft.com/office/drawing/2014/main" id="{F063DA5C-3D9A-9374-F5A0-ED07AB08F940}"/>
               </a:ext>
             </a:extLst>
           </p:cNvPr>
@@ -4102,7 +4118,7 @@
           <a:bodyPr/>
           <a:lstStyle/>
           <a:p>
-            <a:fld id="{2A24213B-46FC-451A-8A57-C8A7998794E3}" type="slidenum">
+            <a:fld id="{2B0330B3-9A18-44EB-AC08-FE9D7AF05D3F}" type="slidenum">
               <a:rPr lang="zh-CN" altLang="en-US" smtClean="0"/>
               <a:t>‹#›</a:t>
             </a:fld>
@@ -4113,7 +4129,7 @@
     </p:spTree>
     <p:extLst>
       <p:ext uri="{BB962C8B-B14F-4D97-AF65-F5344CB8AC3E}">
-        <p14:creationId xmlns:p14="http://schemas.microsoft.com/office/powerpoint/2010/main" val="2284234562"/>
+        <p14:creationId xmlns:p14="http://schemas.microsoft.com/office/powerpoint/2010/main" val="2647776464"/>
       </p:ext>
     </p:extLst>
   </p:cSld>
@@ -4145,7 +4161,7 @@
           <p:cNvPr id="2" name="标题 1">
             <a:extLst>
               <a:ext uri="{FF2B5EF4-FFF2-40B4-BE49-F238E27FC236}">
-                <a16:creationId xmlns:a16="http://schemas.microsoft.com/office/drawing/2014/main" id="{C668DD6A-D0BB-0EF7-DE8A-C30D80326638}"/>
+                <a16:creationId xmlns:a16="http://schemas.microsoft.com/office/drawing/2014/main" id="{CB80DF5A-5F92-CEC2-37E5-2ACAA7D78192}"/>
               </a:ext>
             </a:extLst>
           </p:cNvPr>
@@ -4182,7 +4198,7 @@
           <p:cNvPr id="3" name="图片占位符 2">
             <a:extLst>
               <a:ext uri="{FF2B5EF4-FFF2-40B4-BE49-F238E27FC236}">
-                <a16:creationId xmlns:a16="http://schemas.microsoft.com/office/drawing/2014/main" id="{143264C4-9F2D-B225-BBE8-BBE9286698B4}"/>
+                <a16:creationId xmlns:a16="http://schemas.microsoft.com/office/drawing/2014/main" id="{C5D02D06-2DC7-8B5F-65D8-C7A0690E11E2}"/>
               </a:ext>
             </a:extLst>
           </p:cNvPr>
@@ -4249,7 +4265,7 @@
           <p:cNvPr id="4" name="文本占位符 3">
             <a:extLst>
               <a:ext uri="{FF2B5EF4-FFF2-40B4-BE49-F238E27FC236}">
-                <a16:creationId xmlns:a16="http://schemas.microsoft.com/office/drawing/2014/main" id="{6EB15FA8-EF59-894D-A1B3-6415C89F2AEA}"/>
+                <a16:creationId xmlns:a16="http://schemas.microsoft.com/office/drawing/2014/main" id="{E6DF065A-AAF4-06D2-6A21-8887EBD3A054}"/>
               </a:ext>
             </a:extLst>
           </p:cNvPr>
@@ -4320,7 +4336,7 @@
           <p:cNvPr id="5" name="日期占位符 4">
             <a:extLst>
               <a:ext uri="{FF2B5EF4-FFF2-40B4-BE49-F238E27FC236}">
-                <a16:creationId xmlns:a16="http://schemas.microsoft.com/office/drawing/2014/main" id="{5C5B38B1-D30B-677D-0D64-D4A9C069E146}"/>
+                <a16:creationId xmlns:a16="http://schemas.microsoft.com/office/drawing/2014/main" id="{89499363-D48A-CE63-115E-87ECF5CB6B8B}"/>
               </a:ext>
             </a:extLst>
           </p:cNvPr>
@@ -4336,9 +4352,9 @@
           <a:bodyPr/>
           <a:lstStyle/>
           <a:p>
-            <a:fld id="{E9E706D5-8B20-4F05-BE41-D342EF88F631}" type="datetimeFigureOut">
+            <a:fld id="{1866EC5C-AF1B-490E-A266-D9292E02F942}" type="datetimeFigureOut">
               <a:rPr lang="zh-CN" altLang="en-US" smtClean="0"/>
-              <a:t>2026/9/22</a:t>
+              <a:t>2026/9/23</a:t>
             </a:fld>
             <a:endParaRPr lang="zh-CN" altLang="en-US"/>
           </a:p>
@@ -4349,7 +4365,7 @@
           <p:cNvPr id="6" name="页脚占位符 5">
             <a:extLst>
               <a:ext uri="{FF2B5EF4-FFF2-40B4-BE49-F238E27FC236}">
-                <a16:creationId xmlns:a16="http://schemas.microsoft.com/office/drawing/2014/main" id="{3FD5B125-F1DE-8914-0B7C-759B97ACB914}"/>
+                <a16:creationId xmlns:a16="http://schemas.microsoft.com/office/drawing/2014/main" id="{A66057FE-7FC9-08B2-BA0C-2ED5A3C9F821}"/>
               </a:ext>
             </a:extLst>
           </p:cNvPr>
@@ -4374,7 +4390,7 @@
           <p:cNvPr id="7" name="灯片编号占位符 6">
             <a:extLst>
               <a:ext uri="{FF2B5EF4-FFF2-40B4-BE49-F238E27FC236}">
-                <a16:creationId xmlns:a16="http://schemas.microsoft.com/office/drawing/2014/main" id="{E2B78B5F-AE5C-A7A2-6F0D-7BC8C4B12C1A}"/>
+                <a16:creationId xmlns:a16="http://schemas.microsoft.com/office/drawing/2014/main" id="{FD980E65-3C44-14E5-1770-EEDF5C7FC925}"/>
               </a:ext>
             </a:extLst>
           </p:cNvPr>
@@ -4390,7 +4406,7 @@
           <a:bodyPr/>
           <a:lstStyle/>
           <a:p>
-            <a:fld id="{2A24213B-46FC-451A-8A57-C8A7998794E3}" type="slidenum">
+            <a:fld id="{2B0330B3-9A18-44EB-AC08-FE9D7AF05D3F}" type="slidenum">
               <a:rPr lang="zh-CN" altLang="en-US" smtClean="0"/>
               <a:t>‹#›</a:t>
             </a:fld>
@@ -4401,7 +4417,7 @@
     </p:spTree>
     <p:extLst>
       <p:ext uri="{BB962C8B-B14F-4D97-AF65-F5344CB8AC3E}">
-        <p14:creationId xmlns:p14="http://schemas.microsoft.com/office/powerpoint/2010/main" val="2543442859"/>
+        <p14:creationId xmlns:p14="http://schemas.microsoft.com/office/powerpoint/2010/main" val="3487147202"/>
       </p:ext>
     </p:extLst>
   </p:cSld>
@@ -4438,7 +4454,7 @@
           <p:cNvPr id="2" name="标题占位符 1">
             <a:extLst>
               <a:ext uri="{FF2B5EF4-FFF2-40B4-BE49-F238E27FC236}">
-                <a16:creationId xmlns:a16="http://schemas.microsoft.com/office/drawing/2014/main" id="{B9E3B21B-2E73-6969-97C8-ED1E93CEF8EF}"/>
+                <a16:creationId xmlns:a16="http://schemas.microsoft.com/office/drawing/2014/main" id="{CC128DFC-4E18-07BC-E125-F5FB887CD545}"/>
               </a:ext>
             </a:extLst>
           </p:cNvPr>
@@ -4476,7 +4492,7 @@
           <p:cNvPr id="3" name="文本占位符 2">
             <a:extLst>
               <a:ext uri="{FF2B5EF4-FFF2-40B4-BE49-F238E27FC236}">
-                <a16:creationId xmlns:a16="http://schemas.microsoft.com/office/drawing/2014/main" id="{E871F9A5-FFE2-E211-B86D-982E886FE000}"/>
+                <a16:creationId xmlns:a16="http://schemas.microsoft.com/office/drawing/2014/main" id="{4D394C48-1AE8-13B3-DC37-F060B3FB6FB5}"/>
               </a:ext>
             </a:extLst>
           </p:cNvPr>
@@ -4543,7 +4559,7 @@
           <p:cNvPr id="4" name="日期占位符 3">
             <a:extLst>
               <a:ext uri="{FF2B5EF4-FFF2-40B4-BE49-F238E27FC236}">
-                <a16:creationId xmlns:a16="http://schemas.microsoft.com/office/drawing/2014/main" id="{DFDA16B9-B1B2-C50A-712F-4DBB0DC89C79}"/>
+                <a16:creationId xmlns:a16="http://schemas.microsoft.com/office/drawing/2014/main" id="{47AD5363-E457-0AFB-8063-023BAD3EA69D}"/>
               </a:ext>
             </a:extLst>
           </p:cNvPr>
@@ -4577,9 +4593,9 @@
             </a:lvl1pPr>
           </a:lstStyle>
           <a:p>
-            <a:fld id="{E9E706D5-8B20-4F05-BE41-D342EF88F631}" type="datetimeFigureOut">
+            <a:fld id="{1866EC5C-AF1B-490E-A266-D9292E02F942}" type="datetimeFigureOut">
               <a:rPr lang="zh-CN" altLang="en-US" smtClean="0"/>
-              <a:t>2026/9/22</a:t>
+              <a:t>2026/9/23</a:t>
             </a:fld>
             <a:endParaRPr lang="zh-CN" altLang="en-US"/>
           </a:p>
@@ -4590,7 +4606,7 @@
           <p:cNvPr id="5" name="页脚占位符 4">
             <a:extLst>
               <a:ext uri="{FF2B5EF4-FFF2-40B4-BE49-F238E27FC236}">
-                <a16:creationId xmlns:a16="http://schemas.microsoft.com/office/drawing/2014/main" id="{72C6F860-612D-BD89-9EEE-9776CD95E748}"/>
+                <a16:creationId xmlns:a16="http://schemas.microsoft.com/office/drawing/2014/main" id="{63E46770-B3A7-3E52-92B9-3D6D40B2FA55}"/>
               </a:ext>
             </a:extLst>
           </p:cNvPr>
@@ -4633,7 +4649,7 @@
           <p:cNvPr id="6" name="灯片编号占位符 5">
             <a:extLst>
               <a:ext uri="{FF2B5EF4-FFF2-40B4-BE49-F238E27FC236}">
-                <a16:creationId xmlns:a16="http://schemas.microsoft.com/office/drawing/2014/main" id="{9E75212C-C329-DF55-BD4D-331A8B119BBA}"/>
+                <a16:creationId xmlns:a16="http://schemas.microsoft.com/office/drawing/2014/main" id="{7332AE0C-2672-6B01-2FD1-79EF7EEFAA83}"/>
               </a:ext>
             </a:extLst>
           </p:cNvPr>
@@ -4667,7 +4683,7 @@
             </a:lvl1pPr>
           </a:lstStyle>
           <a:p>
-            <a:fld id="{2A24213B-46FC-451A-8A57-C8A7998794E3}" type="slidenum">
+            <a:fld id="{2B0330B3-9A18-44EB-AC08-FE9D7AF05D3F}" type="slidenum">
               <a:rPr lang="zh-CN" altLang="en-US" smtClean="0"/>
               <a:t>‹#›</a:t>
             </a:fld>
@@ -4678,7 +4694,7 @@
     </p:spTree>
     <p:extLst>
       <p:ext uri="{BB962C8B-B14F-4D97-AF65-F5344CB8AC3E}">
-        <p14:creationId xmlns:p14="http://schemas.microsoft.com/office/powerpoint/2010/main" val="4202161316"/>
+        <p14:creationId xmlns:p14="http://schemas.microsoft.com/office/powerpoint/2010/main" val="3300961904"/>
       </p:ext>
     </p:extLst>
   </p:cSld>
@@ -5009,7 +5025,7 @@
           <p:cNvPr id="2" name="矩形 1">
             <a:extLst>
               <a:ext uri="{FF2B5EF4-FFF2-40B4-BE49-F238E27FC236}">
-                <a16:creationId xmlns:a16="http://schemas.microsoft.com/office/drawing/2014/main" id="{B0E0FBDF-BE21-2A25-E18D-43BBACE1BCBB}"/>
+                <a16:creationId xmlns:a16="http://schemas.microsoft.com/office/drawing/2014/main" id="{AF29A7AC-BED6-3C2B-2730-456B42270350}"/>
               </a:ext>
             </a:extLst>
           </p:cNvPr>
@@ -5077,7 +5093,7 @@
           <p:cNvPr id="3" name="文本框 2">
             <a:extLst>
               <a:ext uri="{FF2B5EF4-FFF2-40B4-BE49-F238E27FC236}">
-                <a16:creationId xmlns:a16="http://schemas.microsoft.com/office/drawing/2014/main" id="{DB50AEC9-E9C8-557D-3B2C-C835D1340498}"/>
+                <a16:creationId xmlns:a16="http://schemas.microsoft.com/office/drawing/2014/main" id="{B3B4D55D-8710-BB22-C781-CAB819A74E34}"/>
               </a:ext>
             </a:extLst>
           </p:cNvPr>
@@ -5137,7 +5153,7 @@
           <p:cNvPr id="4" name="文本框 3">
             <a:extLst>
               <a:ext uri="{FF2B5EF4-FFF2-40B4-BE49-F238E27FC236}">
-                <a16:creationId xmlns:a16="http://schemas.microsoft.com/office/drawing/2014/main" id="{9A1ABEC0-193D-E41A-4C53-C7A53495851A}"/>
+                <a16:creationId xmlns:a16="http://schemas.microsoft.com/office/drawing/2014/main" id="{884C6FF8-E387-7574-3D09-A12AC0D39C37}"/>
               </a:ext>
             </a:extLst>
           </p:cNvPr>
@@ -5197,7 +5213,7 @@
           <p:cNvPr id="5" name="文本框 4">
             <a:extLst>
               <a:ext uri="{FF2B5EF4-FFF2-40B4-BE49-F238E27FC236}">
-                <a16:creationId xmlns:a16="http://schemas.microsoft.com/office/drawing/2014/main" id="{D459B196-B0DB-D8CB-B95D-2E32B10AC31D}"/>
+                <a16:creationId xmlns:a16="http://schemas.microsoft.com/office/drawing/2014/main" id="{6283BD9F-00F2-7B28-E2F1-F846D5F5AD88}"/>
               </a:ext>
             </a:extLst>
           </p:cNvPr>
@@ -5289,7 +5305,7 @@
           <p:cNvPr id="6" name="矩形 5">
             <a:extLst>
               <a:ext uri="{FF2B5EF4-FFF2-40B4-BE49-F238E27FC236}">
-                <a16:creationId xmlns:a16="http://schemas.microsoft.com/office/drawing/2014/main" id="{AE145140-B800-A6D6-C3A5-4E55C8D636F6}"/>
+                <a16:creationId xmlns:a16="http://schemas.microsoft.com/office/drawing/2014/main" id="{5D862005-FB5A-95E6-6C13-A095A8DB25F2}"/>
               </a:ext>
             </a:extLst>
           </p:cNvPr>
@@ -5357,7 +5373,7 @@
           <p:cNvPr id="7" name="文本框 6">
             <a:extLst>
               <a:ext uri="{FF2B5EF4-FFF2-40B4-BE49-F238E27FC236}">
-                <a16:creationId xmlns:a16="http://schemas.microsoft.com/office/drawing/2014/main" id="{C19D0BF5-19A1-2639-F63B-589A61072F27}"/>
+                <a16:creationId xmlns:a16="http://schemas.microsoft.com/office/drawing/2014/main" id="{F7844135-FE57-ECB7-9F8F-3C29DFD319E3}"/>
               </a:ext>
             </a:extLst>
           </p:cNvPr>
@@ -5415,7 +5431,7 @@
     </p:spTree>
     <p:extLst>
       <p:ext uri="{BB962C8B-B14F-4D97-AF65-F5344CB8AC3E}">
-        <p14:creationId xmlns:p14="http://schemas.microsoft.com/office/powerpoint/2010/main" val="2122922724"/>
+        <p14:creationId xmlns:p14="http://schemas.microsoft.com/office/powerpoint/2010/main" val="4115141444"/>
       </p:ext>
     </p:extLst>
   </p:cSld>
@@ -5455,7 +5471,7 @@
           <p:cNvPr id="2" name="矩形 1">
             <a:extLst>
               <a:ext uri="{FF2B5EF4-FFF2-40B4-BE49-F238E27FC236}">
-                <a16:creationId xmlns:a16="http://schemas.microsoft.com/office/drawing/2014/main" id="{3A191405-DF54-0B53-9C2F-836EC9DEB283}"/>
+                <a16:creationId xmlns:a16="http://schemas.microsoft.com/office/drawing/2014/main" id="{887C30B2-42AF-A732-28A3-366C967529AA}"/>
               </a:ext>
             </a:extLst>
           </p:cNvPr>
@@ -5523,7 +5539,7 @@
           <p:cNvPr id="3" name="文本框 2">
             <a:extLst>
               <a:ext uri="{FF2B5EF4-FFF2-40B4-BE49-F238E27FC236}">
-                <a16:creationId xmlns:a16="http://schemas.microsoft.com/office/drawing/2014/main" id="{9CDD6608-9B2B-CE20-9442-C1C8D9660E88}"/>
+                <a16:creationId xmlns:a16="http://schemas.microsoft.com/office/drawing/2014/main" id="{B523BD02-96B3-E4BD-979E-38A326C3B910}"/>
               </a:ext>
             </a:extLst>
           </p:cNvPr>
@@ -5567,7 +5583,7 @@
           <p:cNvPr id="4" name="文本框 3">
             <a:extLst>
               <a:ext uri="{FF2B5EF4-FFF2-40B4-BE49-F238E27FC236}">
-                <a16:creationId xmlns:a16="http://schemas.microsoft.com/office/drawing/2014/main" id="{3C53AA8C-DCF2-5057-8663-D17AE446A59C}"/>
+                <a16:creationId xmlns:a16="http://schemas.microsoft.com/office/drawing/2014/main" id="{BD1708F2-D827-7F86-E35F-4D5F19A0DCFD}"/>
               </a:ext>
             </a:extLst>
           </p:cNvPr>
@@ -5577,7 +5593,7 @@
         <p:spPr>
           <a:xfrm>
             <a:off x="508000" y="1092200"/>
-            <a:ext cx="11176000" cy="3367973"/>
+            <a:ext cx="11176000" cy="4269887"/>
           </a:xfrm>
           <a:prstGeom prst="rect">
             <a:avLst/>
@@ -6064,12 +6080,119 @@
               <a:t>完成现场因子）</a:t>
             </a:r>
           </a:p>
+          <a:p>
+            <a:pPr>
+              <a:lnSpc>
+                <a:spcPct val="130000"/>
+              </a:lnSpc>
+            </a:pPr>
+            <a:endParaRPr lang="zh-CN" altLang="en-US" sz="1500">
+              <a:solidFill>
+                <a:srgbClr val="101828"/>
+              </a:solidFill>
+            </a:endParaRPr>
+          </a:p>
+          <a:p>
+            <a:pPr>
+              <a:lnSpc>
+                <a:spcPct val="130000"/>
+              </a:lnSpc>
+            </a:pPr>
+            <a:r>
+              <a:rPr lang="zh-CN" altLang="en-US" sz="1500">
+                <a:solidFill>
+                  <a:srgbClr val="101828"/>
+                </a:solidFill>
+              </a:rPr>
+              <a:t>  </a:t>
+            </a:r>
+            <a:r>
+              <a:rPr lang="en-US" altLang="zh-CN" sz="1500">
+                <a:solidFill>
+                  <a:srgbClr val="101828"/>
+                </a:solidFill>
+              </a:rPr>
+              <a:t>- </a:t>
+            </a:r>
+            <a:r>
+              <a:rPr lang="zh-CN" altLang="en-US" sz="1500">
+                <a:solidFill>
+                  <a:srgbClr val="101828"/>
+                </a:solidFill>
+              </a:rPr>
+              <a:t>渠道与可逆性：✅ </a:t>
+            </a:r>
+            <a:r>
+              <a:rPr lang="en-US" altLang="zh-CN" sz="1500">
+                <a:solidFill>
+                  <a:srgbClr val="101828"/>
+                </a:solidFill>
+              </a:rPr>
+              <a:t>APP </a:t>
+            </a:r>
+            <a:r>
+              <a:rPr lang="zh-CN" altLang="en-US" sz="1500">
+                <a:solidFill>
+                  <a:srgbClr val="101828"/>
+                </a:solidFill>
+              </a:rPr>
+              <a:t>主界面 </a:t>
+            </a:r>
+            <a:r>
+              <a:rPr lang="en-US" altLang="zh-CN" sz="1500">
+                <a:solidFill>
+                  <a:srgbClr val="101828"/>
+                </a:solidFill>
+              </a:rPr>
+              <a:t>+ IM </a:t>
+            </a:r>
+            <a:r>
+              <a:rPr lang="zh-CN" altLang="en-US" sz="1500">
+                <a:solidFill>
+                  <a:srgbClr val="101828"/>
+                </a:solidFill>
+              </a:rPr>
+              <a:t>文本通道；✅ 回退上一步 </a:t>
+            </a:r>
+            <a:r>
+              <a:rPr lang="en-US" altLang="zh-CN" sz="1500">
+                <a:solidFill>
+                  <a:srgbClr val="101828"/>
+                </a:solidFill>
+              </a:rPr>
+              <a:t>/ </a:t>
+            </a:r>
+            <a:r>
+              <a:rPr lang="zh-CN" altLang="en-US" sz="1500">
+                <a:solidFill>
+                  <a:srgbClr val="101828"/>
+                </a:solidFill>
+              </a:rPr>
+              <a:t>转人工接管；✅ 子任务 </a:t>
+            </a:r>
+            <a:r>
+              <a:rPr lang="en-US" altLang="zh-CN" sz="1500">
+                <a:solidFill>
+                  <a:srgbClr val="101828"/>
+                </a:solidFill>
+              </a:rPr>
+              <a:t>DAG </a:t>
+            </a:r>
+            <a:r>
+              <a:rPr lang="zh-CN" altLang="en-US" sz="1500">
+                <a:solidFill>
+                  <a:srgbClr val="101828"/>
+                </a:solidFill>
+              </a:rPr>
+              <a:t>拆解（赛题「中断、回退与人工接管」）</a:t>
+            </a:r>
+          </a:p>
         </p:txBody>
       </p:sp>
     </p:spTree>
     <p:extLst>
       <p:ext uri="{BB962C8B-B14F-4D97-AF65-F5344CB8AC3E}">
-        <p14:creationId xmlns:p14="http://schemas.microsoft.com/office/powerpoint/2010/main" val="3380351752"/>
+        <p14:creationId xmlns:p14="http://schemas.microsoft.com/office/powerpoint/2010/main" val="3002150977"/>
       </p:ext>
     </p:extLst>
   </p:cSld>
@@ -6109,7 +6232,7 @@
           <p:cNvPr id="2" name="矩形 1">
             <a:extLst>
               <a:ext uri="{FF2B5EF4-FFF2-40B4-BE49-F238E27FC236}">
-                <a16:creationId xmlns:a16="http://schemas.microsoft.com/office/drawing/2014/main" id="{D142FAA4-0F02-11D9-BFD0-45DB8C9F2089}"/>
+                <a16:creationId xmlns:a16="http://schemas.microsoft.com/office/drawing/2014/main" id="{9A28FD71-62E6-6D6F-1C40-F4095773A0E5}"/>
               </a:ext>
             </a:extLst>
           </p:cNvPr>
@@ -6177,7 +6300,7 @@
           <p:cNvPr id="3" name="文本框 2">
             <a:extLst>
               <a:ext uri="{FF2B5EF4-FFF2-40B4-BE49-F238E27FC236}">
-                <a16:creationId xmlns:a16="http://schemas.microsoft.com/office/drawing/2014/main" id="{07704151-7DBE-527B-FAC0-27C65D0413FD}"/>
+                <a16:creationId xmlns:a16="http://schemas.microsoft.com/office/drawing/2014/main" id="{4BC2887C-45D0-FFAD-4D02-79936AB93149}"/>
               </a:ext>
             </a:extLst>
           </p:cNvPr>
@@ -6221,7 +6344,7 @@
           <p:cNvPr id="4" name="文本框 3">
             <a:extLst>
               <a:ext uri="{FF2B5EF4-FFF2-40B4-BE49-F238E27FC236}">
-                <a16:creationId xmlns:a16="http://schemas.microsoft.com/office/drawing/2014/main" id="{090494BD-90E3-64B0-61AE-38755B3FA4AC}"/>
+                <a16:creationId xmlns:a16="http://schemas.microsoft.com/office/drawing/2014/main" id="{C78B7327-7190-FE96-5475-013CEA60E182}"/>
               </a:ext>
             </a:extLst>
           </p:cNvPr>
@@ -6279,7 +6402,7 @@
                   <a:srgbClr val="101828"/>
                 </a:solidFill>
               </a:rPr>
-              <a:t>selftest 329 </a:t>
+              <a:t>selftest 336 </a:t>
             </a:r>
             <a:r>
               <a:rPr lang="zh-CN" altLang="en-US" sz="1500">
@@ -6579,7 +6702,7 @@
     </p:spTree>
     <p:extLst>
       <p:ext uri="{BB962C8B-B14F-4D97-AF65-F5344CB8AC3E}">
-        <p14:creationId xmlns:p14="http://schemas.microsoft.com/office/powerpoint/2010/main" val="3918817962"/>
+        <p14:creationId xmlns:p14="http://schemas.microsoft.com/office/powerpoint/2010/main" val="887471621"/>
       </p:ext>
     </p:extLst>
   </p:cSld>
@@ -6619,7 +6742,7 @@
           <p:cNvPr id="2" name="矩形 1">
             <a:extLst>
               <a:ext uri="{FF2B5EF4-FFF2-40B4-BE49-F238E27FC236}">
-                <a16:creationId xmlns:a16="http://schemas.microsoft.com/office/drawing/2014/main" id="{4462C5E6-07DB-446A-18A6-FAB97479A47E}"/>
+                <a16:creationId xmlns:a16="http://schemas.microsoft.com/office/drawing/2014/main" id="{76CA2A31-4996-A1C2-62A0-665A2EECDEAD}"/>
               </a:ext>
             </a:extLst>
           </p:cNvPr>
@@ -6687,7 +6810,7 @@
           <p:cNvPr id="3" name="文本框 2">
             <a:extLst>
               <a:ext uri="{FF2B5EF4-FFF2-40B4-BE49-F238E27FC236}">
-                <a16:creationId xmlns:a16="http://schemas.microsoft.com/office/drawing/2014/main" id="{8D39CAB2-6C01-507E-E5CB-CF133434481A}"/>
+                <a16:creationId xmlns:a16="http://schemas.microsoft.com/office/drawing/2014/main" id="{0713A99A-D199-2285-19B9-4CCCCB12169A}"/>
               </a:ext>
             </a:extLst>
           </p:cNvPr>
@@ -6731,7 +6854,7 @@
           <p:cNvPr id="4" name="文本框 3">
             <a:extLst>
               <a:ext uri="{FF2B5EF4-FFF2-40B4-BE49-F238E27FC236}">
-                <a16:creationId xmlns:a16="http://schemas.microsoft.com/office/drawing/2014/main" id="{11C31043-2ECB-FA03-01F9-A9554457E38B}"/>
+                <a16:creationId xmlns:a16="http://schemas.microsoft.com/office/drawing/2014/main" id="{82D6F514-D4C8-BD83-F7E3-A5EDB4545EFE}"/>
               </a:ext>
             </a:extLst>
           </p:cNvPr>
@@ -7014,7 +7137,7 @@
     </p:spTree>
     <p:extLst>
       <p:ext uri="{BB962C8B-B14F-4D97-AF65-F5344CB8AC3E}">
-        <p14:creationId xmlns:p14="http://schemas.microsoft.com/office/powerpoint/2010/main" val="1791835026"/>
+        <p14:creationId xmlns:p14="http://schemas.microsoft.com/office/powerpoint/2010/main" val="714155044"/>
       </p:ext>
     </p:extLst>
   </p:cSld>
@@ -7054,7 +7177,7 @@
           <p:cNvPr id="2" name="矩形 1">
             <a:extLst>
               <a:ext uri="{FF2B5EF4-FFF2-40B4-BE49-F238E27FC236}">
-                <a16:creationId xmlns:a16="http://schemas.microsoft.com/office/drawing/2014/main" id="{8E2F1DF6-D042-62B9-2EE8-890509F8D28F}"/>
+                <a16:creationId xmlns:a16="http://schemas.microsoft.com/office/drawing/2014/main" id="{7F37CA5C-FD47-0B99-BB7D-1AB8EA7C0AD7}"/>
               </a:ext>
             </a:extLst>
           </p:cNvPr>
@@ -7122,7 +7245,7 @@
           <p:cNvPr id="3" name="文本框 2">
             <a:extLst>
               <a:ext uri="{FF2B5EF4-FFF2-40B4-BE49-F238E27FC236}">
-                <a16:creationId xmlns:a16="http://schemas.microsoft.com/office/drawing/2014/main" id="{E46F524B-EB93-27C9-4C2E-291F263A14FB}"/>
+                <a16:creationId xmlns:a16="http://schemas.microsoft.com/office/drawing/2014/main" id="{F126BD97-AE38-2866-5FD8-55E10BA48E0B}"/>
               </a:ext>
             </a:extLst>
           </p:cNvPr>
@@ -7166,7 +7289,7 @@
           <p:cNvPr id="4" name="文本框 3">
             <a:extLst>
               <a:ext uri="{FF2B5EF4-FFF2-40B4-BE49-F238E27FC236}">
-                <a16:creationId xmlns:a16="http://schemas.microsoft.com/office/drawing/2014/main" id="{F4114358-9F3E-963F-A415-577CF0E5A70E}"/>
+                <a16:creationId xmlns:a16="http://schemas.microsoft.com/office/drawing/2014/main" id="{EDA223CA-B827-D1CB-6E17-B87CACA90E66}"/>
               </a:ext>
             </a:extLst>
           </p:cNvPr>
@@ -7240,7 +7363,7 @@
     </p:spTree>
     <p:extLst>
       <p:ext uri="{BB962C8B-B14F-4D97-AF65-F5344CB8AC3E}">
-        <p14:creationId xmlns:p14="http://schemas.microsoft.com/office/powerpoint/2010/main" val="3863546584"/>
+        <p14:creationId xmlns:p14="http://schemas.microsoft.com/office/powerpoint/2010/main" val="92528830"/>
       </p:ext>
     </p:extLst>
   </p:cSld>
@@ -7280,7 +7403,7 @@
           <p:cNvPr id="2" name="矩形 1">
             <a:extLst>
               <a:ext uri="{FF2B5EF4-FFF2-40B4-BE49-F238E27FC236}">
-                <a16:creationId xmlns:a16="http://schemas.microsoft.com/office/drawing/2014/main" id="{685171AA-1914-D425-7DAB-C018F1D08416}"/>
+                <a16:creationId xmlns:a16="http://schemas.microsoft.com/office/drawing/2014/main" id="{AEF2E5FB-EAC0-7705-AF93-927B2C5D31F3}"/>
               </a:ext>
             </a:extLst>
           </p:cNvPr>
@@ -7348,7 +7471,7 @@
           <p:cNvPr id="3" name="文本框 2">
             <a:extLst>
               <a:ext uri="{FF2B5EF4-FFF2-40B4-BE49-F238E27FC236}">
-                <a16:creationId xmlns:a16="http://schemas.microsoft.com/office/drawing/2014/main" id="{A512BDDC-1801-295C-89D3-CF34112A101B}"/>
+                <a16:creationId xmlns:a16="http://schemas.microsoft.com/office/drawing/2014/main" id="{98873AF4-3D8A-C534-C6E2-585DEB579FAF}"/>
               </a:ext>
             </a:extLst>
           </p:cNvPr>
@@ -7405,7 +7528,7 @@
           <p:cNvPr id="4" name="文本框 3">
             <a:extLst>
               <a:ext uri="{FF2B5EF4-FFF2-40B4-BE49-F238E27FC236}">
-                <a16:creationId xmlns:a16="http://schemas.microsoft.com/office/drawing/2014/main" id="{75C4ADB8-2F8D-C9C0-C871-9E3B85BE116F}"/>
+                <a16:creationId xmlns:a16="http://schemas.microsoft.com/office/drawing/2014/main" id="{C7982B22-B964-C45A-B420-927AAA005598}"/>
               </a:ext>
             </a:extLst>
           </p:cNvPr>
@@ -7672,7 +7795,7 @@
     </p:spTree>
     <p:extLst>
       <p:ext uri="{BB962C8B-B14F-4D97-AF65-F5344CB8AC3E}">
-        <p14:creationId xmlns:p14="http://schemas.microsoft.com/office/powerpoint/2010/main" val="3561177495"/>
+        <p14:creationId xmlns:p14="http://schemas.microsoft.com/office/powerpoint/2010/main" val="3956538927"/>
       </p:ext>
     </p:extLst>
   </p:cSld>
@@ -7712,7 +7835,7 @@
           <p:cNvPr id="2" name="矩形 1">
             <a:extLst>
               <a:ext uri="{FF2B5EF4-FFF2-40B4-BE49-F238E27FC236}">
-                <a16:creationId xmlns:a16="http://schemas.microsoft.com/office/drawing/2014/main" id="{DACE7C3E-8197-A2C3-D395-589F6B7DD0B4}"/>
+                <a16:creationId xmlns:a16="http://schemas.microsoft.com/office/drawing/2014/main" id="{1C421190-7827-B6B2-029D-8BD1D068C18B}"/>
               </a:ext>
             </a:extLst>
           </p:cNvPr>
@@ -7780,7 +7903,7 @@
           <p:cNvPr id="3" name="文本框 2">
             <a:extLst>
               <a:ext uri="{FF2B5EF4-FFF2-40B4-BE49-F238E27FC236}">
-                <a16:creationId xmlns:a16="http://schemas.microsoft.com/office/drawing/2014/main" id="{46655EE3-CD80-D3CD-375C-0C7A6D6BC8AB}"/>
+                <a16:creationId xmlns:a16="http://schemas.microsoft.com/office/drawing/2014/main" id="{CE016406-406A-BF91-51EC-23922750974A}"/>
               </a:ext>
             </a:extLst>
           </p:cNvPr>
@@ -7824,7 +7947,7 @@
           <p:cNvPr id="4" name="文本框 3">
             <a:extLst>
               <a:ext uri="{FF2B5EF4-FFF2-40B4-BE49-F238E27FC236}">
-                <a16:creationId xmlns:a16="http://schemas.microsoft.com/office/drawing/2014/main" id="{236094B0-9C6E-D961-6ACF-17FC03422DF8}"/>
+                <a16:creationId xmlns:a16="http://schemas.microsoft.com/office/drawing/2014/main" id="{ECDCE23B-D51D-FCEC-70A9-5437062DACCF}"/>
               </a:ext>
             </a:extLst>
           </p:cNvPr>
@@ -8321,7 +8444,7 @@
     </p:spTree>
     <p:extLst>
       <p:ext uri="{BB962C8B-B14F-4D97-AF65-F5344CB8AC3E}">
-        <p14:creationId xmlns:p14="http://schemas.microsoft.com/office/powerpoint/2010/main" val="4130068177"/>
+        <p14:creationId xmlns:p14="http://schemas.microsoft.com/office/powerpoint/2010/main" val="120747564"/>
       </p:ext>
     </p:extLst>
   </p:cSld>
@@ -8361,7 +8484,7 @@
           <p:cNvPr id="2" name="矩形 1">
             <a:extLst>
               <a:ext uri="{FF2B5EF4-FFF2-40B4-BE49-F238E27FC236}">
-                <a16:creationId xmlns:a16="http://schemas.microsoft.com/office/drawing/2014/main" id="{CF60F9F6-0422-A990-0ECA-AAE873D885E0}"/>
+                <a16:creationId xmlns:a16="http://schemas.microsoft.com/office/drawing/2014/main" id="{9FFD7939-5716-4CAC-0E8A-C26E784C1CDD}"/>
               </a:ext>
             </a:extLst>
           </p:cNvPr>
@@ -8429,7 +8552,7 @@
           <p:cNvPr id="3" name="文本框 2">
             <a:extLst>
               <a:ext uri="{FF2B5EF4-FFF2-40B4-BE49-F238E27FC236}">
-                <a16:creationId xmlns:a16="http://schemas.microsoft.com/office/drawing/2014/main" id="{9F873731-0B5B-863B-92A7-95ECE985F0DC}"/>
+                <a16:creationId xmlns:a16="http://schemas.microsoft.com/office/drawing/2014/main" id="{491F4651-5CA5-1550-388E-F55C4863A655}"/>
               </a:ext>
             </a:extLst>
           </p:cNvPr>
@@ -8521,7 +8644,7 @@
           <p:cNvPr id="4" name="文本框 3">
             <a:extLst>
               <a:ext uri="{FF2B5EF4-FFF2-40B4-BE49-F238E27FC236}">
-                <a16:creationId xmlns:a16="http://schemas.microsoft.com/office/drawing/2014/main" id="{5FA6644A-C14B-CA9A-38BD-C04D20F74382}"/>
+                <a16:creationId xmlns:a16="http://schemas.microsoft.com/office/drawing/2014/main" id="{2E9E56A4-5BCE-969C-D301-8DF1C5EAC9FD}"/>
               </a:ext>
             </a:extLst>
           </p:cNvPr>
@@ -8788,7 +8911,7 @@
     </p:spTree>
     <p:extLst>
       <p:ext uri="{BB962C8B-B14F-4D97-AF65-F5344CB8AC3E}">
-        <p14:creationId xmlns:p14="http://schemas.microsoft.com/office/powerpoint/2010/main" val="3477584118"/>
+        <p14:creationId xmlns:p14="http://schemas.microsoft.com/office/powerpoint/2010/main" val="2422040893"/>
       </p:ext>
     </p:extLst>
   </p:cSld>
@@ -8828,7 +8951,7 @@
           <p:cNvPr id="2" name="矩形 1">
             <a:extLst>
               <a:ext uri="{FF2B5EF4-FFF2-40B4-BE49-F238E27FC236}">
-                <a16:creationId xmlns:a16="http://schemas.microsoft.com/office/drawing/2014/main" id="{1AFAC831-4C30-5965-2209-625F0E743A04}"/>
+                <a16:creationId xmlns:a16="http://schemas.microsoft.com/office/drawing/2014/main" id="{700495D0-1215-92AA-87BE-AB2327D73968}"/>
               </a:ext>
             </a:extLst>
           </p:cNvPr>
@@ -8896,7 +9019,7 @@
           <p:cNvPr id="3" name="文本框 2">
             <a:extLst>
               <a:ext uri="{FF2B5EF4-FFF2-40B4-BE49-F238E27FC236}">
-                <a16:creationId xmlns:a16="http://schemas.microsoft.com/office/drawing/2014/main" id="{FAF1B5CF-BC91-7866-E5ED-4E55A3AE2896}"/>
+                <a16:creationId xmlns:a16="http://schemas.microsoft.com/office/drawing/2014/main" id="{EFD652B2-CCEE-7436-2C48-547756692FC6}"/>
               </a:ext>
             </a:extLst>
           </p:cNvPr>
@@ -8972,7 +9095,7 @@
           <p:cNvPr id="4" name="文本框 3">
             <a:extLst>
               <a:ext uri="{FF2B5EF4-FFF2-40B4-BE49-F238E27FC236}">
-                <a16:creationId xmlns:a16="http://schemas.microsoft.com/office/drawing/2014/main" id="{DBB024BC-1B79-1FF0-BA8A-78579E38A030}"/>
+                <a16:creationId xmlns:a16="http://schemas.microsoft.com/office/drawing/2014/main" id="{05C0BC1D-5D9B-5D40-5420-5822E4F1D898}"/>
               </a:ext>
             </a:extLst>
           </p:cNvPr>
@@ -9383,7 +9506,7 @@
     </p:spTree>
     <p:extLst>
       <p:ext uri="{BB962C8B-B14F-4D97-AF65-F5344CB8AC3E}">
-        <p14:creationId xmlns:p14="http://schemas.microsoft.com/office/powerpoint/2010/main" val="449556601"/>
+        <p14:creationId xmlns:p14="http://schemas.microsoft.com/office/powerpoint/2010/main" val="3013038496"/>
       </p:ext>
     </p:extLst>
   </p:cSld>
@@ -9423,7 +9546,7 @@
           <p:cNvPr id="2" name="矩形 1">
             <a:extLst>
               <a:ext uri="{FF2B5EF4-FFF2-40B4-BE49-F238E27FC236}">
-                <a16:creationId xmlns:a16="http://schemas.microsoft.com/office/drawing/2014/main" id="{C2B3D4E5-6A12-97A4-7978-463CE7AFBDFC}"/>
+                <a16:creationId xmlns:a16="http://schemas.microsoft.com/office/drawing/2014/main" id="{C158C34D-8938-46AB-FB25-6B2E6F791CA8}"/>
               </a:ext>
             </a:extLst>
           </p:cNvPr>
@@ -9491,7 +9614,7 @@
           <p:cNvPr id="3" name="文本框 2">
             <a:extLst>
               <a:ext uri="{FF2B5EF4-FFF2-40B4-BE49-F238E27FC236}">
-                <a16:creationId xmlns:a16="http://schemas.microsoft.com/office/drawing/2014/main" id="{0AEE020E-846A-A669-2C4A-FEBA46D2F4F0}"/>
+                <a16:creationId xmlns:a16="http://schemas.microsoft.com/office/drawing/2014/main" id="{47C33A71-F668-D9DC-AF11-28668C755562}"/>
               </a:ext>
             </a:extLst>
           </p:cNvPr>
@@ -9583,7 +9706,7 @@
           <p:cNvPr id="4" name="文本框 3">
             <a:extLst>
               <a:ext uri="{FF2B5EF4-FFF2-40B4-BE49-F238E27FC236}">
-                <a16:creationId xmlns:a16="http://schemas.microsoft.com/office/drawing/2014/main" id="{C08E186C-B154-1E57-A175-1649414BC7C4}"/>
+                <a16:creationId xmlns:a16="http://schemas.microsoft.com/office/drawing/2014/main" id="{3EDCB184-1E91-6CA8-5E6B-5346DF14C880}"/>
               </a:ext>
             </a:extLst>
           </p:cNvPr>
@@ -10037,7 +10160,7 @@
     </p:spTree>
     <p:extLst>
       <p:ext uri="{BB962C8B-B14F-4D97-AF65-F5344CB8AC3E}">
-        <p14:creationId xmlns:p14="http://schemas.microsoft.com/office/powerpoint/2010/main" val="482593565"/>
+        <p14:creationId xmlns:p14="http://schemas.microsoft.com/office/powerpoint/2010/main" val="150690216"/>
       </p:ext>
     </p:extLst>
   </p:cSld>
@@ -10077,7 +10200,7 @@
           <p:cNvPr id="2" name="矩形 1">
             <a:extLst>
               <a:ext uri="{FF2B5EF4-FFF2-40B4-BE49-F238E27FC236}">
-                <a16:creationId xmlns:a16="http://schemas.microsoft.com/office/drawing/2014/main" id="{55548741-8E5B-BF77-84CE-21CD632E20C6}"/>
+                <a16:creationId xmlns:a16="http://schemas.microsoft.com/office/drawing/2014/main" id="{02EB977B-A0BF-E537-6E9A-291DC802F9B2}"/>
               </a:ext>
             </a:extLst>
           </p:cNvPr>
@@ -10145,7 +10268,7 @@
           <p:cNvPr id="3" name="文本框 2">
             <a:extLst>
               <a:ext uri="{FF2B5EF4-FFF2-40B4-BE49-F238E27FC236}">
-                <a16:creationId xmlns:a16="http://schemas.microsoft.com/office/drawing/2014/main" id="{6C3F3950-5922-3433-4F27-46D8922A9656}"/>
+                <a16:creationId xmlns:a16="http://schemas.microsoft.com/office/drawing/2014/main" id="{E1624D06-B4F5-4B15-5873-6A8E33D17896}"/>
               </a:ext>
             </a:extLst>
           </p:cNvPr>
@@ -10189,7 +10312,7 @@
           <p:cNvPr id="5" name="图片 4">
             <a:extLst>
               <a:ext uri="{FF2B5EF4-FFF2-40B4-BE49-F238E27FC236}">
-                <a16:creationId xmlns:a16="http://schemas.microsoft.com/office/drawing/2014/main" id="{33F51C6B-CE5F-EC90-9AEF-1A9035643450}"/>
+                <a16:creationId xmlns:a16="http://schemas.microsoft.com/office/drawing/2014/main" id="{074DC9D3-7C3D-5409-B347-9D7BAC20970A}"/>
               </a:ext>
             </a:extLst>
           </p:cNvPr>
@@ -10225,7 +10348,7 @@
           <p:cNvPr id="6" name="文本框 5">
             <a:extLst>
               <a:ext uri="{FF2B5EF4-FFF2-40B4-BE49-F238E27FC236}">
-                <a16:creationId xmlns:a16="http://schemas.microsoft.com/office/drawing/2014/main" id="{C6F582B0-D5F7-56F3-846D-19F96428DA5A}"/>
+                <a16:creationId xmlns:a16="http://schemas.microsoft.com/office/drawing/2014/main" id="{1B01436A-92EC-55AB-EBB5-D69E0309EE14}"/>
               </a:ext>
             </a:extLst>
           </p:cNvPr>
@@ -10283,7 +10406,7 @@
     </p:spTree>
     <p:extLst>
       <p:ext uri="{BB962C8B-B14F-4D97-AF65-F5344CB8AC3E}">
-        <p14:creationId xmlns:p14="http://schemas.microsoft.com/office/powerpoint/2010/main" val="1573504635"/>
+        <p14:creationId xmlns:p14="http://schemas.microsoft.com/office/powerpoint/2010/main" val="4105969196"/>
       </p:ext>
     </p:extLst>
   </p:cSld>
@@ -10323,7 +10446,7 @@
           <p:cNvPr id="2" name="矩形 1">
             <a:extLst>
               <a:ext uri="{FF2B5EF4-FFF2-40B4-BE49-F238E27FC236}">
-                <a16:creationId xmlns:a16="http://schemas.microsoft.com/office/drawing/2014/main" id="{0DACDA9B-A548-98E3-FFCC-8C15DAB52A84}"/>
+                <a16:creationId xmlns:a16="http://schemas.microsoft.com/office/drawing/2014/main" id="{073B1C47-21D4-E7FE-65A9-6219171AB21F}"/>
               </a:ext>
             </a:extLst>
           </p:cNvPr>
@@ -10391,7 +10514,7 @@
           <p:cNvPr id="3" name="文本框 2">
             <a:extLst>
               <a:ext uri="{FF2B5EF4-FFF2-40B4-BE49-F238E27FC236}">
-                <a16:creationId xmlns:a16="http://schemas.microsoft.com/office/drawing/2014/main" id="{ED688E3C-F7D2-9884-6B84-3B19D567BBB0}"/>
+                <a16:creationId xmlns:a16="http://schemas.microsoft.com/office/drawing/2014/main" id="{FD8E5EC4-1118-EBD1-9142-013491960735}"/>
               </a:ext>
             </a:extLst>
           </p:cNvPr>
@@ -10435,7 +10558,7 @@
           <p:cNvPr id="4" name="文本框 3">
             <a:extLst>
               <a:ext uri="{FF2B5EF4-FFF2-40B4-BE49-F238E27FC236}">
-                <a16:creationId xmlns:a16="http://schemas.microsoft.com/office/drawing/2014/main" id="{D4210C32-60FB-6D40-A877-A408E4C3323B}"/>
+                <a16:creationId xmlns:a16="http://schemas.microsoft.com/office/drawing/2014/main" id="{6B0B669D-E72C-CCB8-5B98-7D00DB7D288B}"/>
               </a:ext>
             </a:extLst>
           </p:cNvPr>
@@ -10937,7 +11060,7 @@
     </p:spTree>
     <p:extLst>
       <p:ext uri="{BB962C8B-B14F-4D97-AF65-F5344CB8AC3E}">
-        <p14:creationId xmlns:p14="http://schemas.microsoft.com/office/powerpoint/2010/main" val="1997281490"/>
+        <p14:creationId xmlns:p14="http://schemas.microsoft.com/office/powerpoint/2010/main" val="348117488"/>
       </p:ext>
     </p:extLst>
   </p:cSld>
@@ -10977,7 +11100,7 @@
           <p:cNvPr id="2" name="矩形 1">
             <a:extLst>
               <a:ext uri="{FF2B5EF4-FFF2-40B4-BE49-F238E27FC236}">
-                <a16:creationId xmlns:a16="http://schemas.microsoft.com/office/drawing/2014/main" id="{9D1B7198-0D50-5FFA-C7DD-7AF913CDB8E4}"/>
+                <a16:creationId xmlns:a16="http://schemas.microsoft.com/office/drawing/2014/main" id="{A8BA8628-8DCF-7D5B-A09D-80C80CC1E468}"/>
               </a:ext>
             </a:extLst>
           </p:cNvPr>
@@ -11045,7 +11168,7 @@
           <p:cNvPr id="3" name="文本框 2">
             <a:extLst>
               <a:ext uri="{FF2B5EF4-FFF2-40B4-BE49-F238E27FC236}">
-                <a16:creationId xmlns:a16="http://schemas.microsoft.com/office/drawing/2014/main" id="{BC3E9AA5-CCFB-6910-A606-6B37ABEA34DC}"/>
+                <a16:creationId xmlns:a16="http://schemas.microsoft.com/office/drawing/2014/main" id="{A4A50FE6-4871-079F-56CA-4A6A66BD4715}"/>
               </a:ext>
             </a:extLst>
           </p:cNvPr>
@@ -11105,7 +11228,7 @@
           <p:cNvPr id="5" name="图片 4">
             <a:extLst>
               <a:ext uri="{FF2B5EF4-FFF2-40B4-BE49-F238E27FC236}">
-                <a16:creationId xmlns:a16="http://schemas.microsoft.com/office/drawing/2014/main" id="{33604C37-0D3F-94F2-711C-CD15C1A21DBD}"/>
+                <a16:creationId xmlns:a16="http://schemas.microsoft.com/office/drawing/2014/main" id="{FD36BC64-8576-433E-C481-636264CC8A32}"/>
               </a:ext>
             </a:extLst>
           </p:cNvPr>
@@ -11141,7 +11264,7 @@
           <p:cNvPr id="6" name="文本框 5">
             <a:extLst>
               <a:ext uri="{FF2B5EF4-FFF2-40B4-BE49-F238E27FC236}">
-                <a16:creationId xmlns:a16="http://schemas.microsoft.com/office/drawing/2014/main" id="{AE6E091D-D330-DBA6-0302-50DA17915674}"/>
+                <a16:creationId xmlns:a16="http://schemas.microsoft.com/office/drawing/2014/main" id="{2BB4CE34-A951-A81A-A6A5-61E1678D5B96}"/>
               </a:ext>
             </a:extLst>
           </p:cNvPr>
@@ -11421,7 +11544,7 @@
     </p:spTree>
     <p:extLst>
       <p:ext uri="{BB962C8B-B14F-4D97-AF65-F5344CB8AC3E}">
-        <p14:creationId xmlns:p14="http://schemas.microsoft.com/office/powerpoint/2010/main" val="4215671574"/>
+        <p14:creationId xmlns:p14="http://schemas.microsoft.com/office/powerpoint/2010/main" val="281012701"/>
       </p:ext>
     </p:extLst>
   </p:cSld>
